--- a/PermaneIA-Apresentacao.pptx
+++ b/PermaneIA-Apresentacao.pptx
@@ -1999,7 +1999,46 @@
         </p:nvSpPr>
         <p:spPr>
           <a:xfrm>
-            <a:off x="640080" y="5943600"/>
+            <a:off x="640080" y="5623560"/>
+            <a:ext cx="10972800" cy="365760"/>
+          </a:xfrm>
+          <a:prstGeom prst="rect">
+            <a:avLst/>
+          </a:prstGeom>
+          <a:noFill/>
+          <a:ln/>
+        </p:spPr>
+        <p:txBody>
+          <a:bodyPr wrap="square" rtlCol="0" anchor="ctr"/>
+          <a:lstStyle/>
+          <a:p>
+            <a:pPr indent="0" marL="0">
+              <a:buNone/>
+            </a:pPr>
+            <a:r>
+              <a:rPr lang="en-US" sz="1300" dirty="0">
+                <a:solidFill>
+                  <a:srgbClr val="9FADBE"/>
+                </a:solidFill>
+                <a:latin typeface="Verdana" pitchFamily="34" charset="0"/>
+                <a:ea typeface="Verdana" pitchFamily="34" charset="-122"/>
+                <a:cs typeface="Verdana" pitchFamily="34" charset="-120"/>
+              </a:rPr>
+              <a:t>Camila Pereira Raimundo · Fabrício Júnio Almeida Dias · Kauã Limão Nunes · Luan Padilha Miranda</a:t>
+            </a:r>
+            <a:endParaRPr lang="en-US" sz="1300" dirty="0"/>
+          </a:p>
+        </p:txBody>
+      </p:sp>
+      <p:sp>
+        <p:nvSpPr>
+          <p:cNvPr id="7" name="Text 5"/>
+          <p:cNvSpPr/>
+          <p:nvPr/>
+        </p:nvSpPr>
+        <p:spPr>
+          <a:xfrm>
+            <a:off x="640080" y="6035040"/>
             <a:ext cx="10058400" cy="365760"/>
           </a:xfrm>
           <a:prstGeom prst="rect">
@@ -3673,6 +3712,45 @@
       <p:sp>
         <p:nvSpPr>
           <p:cNvPr id="7" name="Text 5"/>
+          <p:cNvSpPr/>
+          <p:nvPr/>
+        </p:nvSpPr>
+        <p:spPr>
+          <a:xfrm>
+            <a:off x="640080" y="5623560"/>
+            <a:ext cx="10972800" cy="365760"/>
+          </a:xfrm>
+          <a:prstGeom prst="rect">
+            <a:avLst/>
+          </a:prstGeom>
+          <a:noFill/>
+          <a:ln/>
+        </p:spPr>
+        <p:txBody>
+          <a:bodyPr wrap="square" rtlCol="0" anchor="ctr"/>
+          <a:lstStyle/>
+          <a:p>
+            <a:pPr indent="0" marL="0">
+              <a:buNone/>
+            </a:pPr>
+            <a:r>
+              <a:rPr lang="en-US" sz="1250" dirty="0">
+                <a:solidFill>
+                  <a:srgbClr val="9FADBE"/>
+                </a:solidFill>
+                <a:latin typeface="Verdana" pitchFamily="34" charset="0"/>
+                <a:ea typeface="Verdana" pitchFamily="34" charset="-122"/>
+                <a:cs typeface="Verdana" pitchFamily="34" charset="-120"/>
+              </a:rPr>
+              <a:t>Camila Pereira Raimundo · Fabrício Júnio Almeida Dias · Kauã Limão Nunes · Luan Padilha Miranda</a:t>
+            </a:r>
+            <a:endParaRPr lang="en-US" sz="1250" dirty="0"/>
+          </a:p>
+        </p:txBody>
+      </p:sp>
+      <p:sp>
+        <p:nvSpPr>
+          <p:cNvPr id="8" name="Text 6"/>
           <p:cNvSpPr/>
           <p:nvPr/>
         </p:nvSpPr>
@@ -9364,7 +9442,7 @@
                 <a:ea typeface="Verdana" pitchFamily="34" charset="-122"/>
                 <a:cs typeface="Verdana" pitchFamily="34" charset="-120"/>
               </a:rPr>
-              <a:t>1.798</a:t>
+              <a:t>21/21</a:t>
             </a:r>
             <a:endParaRPr lang="en-US" sz="3400" dirty="0"/>
           </a:p>
@@ -9403,7 +9481,7 @@
                 <a:ea typeface="Verdana" pitchFamily="34" charset="-122"/>
                 <a:cs typeface="Verdana" pitchFamily="34" charset="-120"/>
               </a:rPr>
-              <a:t>testes automatizados</a:t>
+              <a:t>casos da bateria adversarial de barreiras</a:t>
             </a:r>
             <a:endParaRPr lang="en-US" sz="1100" dirty="0"/>
           </a:p>
@@ -10533,7 +10611,7 @@
                           <a:ea typeface="Verdana" pitchFamily="34" charset="-122"/>
                           <a:cs typeface="Verdana" pitchFamily="34" charset="-120"/>
                         </a:rPr>
-                        <a:t>Cota diária acaba; exigiu um modo de degradação</a:t>
+                        <a:t>Cota da linha flash acaba; versões são aposentadas</a:t>
                       </a:r>
                       <a:endParaRPr lang="en-US" sz="1200" dirty="0">
                         <a:latin typeface="Verdana" charset="0"/>
@@ -10739,7 +10817,7 @@
                           <a:ea typeface="Verdana" pitchFamily="34" charset="-122"/>
                           <a:cs typeface="Verdana" pitchFamily="34" charset="-120"/>
                         </a:rPr>
-                        <a:t>API paga por token; descartado como motor</a:t>
+                        <a:t>Sem API gratuita e sem endpoint de embeddings</a:t>
                       </a:r>
                       <a:endParaRPr lang="en-US" sz="1200" dirty="0">
                         <a:latin typeface="Verdana" charset="0"/>

--- a/PermaneIA-Apresentacao.pptx
+++ b/PermaneIA-Apresentacao.pptx
@@ -17,9 +17,10 @@
     <p:sldId id="265" r:id="rId11"/>
     <p:sldId id="266" r:id="rId12"/>
     <p:sldId id="267" r:id="rId13"/>
+    <p:sldId id="268" r:id="rId14"/>
   </p:sldIdLst>
   <p:notesMasterIdLst>
-    <p:notesMasterId r:id="rId14"/>
+    <p:notesMasterId r:id="rId15"/>
   </p:notesMasterIdLst>
   <p:sldSz cx="12191695" cy="6858000"/>
   <p:notesSz cx="6858000" cy="12191695"/>
@@ -801,6 +802,94 @@
             <a:fld id="{F7021451-1387-4CA6-816F-3879F97B5CBC}" type="slidenum">
               <a:rPr lang="en-US"/>
               <a:t>12</a:t>
+            </a:fld>
+            <a:endParaRPr lang="en-US"/>
+          </a:p>
+        </p:txBody>
+      </p:sp>
+    </p:spTree>
+    <p:extLst>
+      <p:ext uri="{BB962C8B-B14F-4D97-AF65-F5344CB8AC3E}">
+        <p14:creationId xmlns:p14="http://schemas.microsoft.com/office/powerpoint/2010/main" val="1024086991"/>
+      </p:ext>
+    </p:extLst>
+  </p:cSld>
+  <p:clrMapOvr>
+    <a:masterClrMapping/>
+  </p:clrMapOvr>
+</p:notes>
+</file>
+
+<file path=ppt/notesSlides/notesSlide13.xml><?xml version="1.0" encoding="utf-8"?>
+<p:notes xmlns:a="http://schemas.openxmlformats.org/drawingml/2006/main" xmlns:r="http://schemas.openxmlformats.org/officeDocument/2006/relationships" xmlns:p="http://schemas.openxmlformats.org/presentationml/2006/main">
+  <p:cSld>
+    <p:spTree>
+      <p:nvGrpSpPr>
+        <p:cNvPr id="1" name=""/>
+        <p:cNvGrpSpPr/>
+        <p:nvPr/>
+      </p:nvGrpSpPr>
+      <p:grpSpPr>
+        <a:xfrm>
+          <a:off x="0" y="0"/>
+          <a:ext cx="0" cy="0"/>
+          <a:chOff x="0" y="0"/>
+          <a:chExt cx="0" cy="0"/>
+        </a:xfrm>
+      </p:grpSpPr>
+      <p:sp>
+        <p:nvSpPr>
+          <p:cNvPr id="2" name="Slide Image Placeholder 1"/>
+          <p:cNvSpPr>
+            <a:spLocks noGrp="1" noRot="1" noChangeAspect="1"/>
+          </p:cNvSpPr>
+          <p:nvPr>
+            <p:ph type="sldImg"/>
+          </p:nvPr>
+        </p:nvSpPr>
+        <p:spPr/>
+      </p:sp>
+      <p:sp>
+        <p:nvSpPr>
+          <p:cNvPr id="3" name="Notes Placeholder 2"/>
+          <p:cNvSpPr>
+            <a:spLocks noGrp="1"/>
+          </p:cNvSpPr>
+          <p:nvPr>
+            <p:ph type="body" idx="1"/>
+          </p:nvPr>
+        </p:nvSpPr>
+        <p:spPr/>
+        <p:txBody>
+          <a:bodyPr/>
+          <a:lstStyle/>
+          <a:p>
+            <a:r>
+              <a:rPr lang="en-US" dirty="0"/>
+              <a:t/>
+            </a:r>
+            <a:endParaRPr lang="en-US" dirty="0"/>
+          </a:p>
+        </p:txBody>
+      </p:sp>
+      <p:sp>
+        <p:nvSpPr>
+          <p:cNvPr id="4" name="Slide Number Placeholder 3"/>
+          <p:cNvSpPr>
+            <a:spLocks noGrp="1"/>
+          </p:cNvSpPr>
+          <p:nvPr>
+            <p:ph type="sldNum" sz="quarter" idx="10"/>
+          </p:nvPr>
+        </p:nvSpPr>
+        <p:spPr/>
+        <p:txBody>
+          <a:bodyPr/>
+          <a:lstStyle/>
+          <a:p>
+            <a:fld id="{F7021451-1387-4CA6-816F-3879F97B5CBC}" type="slidenum">
+              <a:rPr lang="en-US"/>
+              <a:t>13</a:t>
             </a:fld>
             <a:endParaRPr lang="en-US"/>
           </a:p>
@@ -2134,7 +2223,7 @@
                 <a:ea typeface="Verdana" pitchFamily="34" charset="-122"/>
                 <a:cs typeface="Verdana" pitchFamily="34" charset="-120"/>
               </a:rPr>
-              <a:t>ÉTICA</a:t>
+              <a:t>FERRAMENTAS DE IA GENERATIVA</a:t>
             </a:r>
             <a:endParaRPr lang="en-US" sz="1100" dirty="0"/>
           </a:p>
@@ -2173,88 +2262,1495 @@
                 <a:ea typeface="Verdana" pitchFamily="34" charset="-122"/>
                 <a:cs typeface="Verdana" pitchFamily="34" charset="-120"/>
               </a:rPr>
-              <a:t>Sobre o uso de IA neste trabalho</a:t>
+              <a:t>O que cada uma resolveu, e onde falhou</a:t>
             </a:r>
             <a:endParaRPr lang="en-US" sz="2800" dirty="0"/>
           </a:p>
         </p:txBody>
       </p:sp>
-      <p:sp>
-        <p:nvSpPr>
-          <p:cNvPr id="4" name="Shape 2"/>
-          <p:cNvSpPr/>
-          <p:nvPr/>
-        </p:nvSpPr>
-        <p:spPr>
-          <a:xfrm>
-            <a:off x="640080" y="1828800"/>
-            <a:ext cx="5303520" cy="3200400"/>
-          </a:xfrm>
-          <a:prstGeom prst="roundRect">
-            <a:avLst>
-              <a:gd name="adj" fmla="val 2286"/>
-            </a:avLst>
-          </a:prstGeom>
-          <a:solidFill>
-            <a:srgbClr val="141B26"/>
-          </a:solidFill>
-          <a:ln w="12700">
-            <a:solidFill>
-              <a:srgbClr val="2B3849"/>
-            </a:solidFill>
-            <a:prstDash val="solid"/>
-          </a:ln>
-        </p:spPr>
-      </p:sp>
-      <p:sp>
-        <p:nvSpPr>
-          <p:cNvPr id="5" name="Text 3"/>
-          <p:cNvSpPr/>
-          <p:nvPr/>
-        </p:nvSpPr>
-        <p:spPr>
-          <a:xfrm>
-            <a:off x="914400" y="2057400"/>
-            <a:ext cx="4754880" cy="365760"/>
-          </a:xfrm>
-          <a:prstGeom prst="rect">
-            <a:avLst/>
-          </a:prstGeom>
-          <a:noFill/>
-          <a:ln/>
-        </p:spPr>
-        <p:txBody>
-          <a:bodyPr wrap="square" rtlCol="0" anchor="ctr"/>
-          <a:lstStyle/>
-          <a:p>
-            <a:pPr indent="0" marL="0">
-              <a:buNone/>
-            </a:pPr>
-            <a:r>
-              <a:rPr lang="en-US" sz="1600" b="1" dirty="0">
-                <a:solidFill>
-                  <a:srgbClr val="45BD8A"/>
-                </a:solidFill>
-                <a:latin typeface="Verdana" pitchFamily="34" charset="0"/>
-                <a:ea typeface="Verdana" pitchFamily="34" charset="-122"/>
-                <a:cs typeface="Verdana" pitchFamily="34" charset="-120"/>
-              </a:rPr>
-              <a:t>Feito com apoio de IA</a:t>
-            </a:r>
-            <a:endParaRPr lang="en-US" sz="1600" dirty="0"/>
-          </a:p>
-        </p:txBody>
-      </p:sp>
-      <p:sp>
-        <p:nvSpPr>
-          <p:cNvPr id="6" name="Text 4"/>
-          <p:cNvSpPr/>
-          <p:nvPr/>
-        </p:nvSpPr>
-        <p:spPr>
-          <a:xfrm>
-            <a:off x="914400" y="2560320"/>
-            <a:ext cx="4754880" cy="2194560"/>
+      <p:graphicFrame>
+        <p:nvGraphicFramePr>
+          <p:cNvPr id="11" name="Table 0"/>
+          <p:cNvGraphicFramePr>
+            <a:graphicFrameLocks noGrp="1"/>
+          </p:cNvGraphicFramePr>
+          <p:nvPr>
+            <p:extLst>
+              <p:ext uri="{D42A27DB-BD31-4B8C-83A1-F6EECF244321}">
+                <p14:modId xmlns:p14="http://schemas.microsoft.com/office/powerpoint/2010/main" val="1579011935"/>
+              </p:ext>
+            </p:extLst>
+          </p:nvPr>
+        </p:nvGraphicFramePr>
+        <p:xfrm>
+          <a:off x="640080" y="1828800"/>
+          <a:ext cx="10881360" cy="914400"/>
+        </p:xfrm>
+        <a:graphic>
+          <a:graphicData uri="http://schemas.openxmlformats.org/drawingml/2006/table">
+            <a:tbl>
+              <a:tblPr/>
+              <a:tblGrid>
+                <a:gridCol w="2011680"/>
+                <a:gridCol w="4206240"/>
+                <a:gridCol w="4663440"/>
+              </a:tblGrid>
+              <a:tr h="475488">
+                <a:tc>
+                  <a:txBody>
+                    <a:bodyPr/>
+                    <a:lstStyle/>
+                    <a:p>
+                      <a:pPr indent="0" marL="0">
+                        <a:buNone/>
+                      </a:pPr>
+                      <a:r>
+                        <a:rPr lang="en-US" sz="1200" b="1" dirty="0">
+                          <a:solidFill>
+                            <a:srgbClr val="FFFFFF"/>
+                          </a:solidFill>
+                          <a:latin typeface="Verdana" pitchFamily="34" charset="0"/>
+                          <a:ea typeface="Verdana" pitchFamily="34" charset="-122"/>
+                          <a:cs typeface="Verdana" pitchFamily="34" charset="-120"/>
+                        </a:rPr>
+                        <a:t>Ferramenta</a:t>
+                      </a:r>
+                      <a:endParaRPr lang="en-US" sz="1200" dirty="0">
+                        <a:latin typeface="Verdana" charset="0"/>
+                        <a:ea typeface="Verdana" charset="0"/>
+                        <a:cs typeface="Verdana" charset="0"/>
+                      </a:endParaRPr>
+                    </a:p>
+                  </a:txBody>
+                  <a:tcPr marL="91440" marR="91440" marT="45720" marB="45720" anchor="ctr">
+                    <a:lnL w="12700" cap="flat" cmpd="sng" algn="ctr">
+                      <a:solidFill>
+                        <a:srgbClr val="2B3849"/>
+                      </a:solidFill>
+                      <a:prstDash val="solid"/>
+                      <a:round/>
+                      <a:headEnd type="none" w="med" len="med"/>
+                      <a:tailEnd type="none" w="med" len="med"/>
+                    </a:lnL>
+                    <a:lnR w="12700" cap="flat" cmpd="sng" algn="ctr">
+                      <a:solidFill>
+                        <a:srgbClr val="2B3849"/>
+                      </a:solidFill>
+                      <a:prstDash val="solid"/>
+                      <a:round/>
+                      <a:headEnd type="none" w="med" len="med"/>
+                      <a:tailEnd type="none" w="med" len="med"/>
+                    </a:lnR>
+                    <a:lnT w="12700" cap="flat" cmpd="sng" algn="ctr">
+                      <a:solidFill>
+                        <a:srgbClr val="2B3849"/>
+                      </a:solidFill>
+                      <a:prstDash val="solid"/>
+                      <a:round/>
+                      <a:headEnd type="none" w="med" len="med"/>
+                      <a:tailEnd type="none" w="med" len="med"/>
+                    </a:lnT>
+                    <a:lnB w="12700" cap="flat" cmpd="sng" algn="ctr">
+                      <a:solidFill>
+                        <a:srgbClr val="2B3849"/>
+                      </a:solidFill>
+                      <a:prstDash val="solid"/>
+                      <a:round/>
+                      <a:headEnd type="none" w="med" len="med"/>
+                      <a:tailEnd type="none" w="med" len="med"/>
+                    </a:lnB>
+                    <a:solidFill>
+                      <a:srgbClr val="141B26"/>
+                    </a:solidFill>
+                  </a:tcPr>
+                </a:tc>
+                <a:tc>
+                  <a:txBody>
+                    <a:bodyPr/>
+                    <a:lstStyle/>
+                    <a:p>
+                      <a:pPr indent="0" marL="0">
+                        <a:buNone/>
+                      </a:pPr>
+                      <a:r>
+                        <a:rPr lang="en-US" sz="1200" b="1" dirty="0">
+                          <a:solidFill>
+                            <a:srgbClr val="FFFFFF"/>
+                          </a:solidFill>
+                          <a:latin typeface="Verdana" pitchFamily="34" charset="0"/>
+                          <a:ea typeface="Verdana" pitchFamily="34" charset="-122"/>
+                          <a:cs typeface="Verdana" pitchFamily="34" charset="-120"/>
+                        </a:rPr>
+                        <a:t>Uso no projeto</a:t>
+                      </a:r>
+                      <a:endParaRPr lang="en-US" sz="1200" dirty="0">
+                        <a:latin typeface="Verdana" charset="0"/>
+                        <a:ea typeface="Verdana" charset="0"/>
+                        <a:cs typeface="Verdana" charset="0"/>
+                      </a:endParaRPr>
+                    </a:p>
+                  </a:txBody>
+                  <a:tcPr marL="91440" marR="91440" marT="45720" marB="45720" anchor="ctr">
+                    <a:lnL w="12700" cap="flat" cmpd="sng" algn="ctr">
+                      <a:solidFill>
+                        <a:srgbClr val="2B3849"/>
+                      </a:solidFill>
+                      <a:prstDash val="solid"/>
+                      <a:round/>
+                      <a:headEnd type="none" w="med" len="med"/>
+                      <a:tailEnd type="none" w="med" len="med"/>
+                    </a:lnL>
+                    <a:lnR w="12700" cap="flat" cmpd="sng" algn="ctr">
+                      <a:solidFill>
+                        <a:srgbClr val="2B3849"/>
+                      </a:solidFill>
+                      <a:prstDash val="solid"/>
+                      <a:round/>
+                      <a:headEnd type="none" w="med" len="med"/>
+                      <a:tailEnd type="none" w="med" len="med"/>
+                    </a:lnR>
+                    <a:lnT w="12700" cap="flat" cmpd="sng" algn="ctr">
+                      <a:solidFill>
+                        <a:srgbClr val="2B3849"/>
+                      </a:solidFill>
+                      <a:prstDash val="solid"/>
+                      <a:round/>
+                      <a:headEnd type="none" w="med" len="med"/>
+                      <a:tailEnd type="none" w="med" len="med"/>
+                    </a:lnT>
+                    <a:lnB w="12700" cap="flat" cmpd="sng" algn="ctr">
+                      <a:solidFill>
+                        <a:srgbClr val="2B3849"/>
+                      </a:solidFill>
+                      <a:prstDash val="solid"/>
+                      <a:round/>
+                      <a:headEnd type="none" w="med" len="med"/>
+                      <a:tailEnd type="none" w="med" len="med"/>
+                    </a:lnB>
+                    <a:solidFill>
+                      <a:srgbClr val="141B26"/>
+                    </a:solidFill>
+                  </a:tcPr>
+                </a:tc>
+                <a:tc>
+                  <a:txBody>
+                    <a:bodyPr/>
+                    <a:lstStyle/>
+                    <a:p>
+                      <a:pPr indent="0" marL="0">
+                        <a:buNone/>
+                      </a:pPr>
+                      <a:r>
+                        <a:rPr lang="en-US" sz="1200" b="1" dirty="0">
+                          <a:solidFill>
+                            <a:srgbClr val="FFFFFF"/>
+                          </a:solidFill>
+                          <a:latin typeface="Verdana" pitchFamily="34" charset="0"/>
+                          <a:ea typeface="Verdana" pitchFamily="34" charset="-122"/>
+                          <a:cs typeface="Verdana" pitchFamily="34" charset="-120"/>
+                        </a:rPr>
+                        <a:t>Limitação observada</a:t>
+                      </a:r>
+                      <a:endParaRPr lang="en-US" sz="1200" dirty="0">
+                        <a:latin typeface="Verdana" charset="0"/>
+                        <a:ea typeface="Verdana" charset="0"/>
+                        <a:cs typeface="Verdana" charset="0"/>
+                      </a:endParaRPr>
+                    </a:p>
+                  </a:txBody>
+                  <a:tcPr marL="91440" marR="91440" marT="45720" marB="45720" anchor="ctr">
+                    <a:lnL w="12700" cap="flat" cmpd="sng" algn="ctr">
+                      <a:solidFill>
+                        <a:srgbClr val="2B3849"/>
+                      </a:solidFill>
+                      <a:prstDash val="solid"/>
+                      <a:round/>
+                      <a:headEnd type="none" w="med" len="med"/>
+                      <a:tailEnd type="none" w="med" len="med"/>
+                    </a:lnL>
+                    <a:lnR w="12700" cap="flat" cmpd="sng" algn="ctr">
+                      <a:solidFill>
+                        <a:srgbClr val="2B3849"/>
+                      </a:solidFill>
+                      <a:prstDash val="solid"/>
+                      <a:round/>
+                      <a:headEnd type="none" w="med" len="med"/>
+                      <a:tailEnd type="none" w="med" len="med"/>
+                    </a:lnR>
+                    <a:lnT w="12700" cap="flat" cmpd="sng" algn="ctr">
+                      <a:solidFill>
+                        <a:srgbClr val="2B3849"/>
+                      </a:solidFill>
+                      <a:prstDash val="solid"/>
+                      <a:round/>
+                      <a:headEnd type="none" w="med" len="med"/>
+                      <a:tailEnd type="none" w="med" len="med"/>
+                    </a:lnT>
+                    <a:lnB w="12700" cap="flat" cmpd="sng" algn="ctr">
+                      <a:solidFill>
+                        <a:srgbClr val="2B3849"/>
+                      </a:solidFill>
+                      <a:prstDash val="solid"/>
+                      <a:round/>
+                      <a:headEnd type="none" w="med" len="med"/>
+                      <a:tailEnd type="none" w="med" len="med"/>
+                    </a:lnB>
+                    <a:solidFill>
+                      <a:srgbClr val="141B26"/>
+                    </a:solidFill>
+                  </a:tcPr>
+                </a:tc>
+              </a:tr>
+              <a:tr h="475488">
+                <a:tc>
+                  <a:txBody>
+                    <a:bodyPr/>
+                    <a:lstStyle/>
+                    <a:p>
+                      <a:pPr indent="0" marL="0">
+                        <a:buNone/>
+                      </a:pPr>
+                      <a:r>
+                        <a:rPr lang="en-US" sz="1200" dirty="0">
+                          <a:solidFill>
+                            <a:srgbClr val="9FADBE"/>
+                          </a:solidFill>
+                          <a:latin typeface="Verdana" pitchFamily="34" charset="0"/>
+                          <a:ea typeface="Verdana" pitchFamily="34" charset="-122"/>
+                          <a:cs typeface="Verdana" pitchFamily="34" charset="-120"/>
+                        </a:rPr>
+                        <a:t>ChatGPT</a:t>
+                      </a:r>
+                      <a:endParaRPr lang="en-US" sz="1200" dirty="0">
+                        <a:latin typeface="Verdana" charset="0"/>
+                        <a:ea typeface="Verdana" charset="0"/>
+                        <a:cs typeface="Verdana" charset="0"/>
+                      </a:endParaRPr>
+                    </a:p>
+                  </a:txBody>
+                  <a:tcPr marL="91440" marR="91440" marT="45720" marB="45720" anchor="ctr">
+                    <a:lnL w="12700" cap="flat" cmpd="sng" algn="ctr">
+                      <a:solidFill>
+                        <a:srgbClr val="2B3849"/>
+                      </a:solidFill>
+                      <a:prstDash val="solid"/>
+                      <a:round/>
+                      <a:headEnd type="none" w="med" len="med"/>
+                      <a:tailEnd type="none" w="med" len="med"/>
+                    </a:lnL>
+                    <a:lnR w="12700" cap="flat" cmpd="sng" algn="ctr">
+                      <a:solidFill>
+                        <a:srgbClr val="2B3849"/>
+                      </a:solidFill>
+                      <a:prstDash val="solid"/>
+                      <a:round/>
+                      <a:headEnd type="none" w="med" len="med"/>
+                      <a:tailEnd type="none" w="med" len="med"/>
+                    </a:lnR>
+                    <a:lnT w="12700" cap="flat" cmpd="sng" algn="ctr">
+                      <a:solidFill>
+                        <a:srgbClr val="2B3849"/>
+                      </a:solidFill>
+                      <a:prstDash val="solid"/>
+                      <a:round/>
+                      <a:headEnd type="none" w="med" len="med"/>
+                      <a:tailEnd type="none" w="med" len="med"/>
+                    </a:lnT>
+                    <a:lnB w="12700" cap="flat" cmpd="sng" algn="ctr">
+                      <a:solidFill>
+                        <a:srgbClr val="2B3849"/>
+                      </a:solidFill>
+                      <a:prstDash val="solid"/>
+                      <a:round/>
+                      <a:headEnd type="none" w="med" len="med"/>
+                      <a:tailEnd type="none" w="med" len="med"/>
+                    </a:lnB>
+                    <a:solidFill>
+                      <a:srgbClr val="141B26"/>
+                    </a:solidFill>
+                  </a:tcPr>
+                </a:tc>
+                <a:tc>
+                  <a:txBody>
+                    <a:bodyPr/>
+                    <a:lstStyle/>
+                    <a:p>
+                      <a:pPr indent="0" marL="0">
+                        <a:buNone/>
+                      </a:pPr>
+                      <a:r>
+                        <a:rPr lang="en-US" sz="1200" dirty="0">
+                          <a:solidFill>
+                            <a:srgbClr val="9FADBE"/>
+                          </a:solidFill>
+                          <a:latin typeface="Verdana" pitchFamily="34" charset="0"/>
+                          <a:ea typeface="Verdana" pitchFamily="34" charset="-122"/>
+                          <a:cs typeface="Verdana" pitchFamily="34" charset="-120"/>
+                        </a:rPr>
+                        <a:t>Brainstorm de modelagem e critérios</a:t>
+                      </a:r>
+                      <a:endParaRPr lang="en-US" sz="1200" dirty="0">
+                        <a:latin typeface="Verdana" charset="0"/>
+                        <a:ea typeface="Verdana" charset="0"/>
+                        <a:cs typeface="Verdana" charset="0"/>
+                      </a:endParaRPr>
+                    </a:p>
+                  </a:txBody>
+                  <a:tcPr marL="91440" marR="91440" marT="45720" marB="45720" anchor="ctr">
+                    <a:lnL w="12700" cap="flat" cmpd="sng" algn="ctr">
+                      <a:solidFill>
+                        <a:srgbClr val="2B3849"/>
+                      </a:solidFill>
+                      <a:prstDash val="solid"/>
+                      <a:round/>
+                      <a:headEnd type="none" w="med" len="med"/>
+                      <a:tailEnd type="none" w="med" len="med"/>
+                    </a:lnL>
+                    <a:lnR w="12700" cap="flat" cmpd="sng" algn="ctr">
+                      <a:solidFill>
+                        <a:srgbClr val="2B3849"/>
+                      </a:solidFill>
+                      <a:prstDash val="solid"/>
+                      <a:round/>
+                      <a:headEnd type="none" w="med" len="med"/>
+                      <a:tailEnd type="none" w="med" len="med"/>
+                    </a:lnR>
+                    <a:lnT w="12700" cap="flat" cmpd="sng" algn="ctr">
+                      <a:solidFill>
+                        <a:srgbClr val="2B3849"/>
+                      </a:solidFill>
+                      <a:prstDash val="solid"/>
+                      <a:round/>
+                      <a:headEnd type="none" w="med" len="med"/>
+                      <a:tailEnd type="none" w="med" len="med"/>
+                    </a:lnT>
+                    <a:lnB w="12700" cap="flat" cmpd="sng" algn="ctr">
+                      <a:solidFill>
+                        <a:srgbClr val="2B3849"/>
+                      </a:solidFill>
+                      <a:prstDash val="solid"/>
+                      <a:round/>
+                      <a:headEnd type="none" w="med" len="med"/>
+                      <a:tailEnd type="none" w="med" len="med"/>
+                    </a:lnB>
+                    <a:solidFill>
+                      <a:srgbClr val="141B26"/>
+                    </a:solidFill>
+                  </a:tcPr>
+                </a:tc>
+                <a:tc>
+                  <a:txBody>
+                    <a:bodyPr/>
+                    <a:lstStyle/>
+                    <a:p>
+                      <a:pPr indent="0" marL="0">
+                        <a:buNone/>
+                      </a:pPr>
+                      <a:r>
+                        <a:rPr lang="en-US" sz="1200" dirty="0">
+                          <a:solidFill>
+                            <a:srgbClr val="9FADBE"/>
+                          </a:solidFill>
+                          <a:latin typeface="Verdana" pitchFamily="34" charset="0"/>
+                          <a:ea typeface="Verdana" pitchFamily="34" charset="-122"/>
+                          <a:cs typeface="Verdana" pitchFamily="34" charset="-120"/>
+                        </a:rPr>
+                        <a:t>Sugere estruturas plausíveis, mas genéricas</a:t>
+                      </a:r>
+                      <a:endParaRPr lang="en-US" sz="1200" dirty="0">
+                        <a:latin typeface="Verdana" charset="0"/>
+                        <a:ea typeface="Verdana" charset="0"/>
+                        <a:cs typeface="Verdana" charset="0"/>
+                      </a:endParaRPr>
+                    </a:p>
+                  </a:txBody>
+                  <a:tcPr marL="91440" marR="91440" marT="45720" marB="45720" anchor="ctr">
+                    <a:lnL w="12700" cap="flat" cmpd="sng" algn="ctr">
+                      <a:solidFill>
+                        <a:srgbClr val="2B3849"/>
+                      </a:solidFill>
+                      <a:prstDash val="solid"/>
+                      <a:round/>
+                      <a:headEnd type="none" w="med" len="med"/>
+                      <a:tailEnd type="none" w="med" len="med"/>
+                    </a:lnL>
+                    <a:lnR w="12700" cap="flat" cmpd="sng" algn="ctr">
+                      <a:solidFill>
+                        <a:srgbClr val="2B3849"/>
+                      </a:solidFill>
+                      <a:prstDash val="solid"/>
+                      <a:round/>
+                      <a:headEnd type="none" w="med" len="med"/>
+                      <a:tailEnd type="none" w="med" len="med"/>
+                    </a:lnR>
+                    <a:lnT w="12700" cap="flat" cmpd="sng" algn="ctr">
+                      <a:solidFill>
+                        <a:srgbClr val="2B3849"/>
+                      </a:solidFill>
+                      <a:prstDash val="solid"/>
+                      <a:round/>
+                      <a:headEnd type="none" w="med" len="med"/>
+                      <a:tailEnd type="none" w="med" len="med"/>
+                    </a:lnT>
+                    <a:lnB w="12700" cap="flat" cmpd="sng" algn="ctr">
+                      <a:solidFill>
+                        <a:srgbClr val="2B3849"/>
+                      </a:solidFill>
+                      <a:prstDash val="solid"/>
+                      <a:round/>
+                      <a:headEnd type="none" w="med" len="med"/>
+                      <a:tailEnd type="none" w="med" len="med"/>
+                    </a:lnB>
+                    <a:solidFill>
+                      <a:srgbClr val="141B26"/>
+                    </a:solidFill>
+                  </a:tcPr>
+                </a:tc>
+              </a:tr>
+              <a:tr h="475488">
+                <a:tc>
+                  <a:txBody>
+                    <a:bodyPr/>
+                    <a:lstStyle/>
+                    <a:p>
+                      <a:pPr indent="0" marL="0">
+                        <a:buNone/>
+                      </a:pPr>
+                      <a:r>
+                        <a:rPr lang="en-US" sz="1200" dirty="0">
+                          <a:solidFill>
+                            <a:srgbClr val="9FADBE"/>
+                          </a:solidFill>
+                          <a:latin typeface="Verdana" pitchFamily="34" charset="0"/>
+                          <a:ea typeface="Verdana" pitchFamily="34" charset="-122"/>
+                          <a:cs typeface="Verdana" pitchFamily="34" charset="-120"/>
+                        </a:rPr>
+                        <a:t>Claude</a:t>
+                      </a:r>
+                      <a:endParaRPr lang="en-US" sz="1200" dirty="0">
+                        <a:latin typeface="Verdana" charset="0"/>
+                        <a:ea typeface="Verdana" charset="0"/>
+                        <a:cs typeface="Verdana" charset="0"/>
+                      </a:endParaRPr>
+                    </a:p>
+                  </a:txBody>
+                  <a:tcPr marL="91440" marR="91440" marT="45720" marB="45720" anchor="ctr">
+                    <a:lnL w="12700" cap="flat" cmpd="sng" algn="ctr">
+                      <a:solidFill>
+                        <a:srgbClr val="2B3849"/>
+                      </a:solidFill>
+                      <a:prstDash val="solid"/>
+                      <a:round/>
+                      <a:headEnd type="none" w="med" len="med"/>
+                      <a:tailEnd type="none" w="med" len="med"/>
+                    </a:lnL>
+                    <a:lnR w="12700" cap="flat" cmpd="sng" algn="ctr">
+                      <a:solidFill>
+                        <a:srgbClr val="2B3849"/>
+                      </a:solidFill>
+                      <a:prstDash val="solid"/>
+                      <a:round/>
+                      <a:headEnd type="none" w="med" len="med"/>
+                      <a:tailEnd type="none" w="med" len="med"/>
+                    </a:lnR>
+                    <a:lnT w="12700" cap="flat" cmpd="sng" algn="ctr">
+                      <a:solidFill>
+                        <a:srgbClr val="2B3849"/>
+                      </a:solidFill>
+                      <a:prstDash val="solid"/>
+                      <a:round/>
+                      <a:headEnd type="none" w="med" len="med"/>
+                      <a:tailEnd type="none" w="med" len="med"/>
+                    </a:lnT>
+                    <a:lnB w="12700" cap="flat" cmpd="sng" algn="ctr">
+                      <a:solidFill>
+                        <a:srgbClr val="2B3849"/>
+                      </a:solidFill>
+                      <a:prstDash val="solid"/>
+                      <a:round/>
+                      <a:headEnd type="none" w="med" len="med"/>
+                      <a:tailEnd type="none" w="med" len="med"/>
+                    </a:lnB>
+                    <a:solidFill>
+                      <a:srgbClr val="141B26"/>
+                    </a:solidFill>
+                  </a:tcPr>
+                </a:tc>
+                <a:tc>
+                  <a:txBody>
+                    <a:bodyPr/>
+                    <a:lstStyle/>
+                    <a:p>
+                      <a:pPr indent="0" marL="0">
+                        <a:buNone/>
+                      </a:pPr>
+                      <a:r>
+                        <a:rPr lang="en-US" sz="1200" dirty="0">
+                          <a:solidFill>
+                            <a:srgbClr val="9FADBE"/>
+                          </a:solidFill>
+                          <a:latin typeface="Verdana" pitchFamily="34" charset="0"/>
+                          <a:ea typeface="Verdana" pitchFamily="34" charset="-122"/>
+                          <a:cs typeface="Verdana" pitchFamily="34" charset="-120"/>
+                        </a:rPr>
+                        <a:t>Documentação técnica e código</a:t>
+                      </a:r>
+                      <a:endParaRPr lang="en-US" sz="1200" dirty="0">
+                        <a:latin typeface="Verdana" charset="0"/>
+                        <a:ea typeface="Verdana" charset="0"/>
+                        <a:cs typeface="Verdana" charset="0"/>
+                      </a:endParaRPr>
+                    </a:p>
+                  </a:txBody>
+                  <a:tcPr marL="91440" marR="91440" marT="45720" marB="45720" anchor="ctr">
+                    <a:lnL w="12700" cap="flat" cmpd="sng" algn="ctr">
+                      <a:solidFill>
+                        <a:srgbClr val="2B3849"/>
+                      </a:solidFill>
+                      <a:prstDash val="solid"/>
+                      <a:round/>
+                      <a:headEnd type="none" w="med" len="med"/>
+                      <a:tailEnd type="none" w="med" len="med"/>
+                    </a:lnL>
+                    <a:lnR w="12700" cap="flat" cmpd="sng" algn="ctr">
+                      <a:solidFill>
+                        <a:srgbClr val="2B3849"/>
+                      </a:solidFill>
+                      <a:prstDash val="solid"/>
+                      <a:round/>
+                      <a:headEnd type="none" w="med" len="med"/>
+                      <a:tailEnd type="none" w="med" len="med"/>
+                    </a:lnR>
+                    <a:lnT w="12700" cap="flat" cmpd="sng" algn="ctr">
+                      <a:solidFill>
+                        <a:srgbClr val="2B3849"/>
+                      </a:solidFill>
+                      <a:prstDash val="solid"/>
+                      <a:round/>
+                      <a:headEnd type="none" w="med" len="med"/>
+                      <a:tailEnd type="none" w="med" len="med"/>
+                    </a:lnT>
+                    <a:lnB w="12700" cap="flat" cmpd="sng" algn="ctr">
+                      <a:solidFill>
+                        <a:srgbClr val="2B3849"/>
+                      </a:solidFill>
+                      <a:prstDash val="solid"/>
+                      <a:round/>
+                      <a:headEnd type="none" w="med" len="med"/>
+                      <a:tailEnd type="none" w="med" len="med"/>
+                    </a:lnB>
+                    <a:solidFill>
+                      <a:srgbClr val="141B26"/>
+                    </a:solidFill>
+                  </a:tcPr>
+                </a:tc>
+                <a:tc>
+                  <a:txBody>
+                    <a:bodyPr/>
+                    <a:lstStyle/>
+                    <a:p>
+                      <a:pPr indent="0" marL="0">
+                        <a:buNone/>
+                      </a:pPr>
+                      <a:r>
+                        <a:rPr lang="en-US" sz="1200" dirty="0">
+                          <a:solidFill>
+                            <a:srgbClr val="9FADBE"/>
+                          </a:solidFill>
+                          <a:latin typeface="Verdana" pitchFamily="34" charset="0"/>
+                          <a:ea typeface="Verdana" pitchFamily="34" charset="-122"/>
+                          <a:cs typeface="Verdana" pitchFamily="34" charset="-120"/>
+                        </a:rPr>
+                        <a:t>Escreve mais do que o necessário se não for contido</a:t>
+                      </a:r>
+                      <a:endParaRPr lang="en-US" sz="1200" dirty="0">
+                        <a:latin typeface="Verdana" charset="0"/>
+                        <a:ea typeface="Verdana" charset="0"/>
+                        <a:cs typeface="Verdana" charset="0"/>
+                      </a:endParaRPr>
+                    </a:p>
+                  </a:txBody>
+                  <a:tcPr marL="91440" marR="91440" marT="45720" marB="45720" anchor="ctr">
+                    <a:lnL w="12700" cap="flat" cmpd="sng" algn="ctr">
+                      <a:solidFill>
+                        <a:srgbClr val="2B3849"/>
+                      </a:solidFill>
+                      <a:prstDash val="solid"/>
+                      <a:round/>
+                      <a:headEnd type="none" w="med" len="med"/>
+                      <a:tailEnd type="none" w="med" len="med"/>
+                    </a:lnL>
+                    <a:lnR w="12700" cap="flat" cmpd="sng" algn="ctr">
+                      <a:solidFill>
+                        <a:srgbClr val="2B3849"/>
+                      </a:solidFill>
+                      <a:prstDash val="solid"/>
+                      <a:round/>
+                      <a:headEnd type="none" w="med" len="med"/>
+                      <a:tailEnd type="none" w="med" len="med"/>
+                    </a:lnR>
+                    <a:lnT w="12700" cap="flat" cmpd="sng" algn="ctr">
+                      <a:solidFill>
+                        <a:srgbClr val="2B3849"/>
+                      </a:solidFill>
+                      <a:prstDash val="solid"/>
+                      <a:round/>
+                      <a:headEnd type="none" w="med" len="med"/>
+                      <a:tailEnd type="none" w="med" len="med"/>
+                    </a:lnT>
+                    <a:lnB w="12700" cap="flat" cmpd="sng" algn="ctr">
+                      <a:solidFill>
+                        <a:srgbClr val="2B3849"/>
+                      </a:solidFill>
+                      <a:prstDash val="solid"/>
+                      <a:round/>
+                      <a:headEnd type="none" w="med" len="med"/>
+                      <a:tailEnd type="none" w="med" len="med"/>
+                    </a:lnB>
+                    <a:solidFill>
+                      <a:srgbClr val="141B26"/>
+                    </a:solidFill>
+                  </a:tcPr>
+                </a:tc>
+              </a:tr>
+              <a:tr h="475488">
+                <a:tc>
+                  <a:txBody>
+                    <a:bodyPr/>
+                    <a:lstStyle/>
+                    <a:p>
+                      <a:pPr indent="0" marL="0">
+                        <a:buNone/>
+                      </a:pPr>
+                      <a:r>
+                        <a:rPr lang="en-US" sz="1200" dirty="0">
+                          <a:solidFill>
+                            <a:srgbClr val="9FADBE"/>
+                          </a:solidFill>
+                          <a:latin typeface="Verdana" pitchFamily="34" charset="0"/>
+                          <a:ea typeface="Verdana" pitchFamily="34" charset="-122"/>
+                          <a:cs typeface="Verdana" pitchFamily="34" charset="-120"/>
+                        </a:rPr>
+                        <a:t>Gemini</a:t>
+                      </a:r>
+                      <a:endParaRPr lang="en-US" sz="1200" dirty="0">
+                        <a:latin typeface="Verdana" charset="0"/>
+                        <a:ea typeface="Verdana" charset="0"/>
+                        <a:cs typeface="Verdana" charset="0"/>
+                      </a:endParaRPr>
+                    </a:p>
+                  </a:txBody>
+                  <a:tcPr marL="91440" marR="91440" marT="45720" marB="45720" anchor="ctr">
+                    <a:lnL w="12700" cap="flat" cmpd="sng" algn="ctr">
+                      <a:solidFill>
+                        <a:srgbClr val="2B3849"/>
+                      </a:solidFill>
+                      <a:prstDash val="solid"/>
+                      <a:round/>
+                      <a:headEnd type="none" w="med" len="med"/>
+                      <a:tailEnd type="none" w="med" len="med"/>
+                    </a:lnL>
+                    <a:lnR w="12700" cap="flat" cmpd="sng" algn="ctr">
+                      <a:solidFill>
+                        <a:srgbClr val="2B3849"/>
+                      </a:solidFill>
+                      <a:prstDash val="solid"/>
+                      <a:round/>
+                      <a:headEnd type="none" w="med" len="med"/>
+                      <a:tailEnd type="none" w="med" len="med"/>
+                    </a:lnR>
+                    <a:lnT w="12700" cap="flat" cmpd="sng" algn="ctr">
+                      <a:solidFill>
+                        <a:srgbClr val="2B3849"/>
+                      </a:solidFill>
+                      <a:prstDash val="solid"/>
+                      <a:round/>
+                      <a:headEnd type="none" w="med" len="med"/>
+                      <a:tailEnd type="none" w="med" len="med"/>
+                    </a:lnT>
+                    <a:lnB w="12700" cap="flat" cmpd="sng" algn="ctr">
+                      <a:solidFill>
+                        <a:srgbClr val="2B3849"/>
+                      </a:solidFill>
+                      <a:prstDash val="solid"/>
+                      <a:round/>
+                      <a:headEnd type="none" w="med" len="med"/>
+                      <a:tailEnd type="none" w="med" len="med"/>
+                    </a:lnB>
+                    <a:solidFill>
+                      <a:srgbClr val="141B26"/>
+                    </a:solidFill>
+                  </a:tcPr>
+                </a:tc>
+                <a:tc>
+                  <a:txBody>
+                    <a:bodyPr/>
+                    <a:lstStyle/>
+                    <a:p>
+                      <a:pPr indent="0" marL="0">
+                        <a:buNone/>
+                      </a:pPr>
+                      <a:r>
+                        <a:rPr lang="en-US" sz="1200" dirty="0">
+                          <a:solidFill>
+                            <a:srgbClr val="9FADBE"/>
+                          </a:solidFill>
+                          <a:latin typeface="Verdana" pitchFamily="34" charset="0"/>
+                          <a:ea typeface="Verdana" pitchFamily="34" charset="-122"/>
+                          <a:cs typeface="Verdana" pitchFamily="34" charset="-120"/>
+                        </a:rPr>
+                        <a:t>Motor embarcado: texto e embeddings</a:t>
+                      </a:r>
+                      <a:endParaRPr lang="en-US" sz="1200" dirty="0">
+                        <a:latin typeface="Verdana" charset="0"/>
+                        <a:ea typeface="Verdana" charset="0"/>
+                        <a:cs typeface="Verdana" charset="0"/>
+                      </a:endParaRPr>
+                    </a:p>
+                  </a:txBody>
+                  <a:tcPr marL="91440" marR="91440" marT="45720" marB="45720" anchor="ctr">
+                    <a:lnL w="12700" cap="flat" cmpd="sng" algn="ctr">
+                      <a:solidFill>
+                        <a:srgbClr val="2B3849"/>
+                      </a:solidFill>
+                      <a:prstDash val="solid"/>
+                      <a:round/>
+                      <a:headEnd type="none" w="med" len="med"/>
+                      <a:tailEnd type="none" w="med" len="med"/>
+                    </a:lnL>
+                    <a:lnR w="12700" cap="flat" cmpd="sng" algn="ctr">
+                      <a:solidFill>
+                        <a:srgbClr val="2B3849"/>
+                      </a:solidFill>
+                      <a:prstDash val="solid"/>
+                      <a:round/>
+                      <a:headEnd type="none" w="med" len="med"/>
+                      <a:tailEnd type="none" w="med" len="med"/>
+                    </a:lnR>
+                    <a:lnT w="12700" cap="flat" cmpd="sng" algn="ctr">
+                      <a:solidFill>
+                        <a:srgbClr val="2B3849"/>
+                      </a:solidFill>
+                      <a:prstDash val="solid"/>
+                      <a:round/>
+                      <a:headEnd type="none" w="med" len="med"/>
+                      <a:tailEnd type="none" w="med" len="med"/>
+                    </a:lnT>
+                    <a:lnB w="12700" cap="flat" cmpd="sng" algn="ctr">
+                      <a:solidFill>
+                        <a:srgbClr val="2B3849"/>
+                      </a:solidFill>
+                      <a:prstDash val="solid"/>
+                      <a:round/>
+                      <a:headEnd type="none" w="med" len="med"/>
+                      <a:tailEnd type="none" w="med" len="med"/>
+                    </a:lnB>
+                    <a:solidFill>
+                      <a:srgbClr val="141B26"/>
+                    </a:solidFill>
+                  </a:tcPr>
+                </a:tc>
+                <a:tc>
+                  <a:txBody>
+                    <a:bodyPr/>
+                    <a:lstStyle/>
+                    <a:p>
+                      <a:pPr indent="0" marL="0">
+                        <a:buNone/>
+                      </a:pPr>
+                      <a:r>
+                        <a:rPr lang="en-US" sz="1200" dirty="0">
+                          <a:solidFill>
+                            <a:srgbClr val="9FADBE"/>
+                          </a:solidFill>
+                          <a:latin typeface="Verdana" pitchFamily="34" charset="0"/>
+                          <a:ea typeface="Verdana" pitchFamily="34" charset="-122"/>
+                          <a:cs typeface="Verdana" pitchFamily="34" charset="-120"/>
+                        </a:rPr>
+                        <a:t>Cota da linha flash acaba; versões são aposentadas</a:t>
+                      </a:r>
+                      <a:endParaRPr lang="en-US" sz="1200" dirty="0">
+                        <a:latin typeface="Verdana" charset="0"/>
+                        <a:ea typeface="Verdana" charset="0"/>
+                        <a:cs typeface="Verdana" charset="0"/>
+                      </a:endParaRPr>
+                    </a:p>
+                  </a:txBody>
+                  <a:tcPr marL="91440" marR="91440" marT="45720" marB="45720" anchor="ctr">
+                    <a:lnL w="12700" cap="flat" cmpd="sng" algn="ctr">
+                      <a:solidFill>
+                        <a:srgbClr val="2B3849"/>
+                      </a:solidFill>
+                      <a:prstDash val="solid"/>
+                      <a:round/>
+                      <a:headEnd type="none" w="med" len="med"/>
+                      <a:tailEnd type="none" w="med" len="med"/>
+                    </a:lnL>
+                    <a:lnR w="12700" cap="flat" cmpd="sng" algn="ctr">
+                      <a:solidFill>
+                        <a:srgbClr val="2B3849"/>
+                      </a:solidFill>
+                      <a:prstDash val="solid"/>
+                      <a:round/>
+                      <a:headEnd type="none" w="med" len="med"/>
+                      <a:tailEnd type="none" w="med" len="med"/>
+                    </a:lnR>
+                    <a:lnT w="12700" cap="flat" cmpd="sng" algn="ctr">
+                      <a:solidFill>
+                        <a:srgbClr val="2B3849"/>
+                      </a:solidFill>
+                      <a:prstDash val="solid"/>
+                      <a:round/>
+                      <a:headEnd type="none" w="med" len="med"/>
+                      <a:tailEnd type="none" w="med" len="med"/>
+                    </a:lnT>
+                    <a:lnB w="12700" cap="flat" cmpd="sng" algn="ctr">
+                      <a:solidFill>
+                        <a:srgbClr val="2B3849"/>
+                      </a:solidFill>
+                      <a:prstDash val="solid"/>
+                      <a:round/>
+                      <a:headEnd type="none" w="med" len="med"/>
+                      <a:tailEnd type="none" w="med" len="med"/>
+                    </a:lnB>
+                    <a:solidFill>
+                      <a:srgbClr val="141B26"/>
+                    </a:solidFill>
+                  </a:tcPr>
+                </a:tc>
+              </a:tr>
+              <a:tr h="475488">
+                <a:tc>
+                  <a:txBody>
+                    <a:bodyPr/>
+                    <a:lstStyle/>
+                    <a:p>
+                      <a:pPr indent="0" marL="0">
+                        <a:buNone/>
+                      </a:pPr>
+                      <a:r>
+                        <a:rPr lang="en-US" sz="1200" dirty="0">
+                          <a:solidFill>
+                            <a:srgbClr val="9FADBE"/>
+                          </a:solidFill>
+                          <a:latin typeface="Verdana" pitchFamily="34" charset="0"/>
+                          <a:ea typeface="Verdana" pitchFamily="34" charset="-122"/>
+                          <a:cs typeface="Verdana" pitchFamily="34" charset="-120"/>
+                        </a:rPr>
+                        <a:t>Grok</a:t>
+                      </a:r>
+                      <a:endParaRPr lang="en-US" sz="1200" dirty="0">
+                        <a:latin typeface="Verdana" charset="0"/>
+                        <a:ea typeface="Verdana" charset="0"/>
+                        <a:cs typeface="Verdana" charset="0"/>
+                      </a:endParaRPr>
+                    </a:p>
+                  </a:txBody>
+                  <a:tcPr marL="91440" marR="91440" marT="45720" marB="45720" anchor="ctr">
+                    <a:lnL w="12700" cap="flat" cmpd="sng" algn="ctr">
+                      <a:solidFill>
+                        <a:srgbClr val="2B3849"/>
+                      </a:solidFill>
+                      <a:prstDash val="solid"/>
+                      <a:round/>
+                      <a:headEnd type="none" w="med" len="med"/>
+                      <a:tailEnd type="none" w="med" len="med"/>
+                    </a:lnL>
+                    <a:lnR w="12700" cap="flat" cmpd="sng" algn="ctr">
+                      <a:solidFill>
+                        <a:srgbClr val="2B3849"/>
+                      </a:solidFill>
+                      <a:prstDash val="solid"/>
+                      <a:round/>
+                      <a:headEnd type="none" w="med" len="med"/>
+                      <a:tailEnd type="none" w="med" len="med"/>
+                    </a:lnR>
+                    <a:lnT w="12700" cap="flat" cmpd="sng" algn="ctr">
+                      <a:solidFill>
+                        <a:srgbClr val="2B3849"/>
+                      </a:solidFill>
+                      <a:prstDash val="solid"/>
+                      <a:round/>
+                      <a:headEnd type="none" w="med" len="med"/>
+                      <a:tailEnd type="none" w="med" len="med"/>
+                    </a:lnT>
+                    <a:lnB w="12700" cap="flat" cmpd="sng" algn="ctr">
+                      <a:solidFill>
+                        <a:srgbClr val="2B3849"/>
+                      </a:solidFill>
+                      <a:prstDash val="solid"/>
+                      <a:round/>
+                      <a:headEnd type="none" w="med" len="med"/>
+                      <a:tailEnd type="none" w="med" len="med"/>
+                    </a:lnB>
+                    <a:solidFill>
+                      <a:srgbClr val="141B26"/>
+                    </a:solidFill>
+                  </a:tcPr>
+                </a:tc>
+                <a:tc>
+                  <a:txBody>
+                    <a:bodyPr/>
+                    <a:lstStyle/>
+                    <a:p>
+                      <a:pPr indent="0" marL="0">
+                        <a:buNone/>
+                      </a:pPr>
+                      <a:r>
+                        <a:rPr lang="en-US" sz="1200" dirty="0">
+                          <a:solidFill>
+                            <a:srgbClr val="9FADBE"/>
+                          </a:solidFill>
+                          <a:latin typeface="Verdana" pitchFamily="34" charset="0"/>
+                          <a:ea typeface="Verdana" pitchFamily="34" charset="-122"/>
+                          <a:cs typeface="Verdana" pitchFamily="34" charset="-120"/>
+                        </a:rPr>
+                        <a:t>Teste comparativo de respostas</a:t>
+                      </a:r>
+                      <a:endParaRPr lang="en-US" sz="1200" dirty="0">
+                        <a:latin typeface="Verdana" charset="0"/>
+                        <a:ea typeface="Verdana" charset="0"/>
+                        <a:cs typeface="Verdana" charset="0"/>
+                      </a:endParaRPr>
+                    </a:p>
+                  </a:txBody>
+                  <a:tcPr marL="91440" marR="91440" marT="45720" marB="45720" anchor="ctr">
+                    <a:lnL w="12700" cap="flat" cmpd="sng" algn="ctr">
+                      <a:solidFill>
+                        <a:srgbClr val="2B3849"/>
+                      </a:solidFill>
+                      <a:prstDash val="solid"/>
+                      <a:round/>
+                      <a:headEnd type="none" w="med" len="med"/>
+                      <a:tailEnd type="none" w="med" len="med"/>
+                    </a:lnL>
+                    <a:lnR w="12700" cap="flat" cmpd="sng" algn="ctr">
+                      <a:solidFill>
+                        <a:srgbClr val="2B3849"/>
+                      </a:solidFill>
+                      <a:prstDash val="solid"/>
+                      <a:round/>
+                      <a:headEnd type="none" w="med" len="med"/>
+                      <a:tailEnd type="none" w="med" len="med"/>
+                    </a:lnR>
+                    <a:lnT w="12700" cap="flat" cmpd="sng" algn="ctr">
+                      <a:solidFill>
+                        <a:srgbClr val="2B3849"/>
+                      </a:solidFill>
+                      <a:prstDash val="solid"/>
+                      <a:round/>
+                      <a:headEnd type="none" w="med" len="med"/>
+                      <a:tailEnd type="none" w="med" len="med"/>
+                    </a:lnT>
+                    <a:lnB w="12700" cap="flat" cmpd="sng" algn="ctr">
+                      <a:solidFill>
+                        <a:srgbClr val="2B3849"/>
+                      </a:solidFill>
+                      <a:prstDash val="solid"/>
+                      <a:round/>
+                      <a:headEnd type="none" w="med" len="med"/>
+                      <a:tailEnd type="none" w="med" len="med"/>
+                    </a:lnB>
+                    <a:solidFill>
+                      <a:srgbClr val="141B26"/>
+                    </a:solidFill>
+                  </a:tcPr>
+                </a:tc>
+                <a:tc>
+                  <a:txBody>
+                    <a:bodyPr/>
+                    <a:lstStyle/>
+                    <a:p>
+                      <a:pPr indent="0" marL="0">
+                        <a:buNone/>
+                      </a:pPr>
+                      <a:r>
+                        <a:rPr lang="en-US" sz="1200" dirty="0">
+                          <a:solidFill>
+                            <a:srgbClr val="9FADBE"/>
+                          </a:solidFill>
+                          <a:latin typeface="Verdana" pitchFamily="34" charset="0"/>
+                          <a:ea typeface="Verdana" pitchFamily="34" charset="-122"/>
+                          <a:cs typeface="Verdana" pitchFamily="34" charset="-120"/>
+                        </a:rPr>
+                        <a:t>Sem API gratuita e sem endpoint de embeddings</a:t>
+                      </a:r>
+                      <a:endParaRPr lang="en-US" sz="1200" dirty="0">
+                        <a:latin typeface="Verdana" charset="0"/>
+                        <a:ea typeface="Verdana" charset="0"/>
+                        <a:cs typeface="Verdana" charset="0"/>
+                      </a:endParaRPr>
+                    </a:p>
+                  </a:txBody>
+                  <a:tcPr marL="91440" marR="91440" marT="45720" marB="45720" anchor="ctr">
+                    <a:lnL w="12700" cap="flat" cmpd="sng" algn="ctr">
+                      <a:solidFill>
+                        <a:srgbClr val="2B3849"/>
+                      </a:solidFill>
+                      <a:prstDash val="solid"/>
+                      <a:round/>
+                      <a:headEnd type="none" w="med" len="med"/>
+                      <a:tailEnd type="none" w="med" len="med"/>
+                    </a:lnL>
+                    <a:lnR w="12700" cap="flat" cmpd="sng" algn="ctr">
+                      <a:solidFill>
+                        <a:srgbClr val="2B3849"/>
+                      </a:solidFill>
+                      <a:prstDash val="solid"/>
+                      <a:round/>
+                      <a:headEnd type="none" w="med" len="med"/>
+                      <a:tailEnd type="none" w="med" len="med"/>
+                    </a:lnR>
+                    <a:lnT w="12700" cap="flat" cmpd="sng" algn="ctr">
+                      <a:solidFill>
+                        <a:srgbClr val="2B3849"/>
+                      </a:solidFill>
+                      <a:prstDash val="solid"/>
+                      <a:round/>
+                      <a:headEnd type="none" w="med" len="med"/>
+                      <a:tailEnd type="none" w="med" len="med"/>
+                    </a:lnT>
+                    <a:lnB w="12700" cap="flat" cmpd="sng" algn="ctr">
+                      <a:solidFill>
+                        <a:srgbClr val="2B3849"/>
+                      </a:solidFill>
+                      <a:prstDash val="solid"/>
+                      <a:round/>
+                      <a:headEnd type="none" w="med" len="med"/>
+                      <a:tailEnd type="none" w="med" len="med"/>
+                    </a:lnB>
+                    <a:solidFill>
+                      <a:srgbClr val="141B26"/>
+                    </a:solidFill>
+                  </a:tcPr>
+                </a:tc>
+              </a:tr>
+              <a:tr h="475488">
+                <a:tc>
+                  <a:txBody>
+                    <a:bodyPr/>
+                    <a:lstStyle/>
+                    <a:p>
+                      <a:pPr indent="0" marL="0">
+                        <a:buNone/>
+                      </a:pPr>
+                      <a:r>
+                        <a:rPr lang="en-US" sz="1200" dirty="0">
+                          <a:solidFill>
+                            <a:srgbClr val="9FADBE"/>
+                          </a:solidFill>
+                          <a:latin typeface="Verdana" pitchFamily="34" charset="0"/>
+                          <a:ea typeface="Verdana" pitchFamily="34" charset="-122"/>
+                          <a:cs typeface="Verdana" pitchFamily="34" charset="-120"/>
+                        </a:rPr>
+                        <a:t>Cursor</a:t>
+                      </a:r>
+                      <a:endParaRPr lang="en-US" sz="1200" dirty="0">
+                        <a:latin typeface="Verdana" charset="0"/>
+                        <a:ea typeface="Verdana" charset="0"/>
+                        <a:cs typeface="Verdana" charset="0"/>
+                      </a:endParaRPr>
+                    </a:p>
+                  </a:txBody>
+                  <a:tcPr marL="91440" marR="91440" marT="45720" marB="45720" anchor="ctr">
+                    <a:lnL w="12700" cap="flat" cmpd="sng" algn="ctr">
+                      <a:solidFill>
+                        <a:srgbClr val="2B3849"/>
+                      </a:solidFill>
+                      <a:prstDash val="solid"/>
+                      <a:round/>
+                      <a:headEnd type="none" w="med" len="med"/>
+                      <a:tailEnd type="none" w="med" len="med"/>
+                    </a:lnL>
+                    <a:lnR w="12700" cap="flat" cmpd="sng" algn="ctr">
+                      <a:solidFill>
+                        <a:srgbClr val="2B3849"/>
+                      </a:solidFill>
+                      <a:prstDash val="solid"/>
+                      <a:round/>
+                      <a:headEnd type="none" w="med" len="med"/>
+                      <a:tailEnd type="none" w="med" len="med"/>
+                    </a:lnR>
+                    <a:lnT w="12700" cap="flat" cmpd="sng" algn="ctr">
+                      <a:solidFill>
+                        <a:srgbClr val="2B3849"/>
+                      </a:solidFill>
+                      <a:prstDash val="solid"/>
+                      <a:round/>
+                      <a:headEnd type="none" w="med" len="med"/>
+                      <a:tailEnd type="none" w="med" len="med"/>
+                    </a:lnT>
+                    <a:lnB w="12700" cap="flat" cmpd="sng" algn="ctr">
+                      <a:solidFill>
+                        <a:srgbClr val="2B3849"/>
+                      </a:solidFill>
+                      <a:prstDash val="solid"/>
+                      <a:round/>
+                      <a:headEnd type="none" w="med" len="med"/>
+                      <a:tailEnd type="none" w="med" len="med"/>
+                    </a:lnB>
+                    <a:solidFill>
+                      <a:srgbClr val="141B26"/>
+                    </a:solidFill>
+                  </a:tcPr>
+                </a:tc>
+                <a:tc>
+                  <a:txBody>
+                    <a:bodyPr/>
+                    <a:lstStyle/>
+                    <a:p>
+                      <a:pPr indent="0" marL="0">
+                        <a:buNone/>
+                      </a:pPr>
+                      <a:r>
+                        <a:rPr lang="en-US" sz="1200" dirty="0">
+                          <a:solidFill>
+                            <a:srgbClr val="9FADBE"/>
+                          </a:solidFill>
+                          <a:latin typeface="Verdana" pitchFamily="34" charset="0"/>
+                          <a:ea typeface="Verdana" pitchFamily="34" charset="-122"/>
+                          <a:cs typeface="Verdana" pitchFamily="34" charset="-120"/>
+                        </a:rPr>
+                        <a:t>Desenvolvimento do código</a:t>
+                      </a:r>
+                      <a:endParaRPr lang="en-US" sz="1200" dirty="0">
+                        <a:latin typeface="Verdana" charset="0"/>
+                        <a:ea typeface="Verdana" charset="0"/>
+                        <a:cs typeface="Verdana" charset="0"/>
+                      </a:endParaRPr>
+                    </a:p>
+                  </a:txBody>
+                  <a:tcPr marL="91440" marR="91440" marT="45720" marB="45720" anchor="ctr">
+                    <a:lnL w="12700" cap="flat" cmpd="sng" algn="ctr">
+                      <a:solidFill>
+                        <a:srgbClr val="2B3849"/>
+                      </a:solidFill>
+                      <a:prstDash val="solid"/>
+                      <a:round/>
+                      <a:headEnd type="none" w="med" len="med"/>
+                      <a:tailEnd type="none" w="med" len="med"/>
+                    </a:lnL>
+                    <a:lnR w="12700" cap="flat" cmpd="sng" algn="ctr">
+                      <a:solidFill>
+                        <a:srgbClr val="2B3849"/>
+                      </a:solidFill>
+                      <a:prstDash val="solid"/>
+                      <a:round/>
+                      <a:headEnd type="none" w="med" len="med"/>
+                      <a:tailEnd type="none" w="med" len="med"/>
+                    </a:lnR>
+                    <a:lnT w="12700" cap="flat" cmpd="sng" algn="ctr">
+                      <a:solidFill>
+                        <a:srgbClr val="2B3849"/>
+                      </a:solidFill>
+                      <a:prstDash val="solid"/>
+                      <a:round/>
+                      <a:headEnd type="none" w="med" len="med"/>
+                      <a:tailEnd type="none" w="med" len="med"/>
+                    </a:lnT>
+                    <a:lnB w="12700" cap="flat" cmpd="sng" algn="ctr">
+                      <a:solidFill>
+                        <a:srgbClr val="2B3849"/>
+                      </a:solidFill>
+                      <a:prstDash val="solid"/>
+                      <a:round/>
+                      <a:headEnd type="none" w="med" len="med"/>
+                      <a:tailEnd type="none" w="med" len="med"/>
+                    </a:lnB>
+                    <a:solidFill>
+                      <a:srgbClr val="141B26"/>
+                    </a:solidFill>
+                  </a:tcPr>
+                </a:tc>
+                <a:tc>
+                  <a:txBody>
+                    <a:bodyPr/>
+                    <a:lstStyle/>
+                    <a:p>
+                      <a:pPr indent="0" marL="0">
+                        <a:buNone/>
+                      </a:pPr>
+                      <a:r>
+                        <a:rPr lang="en-US" sz="1200" dirty="0">
+                          <a:solidFill>
+                            <a:srgbClr val="9FADBE"/>
+                          </a:solidFill>
+                          <a:latin typeface="Verdana" pitchFamily="34" charset="0"/>
+                          <a:ea typeface="Verdana" pitchFamily="34" charset="-122"/>
+                          <a:cs typeface="Verdana" pitchFamily="34" charset="-120"/>
+                        </a:rPr>
+                        <a:t>Erra em silêncio no que parece certo</a:t>
+                      </a:r>
+                      <a:endParaRPr lang="en-US" sz="1200" dirty="0">
+                        <a:latin typeface="Verdana" charset="0"/>
+                        <a:ea typeface="Verdana" charset="0"/>
+                        <a:cs typeface="Verdana" charset="0"/>
+                      </a:endParaRPr>
+                    </a:p>
+                  </a:txBody>
+                  <a:tcPr marL="91440" marR="91440" marT="45720" marB="45720" anchor="ctr">
+                    <a:lnL w="12700" cap="flat" cmpd="sng" algn="ctr">
+                      <a:solidFill>
+                        <a:srgbClr val="2B3849"/>
+                      </a:solidFill>
+                      <a:prstDash val="solid"/>
+                      <a:round/>
+                      <a:headEnd type="none" w="med" len="med"/>
+                      <a:tailEnd type="none" w="med" len="med"/>
+                    </a:lnL>
+                    <a:lnR w="12700" cap="flat" cmpd="sng" algn="ctr">
+                      <a:solidFill>
+                        <a:srgbClr val="2B3849"/>
+                      </a:solidFill>
+                      <a:prstDash val="solid"/>
+                      <a:round/>
+                      <a:headEnd type="none" w="med" len="med"/>
+                      <a:tailEnd type="none" w="med" len="med"/>
+                    </a:lnR>
+                    <a:lnT w="12700" cap="flat" cmpd="sng" algn="ctr">
+                      <a:solidFill>
+                        <a:srgbClr val="2B3849"/>
+                      </a:solidFill>
+                      <a:prstDash val="solid"/>
+                      <a:round/>
+                      <a:headEnd type="none" w="med" len="med"/>
+                      <a:tailEnd type="none" w="med" len="med"/>
+                    </a:lnT>
+                    <a:lnB w="12700" cap="flat" cmpd="sng" algn="ctr">
+                      <a:solidFill>
+                        <a:srgbClr val="2B3849"/>
+                      </a:solidFill>
+                      <a:prstDash val="solid"/>
+                      <a:round/>
+                      <a:headEnd type="none" w="med" len="med"/>
+                      <a:tailEnd type="none" w="med" len="med"/>
+                    </a:lnB>
+                    <a:solidFill>
+                      <a:srgbClr val="141B26"/>
+                    </a:solidFill>
+                  </a:tcPr>
+                </a:tc>
+              </a:tr>
+              <a:tr h="475488">
+                <a:tc>
+                  <a:txBody>
+                    <a:bodyPr/>
+                    <a:lstStyle/>
+                    <a:p>
+                      <a:pPr indent="0" marL="0">
+                        <a:buNone/>
+                      </a:pPr>
+                      <a:r>
+                        <a:rPr lang="en-US" sz="1200" dirty="0">
+                          <a:solidFill>
+                            <a:srgbClr val="9FADBE"/>
+                          </a:solidFill>
+                          <a:latin typeface="Verdana" pitchFamily="34" charset="0"/>
+                          <a:ea typeface="Verdana" pitchFamily="34" charset="-122"/>
+                          <a:cs typeface="Verdana" pitchFamily="34" charset="-120"/>
+                        </a:rPr>
+                        <a:t>Dify</a:t>
+                      </a:r>
+                      <a:endParaRPr lang="en-US" sz="1200" dirty="0">
+                        <a:latin typeface="Verdana" charset="0"/>
+                        <a:ea typeface="Verdana" charset="0"/>
+                        <a:cs typeface="Verdana" charset="0"/>
+                      </a:endParaRPr>
+                    </a:p>
+                  </a:txBody>
+                  <a:tcPr marL="91440" marR="91440" marT="45720" marB="45720" anchor="ctr">
+                    <a:lnL w="12700" cap="flat" cmpd="sng" algn="ctr">
+                      <a:solidFill>
+                        <a:srgbClr val="2B3849"/>
+                      </a:solidFill>
+                      <a:prstDash val="solid"/>
+                      <a:round/>
+                      <a:headEnd type="none" w="med" len="med"/>
+                      <a:tailEnd type="none" w="med" len="med"/>
+                    </a:lnL>
+                    <a:lnR w="12700" cap="flat" cmpd="sng" algn="ctr">
+                      <a:solidFill>
+                        <a:srgbClr val="2B3849"/>
+                      </a:solidFill>
+                      <a:prstDash val="solid"/>
+                      <a:round/>
+                      <a:headEnd type="none" w="med" len="med"/>
+                      <a:tailEnd type="none" w="med" len="med"/>
+                    </a:lnR>
+                    <a:lnT w="12700" cap="flat" cmpd="sng" algn="ctr">
+                      <a:solidFill>
+                        <a:srgbClr val="2B3849"/>
+                      </a:solidFill>
+                      <a:prstDash val="solid"/>
+                      <a:round/>
+                      <a:headEnd type="none" w="med" len="med"/>
+                      <a:tailEnd type="none" w="med" len="med"/>
+                    </a:lnT>
+                    <a:lnB w="12700" cap="flat" cmpd="sng" algn="ctr">
+                      <a:solidFill>
+                        <a:srgbClr val="2B3849"/>
+                      </a:solidFill>
+                      <a:prstDash val="solid"/>
+                      <a:round/>
+                      <a:headEnd type="none" w="med" len="med"/>
+                      <a:tailEnd type="none" w="med" len="med"/>
+                    </a:lnB>
+                    <a:solidFill>
+                      <a:srgbClr val="141B26"/>
+                    </a:solidFill>
+                  </a:tcPr>
+                </a:tc>
+                <a:tc>
+                  <a:txBody>
+                    <a:bodyPr/>
+                    <a:lstStyle/>
+                    <a:p>
+                      <a:pPr indent="0" marL="0">
+                        <a:buNone/>
+                      </a:pPr>
+                      <a:r>
+                        <a:rPr lang="en-US" sz="1200" dirty="0">
+                          <a:solidFill>
+                            <a:srgbClr val="9FADBE"/>
+                          </a:solidFill>
+                          <a:latin typeface="Verdana" pitchFamily="34" charset="0"/>
+                          <a:ea typeface="Verdana" pitchFamily="34" charset="-122"/>
+                          <a:cs typeface="Verdana" pitchFamily="34" charset="-120"/>
+                        </a:rPr>
+                        <a:t>Protótipo do RAG antes do código</a:t>
+                      </a:r>
+                      <a:endParaRPr lang="en-US" sz="1200" dirty="0">
+                        <a:latin typeface="Verdana" charset="0"/>
+                        <a:ea typeface="Verdana" charset="0"/>
+                        <a:cs typeface="Verdana" charset="0"/>
+                      </a:endParaRPr>
+                    </a:p>
+                  </a:txBody>
+                  <a:tcPr marL="91440" marR="91440" marT="45720" marB="45720" anchor="ctr">
+                    <a:lnL w="12700" cap="flat" cmpd="sng" algn="ctr">
+                      <a:solidFill>
+                        <a:srgbClr val="2B3849"/>
+                      </a:solidFill>
+                      <a:prstDash val="solid"/>
+                      <a:round/>
+                      <a:headEnd type="none" w="med" len="med"/>
+                      <a:tailEnd type="none" w="med" len="med"/>
+                    </a:lnL>
+                    <a:lnR w="12700" cap="flat" cmpd="sng" algn="ctr">
+                      <a:solidFill>
+                        <a:srgbClr val="2B3849"/>
+                      </a:solidFill>
+                      <a:prstDash val="solid"/>
+                      <a:round/>
+                      <a:headEnd type="none" w="med" len="med"/>
+                      <a:tailEnd type="none" w="med" len="med"/>
+                    </a:lnR>
+                    <a:lnT w="12700" cap="flat" cmpd="sng" algn="ctr">
+                      <a:solidFill>
+                        <a:srgbClr val="2B3849"/>
+                      </a:solidFill>
+                      <a:prstDash val="solid"/>
+                      <a:round/>
+                      <a:headEnd type="none" w="med" len="med"/>
+                      <a:tailEnd type="none" w="med" len="med"/>
+                    </a:lnT>
+                    <a:lnB w="12700" cap="flat" cmpd="sng" algn="ctr">
+                      <a:solidFill>
+                        <a:srgbClr val="2B3849"/>
+                      </a:solidFill>
+                      <a:prstDash val="solid"/>
+                      <a:round/>
+                      <a:headEnd type="none" w="med" len="med"/>
+                      <a:tailEnd type="none" w="med" len="med"/>
+                    </a:lnB>
+                    <a:solidFill>
+                      <a:srgbClr val="141B26"/>
+                    </a:solidFill>
+                  </a:tcPr>
+                </a:tc>
+                <a:tc>
+                  <a:txBody>
+                    <a:bodyPr/>
+                    <a:lstStyle/>
+                    <a:p>
+                      <a:pPr indent="0" marL="0">
+                        <a:buNone/>
+                      </a:pPr>
+                      <a:r>
+                        <a:rPr lang="en-US" sz="1200" dirty="0">
+                          <a:solidFill>
+                            <a:srgbClr val="9FADBE"/>
+                          </a:solidFill>
+                          <a:latin typeface="Verdana" pitchFamily="34" charset="0"/>
+                          <a:ea typeface="Verdana" pitchFamily="34" charset="-122"/>
+                          <a:cs typeface="Verdana" pitchFamily="34" charset="-120"/>
+                        </a:rPr>
+                        <a:t>Não permite controlar o limiar de relevância</a:t>
+                      </a:r>
+                      <a:endParaRPr lang="en-US" sz="1200" dirty="0">
+                        <a:latin typeface="Verdana" charset="0"/>
+                        <a:ea typeface="Verdana" charset="0"/>
+                        <a:cs typeface="Verdana" charset="0"/>
+                      </a:endParaRPr>
+                    </a:p>
+                  </a:txBody>
+                  <a:tcPr marL="91440" marR="91440" marT="45720" marB="45720" anchor="ctr">
+                    <a:lnL w="12700" cap="flat" cmpd="sng" algn="ctr">
+                      <a:solidFill>
+                        <a:srgbClr val="2B3849"/>
+                      </a:solidFill>
+                      <a:prstDash val="solid"/>
+                      <a:round/>
+                      <a:headEnd type="none" w="med" len="med"/>
+                      <a:tailEnd type="none" w="med" len="med"/>
+                    </a:lnL>
+                    <a:lnR w="12700" cap="flat" cmpd="sng" algn="ctr">
+                      <a:solidFill>
+                        <a:srgbClr val="2B3849"/>
+                      </a:solidFill>
+                      <a:prstDash val="solid"/>
+                      <a:round/>
+                      <a:headEnd type="none" w="med" len="med"/>
+                      <a:tailEnd type="none" w="med" len="med"/>
+                    </a:lnR>
+                    <a:lnT w="12700" cap="flat" cmpd="sng" algn="ctr">
+                      <a:solidFill>
+                        <a:srgbClr val="2B3849"/>
+                      </a:solidFill>
+                      <a:prstDash val="solid"/>
+                      <a:round/>
+                      <a:headEnd type="none" w="med" len="med"/>
+                      <a:tailEnd type="none" w="med" len="med"/>
+                    </a:lnT>
+                    <a:lnB w="12700" cap="flat" cmpd="sng" algn="ctr">
+                      <a:solidFill>
+                        <a:srgbClr val="2B3849"/>
+                      </a:solidFill>
+                      <a:prstDash val="solid"/>
+                      <a:round/>
+                      <a:headEnd type="none" w="med" len="med"/>
+                      <a:tailEnd type="none" w="med" len="med"/>
+                    </a:lnB>
+                    <a:solidFill>
+                      <a:srgbClr val="141B26"/>
+                    </a:solidFill>
+                  </a:tcPr>
+                </a:tc>
+              </a:tr>
+            </a:tbl>
+          </a:graphicData>
+        </a:graphic>
+      </p:graphicFrame>
+      <p:sp>
+        <p:nvSpPr>
+          <p:cNvPr id="5" name="Text 2"/>
+          <p:cNvSpPr/>
+          <p:nvPr/>
+        </p:nvSpPr>
+        <p:spPr>
+          <a:xfrm>
+            <a:off x="640080" y="5349240"/>
+            <a:ext cx="10881360" cy="640080"/>
           </a:xfrm>
           <a:prstGeom prst="rect">
             <a:avLst/>
@@ -2275,342 +3771,21 @@
             <a:r>
               <a:rPr lang="en-US" sz="1250" dirty="0">
                 <a:solidFill>
-                  <a:srgbClr val="9FADBE"/>
-                </a:solidFill>
-                <a:latin typeface="Verdana" pitchFamily="34" charset="0"/>
-                <a:ea typeface="Verdana" pitchFamily="34" charset="-122"/>
-                <a:cs typeface="Verdana" pitchFamily="34" charset="-120"/>
-              </a:rPr>
-              <a:t>• Boa parte do código: rotas, validações, interface e testes de tabela</a:t>
+                  <a:srgbClr val="E6EAEF"/>
+                </a:solidFill>
+                <a:latin typeface="Verdana" pitchFamily="34" charset="0"/>
+                <a:ea typeface="Verdana" pitchFamily="34" charset="-122"/>
+                <a:cs typeface="Verdana" pitchFamily="34" charset="-120"/>
+              </a:rPr>
+              <a:t>A limitação do Dify foi o que nos levou ao código próprio: o limiar é o parâmetro que decide entre responder e admitir ignorância, e é o mais importante do sistema para o nosso objetivo.</a:t>
             </a:r>
             <a:endParaRPr lang="en-US" sz="1250" dirty="0"/>
           </a:p>
-          <a:p>
-            <a:pPr indent="0" marL="0">
-              <a:lnSpc>
-                <a:spcPct val="120000"/>
-              </a:lnSpc>
-              <a:buNone/>
-            </a:pPr>
-            <a:endParaRPr lang="en-US" sz="1250" dirty="0"/>
-          </a:p>
-          <a:p>
-            <a:pPr indent="0" marL="0">
-              <a:lnSpc>
-                <a:spcPct val="120000"/>
-              </a:lnSpc>
-              <a:buNone/>
-            </a:pPr>
-            <a:r>
-              <a:rPr lang="en-US" sz="1250" dirty="0">
-                <a:solidFill>
-                  <a:srgbClr val="9FADBE"/>
-                </a:solidFill>
-                <a:latin typeface="Verdana" pitchFamily="34" charset="0"/>
-                <a:ea typeface="Verdana" pitchFamily="34" charset="-122"/>
-                <a:cs typeface="Verdana" pitchFamily="34" charset="-120"/>
-              </a:rPr>
-              <a:t>• Estruturação da documentação</a:t>
-            </a:r>
-            <a:endParaRPr lang="en-US" sz="1250" dirty="0"/>
-          </a:p>
-          <a:p>
-            <a:pPr indent="0" marL="0">
-              <a:lnSpc>
-                <a:spcPct val="120000"/>
-              </a:lnSpc>
-              <a:buNone/>
-            </a:pPr>
-            <a:endParaRPr lang="en-US" sz="1250" dirty="0"/>
-          </a:p>
-          <a:p>
-            <a:pPr indent="0" marL="0">
-              <a:lnSpc>
-                <a:spcPct val="120000"/>
-              </a:lnSpc>
-              <a:buNone/>
-            </a:pPr>
-            <a:r>
-              <a:rPr lang="en-US" sz="1250" dirty="0">
-                <a:solidFill>
-                  <a:srgbClr val="9FADBE"/>
-                </a:solidFill>
-                <a:latin typeface="Verdana" pitchFamily="34" charset="0"/>
-                <a:ea typeface="Verdana" pitchFamily="34" charset="-122"/>
-                <a:cs typeface="Verdana" pitchFamily="34" charset="-120"/>
-              </a:rPr>
-              <a:t>• Revisão de ortografia e clareza</a:t>
-            </a:r>
-            <a:endParaRPr lang="en-US" sz="1250" dirty="0"/>
-          </a:p>
-        </p:txBody>
-      </p:sp>
-      <p:sp>
-        <p:nvSpPr>
-          <p:cNvPr id="7" name="Shape 5"/>
-          <p:cNvSpPr/>
-          <p:nvPr/>
-        </p:nvSpPr>
-        <p:spPr>
-          <a:xfrm>
-            <a:off x="6263640" y="1828800"/>
-            <a:ext cx="5303520" cy="3200400"/>
-          </a:xfrm>
-          <a:prstGeom prst="roundRect">
-            <a:avLst>
-              <a:gd name="adj" fmla="val 2286"/>
-            </a:avLst>
-          </a:prstGeom>
-          <a:solidFill>
-            <a:srgbClr val="141B26"/>
-          </a:solidFill>
-          <a:ln w="12700">
-            <a:solidFill>
-              <a:srgbClr val="2B3849"/>
-            </a:solidFill>
-            <a:prstDash val="solid"/>
-          </a:ln>
-        </p:spPr>
-      </p:sp>
-      <p:sp>
-        <p:nvSpPr>
-          <p:cNvPr id="8" name="Text 6"/>
-          <p:cNvSpPr/>
-          <p:nvPr/>
-        </p:nvSpPr>
-        <p:spPr>
-          <a:xfrm>
-            <a:off x="6537960" y="2057400"/>
-            <a:ext cx="4754880" cy="365760"/>
-          </a:xfrm>
-          <a:prstGeom prst="rect">
-            <a:avLst/>
-          </a:prstGeom>
-          <a:noFill/>
-          <a:ln/>
-        </p:spPr>
-        <p:txBody>
-          <a:bodyPr wrap="square" rtlCol="0" anchor="ctr"/>
-          <a:lstStyle/>
-          <a:p>
-            <a:pPr indent="0" marL="0">
-              <a:buNone/>
-            </a:pPr>
-            <a:r>
-              <a:rPr lang="en-US" sz="1600" b="1" dirty="0">
-                <a:solidFill>
-                  <a:srgbClr val="45BD8A"/>
-                </a:solidFill>
-                <a:latin typeface="Verdana" pitchFamily="34" charset="0"/>
-                <a:ea typeface="Verdana" pitchFamily="34" charset="-122"/>
-                <a:cs typeface="Verdana" pitchFamily="34" charset="-120"/>
-              </a:rPr>
-              <a:t>Decisão do grupo</a:t>
-            </a:r>
-            <a:endParaRPr lang="en-US" sz="1600" dirty="0"/>
-          </a:p>
-        </p:txBody>
-      </p:sp>
-      <p:sp>
-        <p:nvSpPr>
-          <p:cNvPr id="9" name="Text 7"/>
-          <p:cNvSpPr/>
-          <p:nvPr/>
-        </p:nvSpPr>
-        <p:spPr>
-          <a:xfrm>
-            <a:off x="6537960" y="2560320"/>
-            <a:ext cx="4754880" cy="2286000"/>
-          </a:xfrm>
-          <a:prstGeom prst="rect">
-            <a:avLst/>
-          </a:prstGeom>
-          <a:noFill/>
-          <a:ln/>
-        </p:spPr>
-        <p:txBody>
-          <a:bodyPr wrap="square" rtlCol="0" anchor="ctr"/>
-          <a:lstStyle/>
-          <a:p>
-            <a:pPr indent="0" marL="0">
-              <a:lnSpc>
-                <a:spcPct val="120000"/>
-              </a:lnSpc>
-              <a:buNone/>
-            </a:pPr>
-            <a:r>
-              <a:rPr lang="en-US" sz="1250" dirty="0">
-                <a:solidFill>
-                  <a:srgbClr val="9FADBE"/>
-                </a:solidFill>
-                <a:latin typeface="Verdana" pitchFamily="34" charset="0"/>
-                <a:ea typeface="Verdana" pitchFamily="34" charset="-122"/>
-                <a:cs typeface="Verdana" pitchFamily="34" charset="-120"/>
-              </a:rPr>
-              <a:t>• A arquitetura e os ADRs</a:t>
-            </a:r>
-            <a:endParaRPr lang="en-US" sz="1250" dirty="0"/>
-          </a:p>
-          <a:p>
-            <a:pPr indent="0" marL="0">
-              <a:lnSpc>
-                <a:spcPct val="120000"/>
-              </a:lnSpc>
-              <a:buNone/>
-            </a:pPr>
-            <a:endParaRPr lang="en-US" sz="1250" dirty="0"/>
-          </a:p>
-          <a:p>
-            <a:pPr indent="0" marL="0">
-              <a:lnSpc>
-                <a:spcPct val="120000"/>
-              </a:lnSpc>
-              <a:buNone/>
-            </a:pPr>
-            <a:r>
-              <a:rPr lang="en-US" sz="1250" dirty="0">
-                <a:solidFill>
-                  <a:srgbClr val="9FADBE"/>
-                </a:solidFill>
-                <a:latin typeface="Verdana" pitchFamily="34" charset="0"/>
-                <a:ea typeface="Verdana" pitchFamily="34" charset="-122"/>
-                <a:cs typeface="Verdana" pitchFamily="34" charset="-120"/>
-              </a:rPr>
-              <a:t>• A calibração dos conjuntos e das 27 regras</a:t>
-            </a:r>
-            <a:endParaRPr lang="en-US" sz="1250" dirty="0"/>
-          </a:p>
-          <a:p>
-            <a:pPr indent="0" marL="0">
-              <a:lnSpc>
-                <a:spcPct val="120000"/>
-              </a:lnSpc>
-              <a:buNone/>
-            </a:pPr>
-            <a:endParaRPr lang="en-US" sz="1250" dirty="0"/>
-          </a:p>
-          <a:p>
-            <a:pPr indent="0" marL="0">
-              <a:lnSpc>
-                <a:spcPct val="120000"/>
-              </a:lnSpc>
-              <a:buNone/>
-            </a:pPr>
-            <a:r>
-              <a:rPr lang="en-US" sz="1250" dirty="0">
-                <a:solidFill>
-                  <a:srgbClr val="9FADBE"/>
-                </a:solidFill>
-                <a:latin typeface="Verdana" pitchFamily="34" charset="0"/>
-                <a:ea typeface="Verdana" pitchFamily="34" charset="-122"/>
-                <a:cs typeface="Verdana" pitchFamily="34" charset="-120"/>
-              </a:rPr>
-              <a:t>• Escrever o motor Mamdani do zero</a:t>
-            </a:r>
-            <a:endParaRPr lang="en-US" sz="1250" dirty="0"/>
-          </a:p>
-          <a:p>
-            <a:pPr indent="0" marL="0">
-              <a:lnSpc>
-                <a:spcPct val="120000"/>
-              </a:lnSpc>
-              <a:buNone/>
-            </a:pPr>
-            <a:endParaRPr lang="en-US" sz="1250" dirty="0"/>
-          </a:p>
-          <a:p>
-            <a:pPr indent="0" marL="0">
-              <a:lnSpc>
-                <a:spcPct val="120000"/>
-              </a:lnSpc>
-              <a:buNone/>
-            </a:pPr>
-            <a:r>
-              <a:rPr lang="en-US" sz="1250" dirty="0">
-                <a:solidFill>
-                  <a:srgbClr val="9FADBE"/>
-                </a:solidFill>
-                <a:latin typeface="Verdana" pitchFamily="34" charset="0"/>
-                <a:ea typeface="Verdana" pitchFamily="34" charset="-122"/>
-                <a:cs typeface="Verdana" pitchFamily="34" charset="-120"/>
-              </a:rPr>
-              <a:t>• Não mostrar o score ao aluno</a:t>
-            </a:r>
-            <a:endParaRPr lang="en-US" sz="1250" dirty="0"/>
-          </a:p>
-          <a:p>
-            <a:pPr indent="0" marL="0">
-              <a:lnSpc>
-                <a:spcPct val="120000"/>
-              </a:lnSpc>
-              <a:buNone/>
-            </a:pPr>
-            <a:endParaRPr lang="en-US" sz="1250" dirty="0"/>
-          </a:p>
-          <a:p>
-            <a:pPr indent="0" marL="0">
-              <a:lnSpc>
-                <a:spcPct val="120000"/>
-              </a:lnSpc>
-              <a:buNone/>
-            </a:pPr>
-            <a:r>
-              <a:rPr lang="en-US" sz="1250" dirty="0">
-                <a:solidFill>
-                  <a:srgbClr val="9FADBE"/>
-                </a:solidFill>
-                <a:latin typeface="Verdana" pitchFamily="34" charset="0"/>
-                <a:ea typeface="Verdana" pitchFamily="34" charset="-122"/>
-                <a:cs typeface="Verdana" pitchFamily="34" charset="-120"/>
-              </a:rPr>
-              <a:t>• O conjunto de avaliação e a leitura dos resultados</a:t>
-            </a:r>
-            <a:endParaRPr lang="en-US" sz="1250" dirty="0"/>
-          </a:p>
-        </p:txBody>
-      </p:sp>
-      <p:sp>
-        <p:nvSpPr>
-          <p:cNvPr id="10" name="Text 8"/>
-          <p:cNvSpPr/>
-          <p:nvPr/>
-        </p:nvSpPr>
-        <p:spPr>
-          <a:xfrm>
-            <a:off x="640080" y="5303520"/>
-            <a:ext cx="10881360" cy="640080"/>
-          </a:xfrm>
-          <a:prstGeom prst="rect">
-            <a:avLst/>
-          </a:prstGeom>
-          <a:noFill/>
-          <a:ln/>
-        </p:spPr>
-        <p:txBody>
-          <a:bodyPr wrap="square" rtlCol="0" anchor="ctr"/>
-          <a:lstStyle/>
-          <a:p>
-            <a:pPr indent="0" marL="0">
-              <a:buNone/>
-            </a:pPr>
-            <a:r>
-              <a:rPr lang="en-US" sz="1300" b="1" dirty="0">
-                <a:solidFill>
-                  <a:srgbClr val="E6EAEF"/>
-                </a:solidFill>
-                <a:latin typeface="Verdana" pitchFamily="34" charset="0"/>
-                <a:ea typeface="Verdana" pitchFamily="34" charset="-122"/>
-                <a:cs typeface="Verdana" pitchFamily="34" charset="-120"/>
-              </a:rPr>
-              <a:t>Todo número deste trabalho sai de um script executável do repositório. Nenhum foi estimado. Onde não medimos, dissemos que não medimos.</a:t>
-            </a:r>
-            <a:endParaRPr lang="en-US" sz="1300" dirty="0"/>
-          </a:p>
-        </p:txBody>
-      </p:sp>
-      <p:sp>
-        <p:nvSpPr>
-          <p:cNvPr id="11" name="Text 9"/>
+        </p:txBody>
+      </p:sp>
+      <p:sp>
+        <p:nvSpPr>
+          <p:cNvPr id="6" name="Text 3"/>
           <p:cNvSpPr/>
           <p:nvPr/>
         </p:nvSpPr>
@@ -2649,7 +3824,7 @@
       </p:sp>
       <p:sp>
         <p:nvSpPr>
-          <p:cNvPr id="12" name="Text 10"/>
+          <p:cNvPr id="7" name="Text 4"/>
           <p:cNvSpPr/>
           <p:nvPr/>
         </p:nvSpPr>
@@ -2751,7 +3926,7 @@
                 <a:ea typeface="Verdana" pitchFamily="34" charset="-122"/>
                 <a:cs typeface="Verdana" pitchFamily="34" charset="-120"/>
               </a:rPr>
-              <a:t>DEMONSTRAÇÃO</a:t>
+              <a:t>ÉTICA</a:t>
             </a:r>
             <a:endParaRPr lang="en-US" sz="1100" dirty="0"/>
           </a:p>
@@ -2790,7 +3965,7 @@
                 <a:ea typeface="Verdana" pitchFamily="34" charset="-122"/>
                 <a:cs typeface="Verdana" pitchFamily="34" charset="-120"/>
               </a:rPr>
-              <a:t>O que vamos mostrar agora, ao vivo</a:t>
+              <a:t>Sobre o uso de IA neste trabalho</a:t>
             </a:r>
             <a:endParaRPr lang="en-US" sz="2800" dirty="0"/>
           </a:p>
@@ -2804,12 +3979,12 @@
         </p:nvSpPr>
         <p:spPr>
           <a:xfrm>
-            <a:off x="640080" y="1874520"/>
-            <a:ext cx="10881360" cy="960120"/>
+            <a:off x="640080" y="1828800"/>
+            <a:ext cx="5303520" cy="3200400"/>
           </a:xfrm>
           <a:prstGeom prst="roundRect">
             <a:avLst>
-              <a:gd name="adj" fmla="val 7619"/>
+              <a:gd name="adj" fmla="val 2286"/>
             </a:avLst>
           </a:prstGeom>
           <a:solidFill>
@@ -2832,23 +4007,23 @@
         <p:spPr>
           <a:xfrm>
             <a:off x="914400" y="2057400"/>
-            <a:ext cx="457200" cy="548640"/>
-          </a:xfrm>
-          <a:prstGeom prst="rect">
-            <a:avLst/>
-          </a:prstGeom>
-          <a:noFill/>
-          <a:ln/>
-        </p:spPr>
-        <p:txBody>
-          <a:bodyPr wrap="square" rtlCol="0" anchor="ctr"/>
-          <a:lstStyle/>
-          <a:p>
-            <a:pPr indent="0" marL="0">
-              <a:buNone/>
-            </a:pPr>
-            <a:r>
-              <a:rPr lang="en-US" sz="2200" b="1" dirty="0">
+            <a:ext cx="4754880" cy="365760"/>
+          </a:xfrm>
+          <a:prstGeom prst="rect">
+            <a:avLst/>
+          </a:prstGeom>
+          <a:noFill/>
+          <a:ln/>
+        </p:spPr>
+        <p:txBody>
+          <a:bodyPr wrap="square" rtlCol="0" anchor="ctr"/>
+          <a:lstStyle/>
+          <a:p>
+            <a:pPr indent="0" marL="0">
+              <a:buNone/>
+            </a:pPr>
+            <a:r>
+              <a:rPr lang="en-US" sz="1600" b="1" dirty="0">
                 <a:solidFill>
                   <a:srgbClr val="45BD8A"/>
                 </a:solidFill>
@@ -2856,9 +4031,9 @@
                 <a:ea typeface="Verdana" pitchFamily="34" charset="-122"/>
                 <a:cs typeface="Verdana" pitchFamily="34" charset="-120"/>
               </a:rPr>
-              <a:t>1</a:t>
-            </a:r>
-            <a:endParaRPr lang="en-US" sz="2200" dirty="0"/>
+              <a:t>Feito com apoio de IA</a:t>
+            </a:r>
+            <a:endParaRPr lang="en-US" sz="1600" dirty="0"/>
           </a:p>
         </p:txBody>
       </p:sp>
@@ -2870,47 +4045,8 @@
         </p:nvSpPr>
         <p:spPr>
           <a:xfrm>
-            <a:off x="1554480" y="2002536"/>
-            <a:ext cx="2926080" cy="320040"/>
-          </a:xfrm>
-          <a:prstGeom prst="rect">
-            <a:avLst/>
-          </a:prstGeom>
-          <a:noFill/>
-          <a:ln/>
-        </p:spPr>
-        <p:txBody>
-          <a:bodyPr wrap="square" rtlCol="0" anchor="ctr"/>
-          <a:lstStyle/>
-          <a:p>
-            <a:pPr indent="0" marL="0">
-              <a:buNone/>
-            </a:pPr>
-            <a:r>
-              <a:rPr lang="en-US" sz="1400" b="1" dirty="0">
-                <a:solidFill>
-                  <a:srgbClr val="FFFFFF"/>
-                </a:solidFill>
-                <a:latin typeface="Verdana" pitchFamily="34" charset="0"/>
-                <a:ea typeface="Verdana" pitchFamily="34" charset="-122"/>
-                <a:cs typeface="Verdana" pitchFamily="34" charset="-120"/>
-              </a:rPr>
-              <a:t>Painel de risco</a:t>
-            </a:r>
-            <a:endParaRPr lang="en-US" sz="1400" dirty="0"/>
-          </a:p>
-        </p:txBody>
-      </p:sp>
-      <p:sp>
-        <p:nvSpPr>
-          <p:cNvPr id="7" name="Text 5"/>
-          <p:cNvSpPr/>
-          <p:nvPr/>
-        </p:nvSpPr>
-        <p:spPr>
-          <a:xfrm>
-            <a:off x="4480560" y="2020824"/>
-            <a:ext cx="6858000" cy="685800"/>
+            <a:off x="914400" y="2560320"/>
+            <a:ext cx="4754880" cy="2194560"/>
           </a:xfrm>
           <a:prstGeom prst="rect">
             <a:avLst/>
@@ -2924,12 +4060,12 @@
           <a:p>
             <a:pPr indent="0" marL="0">
               <a:lnSpc>
-                <a:spcPct val="110000"/>
+                <a:spcPct val="120000"/>
               </a:lnSpc>
               <a:buNone/>
             </a:pPr>
             <a:r>
-              <a:rPr lang="en-US" sz="1150" dirty="0">
+              <a:rPr lang="en-US" sz="1250" dirty="0">
                 <a:solidFill>
                   <a:srgbClr val="9FADBE"/>
                 </a:solidFill>
@@ -2937,26 +4073,84 @@
                 <a:ea typeface="Verdana" pitchFamily="34" charset="-122"/>
                 <a:cs typeface="Verdana" pitchFamily="34" charset="-120"/>
               </a:rPr>
-              <a:t>A turma ordenada por score. Abrir o aluno do topo e mostrar as regras que produziram o número e a ação sugerida.</a:t>
-            </a:r>
-            <a:endParaRPr lang="en-US" sz="1150" dirty="0"/>
-          </a:p>
-        </p:txBody>
-      </p:sp>
-      <p:sp>
-        <p:nvSpPr>
-          <p:cNvPr id="8" name="Shape 6"/>
-          <p:cNvSpPr/>
-          <p:nvPr/>
-        </p:nvSpPr>
-        <p:spPr>
-          <a:xfrm>
-            <a:off x="640080" y="2971800"/>
-            <a:ext cx="10881360" cy="960120"/>
+              <a:t>• Boa parte do código: rotas, validações, interface e testes de tabela</a:t>
+            </a:r>
+            <a:endParaRPr lang="en-US" sz="1250" dirty="0"/>
+          </a:p>
+          <a:p>
+            <a:pPr indent="0" marL="0">
+              <a:lnSpc>
+                <a:spcPct val="120000"/>
+              </a:lnSpc>
+              <a:buNone/>
+            </a:pPr>
+            <a:endParaRPr lang="en-US" sz="1250" dirty="0"/>
+          </a:p>
+          <a:p>
+            <a:pPr indent="0" marL="0">
+              <a:lnSpc>
+                <a:spcPct val="120000"/>
+              </a:lnSpc>
+              <a:buNone/>
+            </a:pPr>
+            <a:r>
+              <a:rPr lang="en-US" sz="1250" dirty="0">
+                <a:solidFill>
+                  <a:srgbClr val="9FADBE"/>
+                </a:solidFill>
+                <a:latin typeface="Verdana" pitchFamily="34" charset="0"/>
+                <a:ea typeface="Verdana" pitchFamily="34" charset="-122"/>
+                <a:cs typeface="Verdana" pitchFamily="34" charset="-120"/>
+              </a:rPr>
+              <a:t>• Estruturação da documentação</a:t>
+            </a:r>
+            <a:endParaRPr lang="en-US" sz="1250" dirty="0"/>
+          </a:p>
+          <a:p>
+            <a:pPr indent="0" marL="0">
+              <a:lnSpc>
+                <a:spcPct val="120000"/>
+              </a:lnSpc>
+              <a:buNone/>
+            </a:pPr>
+            <a:endParaRPr lang="en-US" sz="1250" dirty="0"/>
+          </a:p>
+          <a:p>
+            <a:pPr indent="0" marL="0">
+              <a:lnSpc>
+                <a:spcPct val="120000"/>
+              </a:lnSpc>
+              <a:buNone/>
+            </a:pPr>
+            <a:r>
+              <a:rPr lang="en-US" sz="1250" dirty="0">
+                <a:solidFill>
+                  <a:srgbClr val="9FADBE"/>
+                </a:solidFill>
+                <a:latin typeface="Verdana" pitchFamily="34" charset="0"/>
+                <a:ea typeface="Verdana" pitchFamily="34" charset="-122"/>
+                <a:cs typeface="Verdana" pitchFamily="34" charset="-120"/>
+              </a:rPr>
+              <a:t>• Revisão de ortografia e clareza</a:t>
+            </a:r>
+            <a:endParaRPr lang="en-US" sz="1250" dirty="0"/>
+          </a:p>
+        </p:txBody>
+      </p:sp>
+      <p:sp>
+        <p:nvSpPr>
+          <p:cNvPr id="7" name="Shape 5"/>
+          <p:cNvSpPr/>
+          <p:nvPr/>
+        </p:nvSpPr>
+        <p:spPr>
+          <a:xfrm>
+            <a:off x="6263640" y="1828800"/>
+            <a:ext cx="5303520" cy="3200400"/>
           </a:xfrm>
           <a:prstGeom prst="roundRect">
             <a:avLst>
-              <a:gd name="adj" fmla="val 7619"/>
+              <a:gd name="adj" fmla="val 2286"/>
             </a:avLst>
           </a:prstGeom>
           <a:solidFill>
@@ -2972,40 +4166,198 @@
       </p:sp>
       <p:sp>
         <p:nvSpPr>
+          <p:cNvPr id="8" name="Text 6"/>
+          <p:cNvSpPr/>
+          <p:nvPr/>
+        </p:nvSpPr>
+        <p:spPr>
+          <a:xfrm>
+            <a:off x="6537960" y="2057400"/>
+            <a:ext cx="4754880" cy="365760"/>
+          </a:xfrm>
+          <a:prstGeom prst="rect">
+            <a:avLst/>
+          </a:prstGeom>
+          <a:noFill/>
+          <a:ln/>
+        </p:spPr>
+        <p:txBody>
+          <a:bodyPr wrap="square" rtlCol="0" anchor="ctr"/>
+          <a:lstStyle/>
+          <a:p>
+            <a:pPr indent="0" marL="0">
+              <a:buNone/>
+            </a:pPr>
+            <a:r>
+              <a:rPr lang="en-US" sz="1600" b="1" dirty="0">
+                <a:solidFill>
+                  <a:srgbClr val="45BD8A"/>
+                </a:solidFill>
+                <a:latin typeface="Verdana" pitchFamily="34" charset="0"/>
+                <a:ea typeface="Verdana" pitchFamily="34" charset="-122"/>
+                <a:cs typeface="Verdana" pitchFamily="34" charset="-120"/>
+              </a:rPr>
+              <a:t>Decisão do grupo</a:t>
+            </a:r>
+            <a:endParaRPr lang="en-US" sz="1600" dirty="0"/>
+          </a:p>
+        </p:txBody>
+      </p:sp>
+      <p:sp>
+        <p:nvSpPr>
           <p:cNvPr id="9" name="Text 7"/>
           <p:cNvSpPr/>
           <p:nvPr/>
         </p:nvSpPr>
         <p:spPr>
           <a:xfrm>
-            <a:off x="914400" y="3154680"/>
-            <a:ext cx="457200" cy="548640"/>
-          </a:xfrm>
-          <a:prstGeom prst="rect">
-            <a:avLst/>
-          </a:prstGeom>
-          <a:noFill/>
-          <a:ln/>
-        </p:spPr>
-        <p:txBody>
-          <a:bodyPr wrap="square" rtlCol="0" anchor="ctr"/>
-          <a:lstStyle/>
-          <a:p>
-            <a:pPr indent="0" marL="0">
-              <a:buNone/>
-            </a:pPr>
-            <a:r>
-              <a:rPr lang="en-US" sz="2200" b="1" dirty="0">
-                <a:solidFill>
-                  <a:srgbClr val="45BD8A"/>
-                </a:solidFill>
-                <a:latin typeface="Verdana" pitchFamily="34" charset="0"/>
-                <a:ea typeface="Verdana" pitchFamily="34" charset="-122"/>
-                <a:cs typeface="Verdana" pitchFamily="34" charset="-120"/>
-              </a:rPr>
-              <a:t>2</a:t>
-            </a:r>
-            <a:endParaRPr lang="en-US" sz="2200" dirty="0"/>
+            <a:off x="6537960" y="2560320"/>
+            <a:ext cx="4754880" cy="2286000"/>
+          </a:xfrm>
+          <a:prstGeom prst="rect">
+            <a:avLst/>
+          </a:prstGeom>
+          <a:noFill/>
+          <a:ln/>
+        </p:spPr>
+        <p:txBody>
+          <a:bodyPr wrap="square" rtlCol="0" anchor="ctr"/>
+          <a:lstStyle/>
+          <a:p>
+            <a:pPr indent="0" marL="0">
+              <a:lnSpc>
+                <a:spcPct val="120000"/>
+              </a:lnSpc>
+              <a:buNone/>
+            </a:pPr>
+            <a:r>
+              <a:rPr lang="en-US" sz="1250" dirty="0">
+                <a:solidFill>
+                  <a:srgbClr val="9FADBE"/>
+                </a:solidFill>
+                <a:latin typeface="Verdana" pitchFamily="34" charset="0"/>
+                <a:ea typeface="Verdana" pitchFamily="34" charset="-122"/>
+                <a:cs typeface="Verdana" pitchFamily="34" charset="-120"/>
+              </a:rPr>
+              <a:t>• A arquitetura e os ADRs</a:t>
+            </a:r>
+            <a:endParaRPr lang="en-US" sz="1250" dirty="0"/>
+          </a:p>
+          <a:p>
+            <a:pPr indent="0" marL="0">
+              <a:lnSpc>
+                <a:spcPct val="120000"/>
+              </a:lnSpc>
+              <a:buNone/>
+            </a:pPr>
+            <a:endParaRPr lang="en-US" sz="1250" dirty="0"/>
+          </a:p>
+          <a:p>
+            <a:pPr indent="0" marL="0">
+              <a:lnSpc>
+                <a:spcPct val="120000"/>
+              </a:lnSpc>
+              <a:buNone/>
+            </a:pPr>
+            <a:r>
+              <a:rPr lang="en-US" sz="1250" dirty="0">
+                <a:solidFill>
+                  <a:srgbClr val="9FADBE"/>
+                </a:solidFill>
+                <a:latin typeface="Verdana" pitchFamily="34" charset="0"/>
+                <a:ea typeface="Verdana" pitchFamily="34" charset="-122"/>
+                <a:cs typeface="Verdana" pitchFamily="34" charset="-120"/>
+              </a:rPr>
+              <a:t>• A calibração dos conjuntos e das 27 regras</a:t>
+            </a:r>
+            <a:endParaRPr lang="en-US" sz="1250" dirty="0"/>
+          </a:p>
+          <a:p>
+            <a:pPr indent="0" marL="0">
+              <a:lnSpc>
+                <a:spcPct val="120000"/>
+              </a:lnSpc>
+              <a:buNone/>
+            </a:pPr>
+            <a:endParaRPr lang="en-US" sz="1250" dirty="0"/>
+          </a:p>
+          <a:p>
+            <a:pPr indent="0" marL="0">
+              <a:lnSpc>
+                <a:spcPct val="120000"/>
+              </a:lnSpc>
+              <a:buNone/>
+            </a:pPr>
+            <a:r>
+              <a:rPr lang="en-US" sz="1250" dirty="0">
+                <a:solidFill>
+                  <a:srgbClr val="9FADBE"/>
+                </a:solidFill>
+                <a:latin typeface="Verdana" pitchFamily="34" charset="0"/>
+                <a:ea typeface="Verdana" pitchFamily="34" charset="-122"/>
+                <a:cs typeface="Verdana" pitchFamily="34" charset="-120"/>
+              </a:rPr>
+              <a:t>• Escrever o motor Mamdani do zero</a:t>
+            </a:r>
+            <a:endParaRPr lang="en-US" sz="1250" dirty="0"/>
+          </a:p>
+          <a:p>
+            <a:pPr indent="0" marL="0">
+              <a:lnSpc>
+                <a:spcPct val="120000"/>
+              </a:lnSpc>
+              <a:buNone/>
+            </a:pPr>
+            <a:endParaRPr lang="en-US" sz="1250" dirty="0"/>
+          </a:p>
+          <a:p>
+            <a:pPr indent="0" marL="0">
+              <a:lnSpc>
+                <a:spcPct val="120000"/>
+              </a:lnSpc>
+              <a:buNone/>
+            </a:pPr>
+            <a:r>
+              <a:rPr lang="en-US" sz="1250" dirty="0">
+                <a:solidFill>
+                  <a:srgbClr val="9FADBE"/>
+                </a:solidFill>
+                <a:latin typeface="Verdana" pitchFamily="34" charset="0"/>
+                <a:ea typeface="Verdana" pitchFamily="34" charset="-122"/>
+                <a:cs typeface="Verdana" pitchFamily="34" charset="-120"/>
+              </a:rPr>
+              <a:t>• Não mostrar o score ao aluno</a:t>
+            </a:r>
+            <a:endParaRPr lang="en-US" sz="1250" dirty="0"/>
+          </a:p>
+          <a:p>
+            <a:pPr indent="0" marL="0">
+              <a:lnSpc>
+                <a:spcPct val="120000"/>
+              </a:lnSpc>
+              <a:buNone/>
+            </a:pPr>
+            <a:endParaRPr lang="en-US" sz="1250" dirty="0"/>
+          </a:p>
+          <a:p>
+            <a:pPr indent="0" marL="0">
+              <a:lnSpc>
+                <a:spcPct val="120000"/>
+              </a:lnSpc>
+              <a:buNone/>
+            </a:pPr>
+            <a:r>
+              <a:rPr lang="en-US" sz="1250" dirty="0">
+                <a:solidFill>
+                  <a:srgbClr val="9FADBE"/>
+                </a:solidFill>
+                <a:latin typeface="Verdana" pitchFamily="34" charset="0"/>
+                <a:ea typeface="Verdana" pitchFamily="34" charset="-122"/>
+                <a:cs typeface="Verdana" pitchFamily="34" charset="-120"/>
+              </a:rPr>
+              <a:t>• O conjunto de avaliação e a leitura dos resultados</a:t>
+            </a:r>
+            <a:endParaRPr lang="en-US" sz="1250" dirty="0"/>
           </a:p>
         </p:txBody>
       </p:sp>
@@ -3017,415 +4369,40 @@
         </p:nvSpPr>
         <p:spPr>
           <a:xfrm>
-            <a:off x="1554480" y="3099816"/>
-            <a:ext cx="2926080" cy="320040"/>
-          </a:xfrm>
-          <a:prstGeom prst="rect">
-            <a:avLst/>
-          </a:prstGeom>
-          <a:noFill/>
-          <a:ln/>
-        </p:spPr>
-        <p:txBody>
-          <a:bodyPr wrap="square" rtlCol="0" anchor="ctr"/>
-          <a:lstStyle/>
-          <a:p>
-            <a:pPr indent="0" marL="0">
-              <a:buNone/>
-            </a:pPr>
-            <a:r>
-              <a:rPr lang="en-US" sz="1400" b="1" dirty="0">
-                <a:solidFill>
-                  <a:srgbClr val="FFFFFF"/>
-                </a:solidFill>
-                <a:latin typeface="Verdana" pitchFamily="34" charset="0"/>
-                <a:ea typeface="Verdana" pitchFamily="34" charset="-122"/>
-                <a:cs typeface="Verdana" pitchFamily="34" charset="-120"/>
-              </a:rPr>
-              <a:t>O caso central</a:t>
-            </a:r>
-            <a:endParaRPr lang="en-US" sz="1400" dirty="0"/>
+            <a:off x="640080" y="5303520"/>
+            <a:ext cx="10881360" cy="640080"/>
+          </a:xfrm>
+          <a:prstGeom prst="rect">
+            <a:avLst/>
+          </a:prstGeom>
+          <a:noFill/>
+          <a:ln/>
+        </p:spPr>
+        <p:txBody>
+          <a:bodyPr wrap="square" rtlCol="0" anchor="ctr"/>
+          <a:lstStyle/>
+          <a:p>
+            <a:pPr indent="0" marL="0">
+              <a:buNone/>
+            </a:pPr>
+            <a:r>
+              <a:rPr lang="en-US" sz="1300" b="1" dirty="0">
+                <a:solidFill>
+                  <a:srgbClr val="E6EAEF"/>
+                </a:solidFill>
+                <a:latin typeface="Verdana" pitchFamily="34" charset="0"/>
+                <a:ea typeface="Verdana" pitchFamily="34" charset="-122"/>
+                <a:cs typeface="Verdana" pitchFamily="34" charset="-120"/>
+              </a:rPr>
+              <a:t>Todo número deste trabalho sai de um script executável do repositório. Nenhum foi estimado. Onde não medimos, dissemos que não medimos.</a:t>
+            </a:r>
+            <a:endParaRPr lang="en-US" sz="1300" dirty="0"/>
           </a:p>
         </p:txBody>
       </p:sp>
       <p:sp>
         <p:nvSpPr>
           <p:cNvPr id="11" name="Text 9"/>
-          <p:cNvSpPr/>
-          <p:nvPr/>
-        </p:nvSpPr>
-        <p:spPr>
-          <a:xfrm>
-            <a:off x="4480560" y="3118104"/>
-            <a:ext cx="6858000" cy="685800"/>
-          </a:xfrm>
-          <a:prstGeom prst="rect">
-            <a:avLst/>
-          </a:prstGeom>
-          <a:noFill/>
-          <a:ln/>
-        </p:spPr>
-        <p:txBody>
-          <a:bodyPr wrap="square" rtlCol="0" anchor="ctr"/>
-          <a:lstStyle/>
-          <a:p>
-            <a:pPr indent="0" marL="0">
-              <a:lnSpc>
-                <a:spcPct val="110000"/>
-              </a:lnSpc>
-              <a:buNone/>
-            </a:pPr>
-            <a:r>
-              <a:rPr lang="en-US" sz="1150" dirty="0">
-                <a:solidFill>
-                  <a:srgbClr val="9FADBE"/>
-                </a:solidFill>
-                <a:latin typeface="Verdana" pitchFamily="34" charset="0"/>
-                <a:ea typeface="Verdana" pitchFamily="34" charset="-122"/>
-                <a:cs typeface="Verdana" pitchFamily="34" charset="-120"/>
-              </a:rPr>
-              <a:t>Simular frequência 34% com média 8,6. Risco alto pelo fuzzy, sem risco pelo critério de nota.</a:t>
-            </a:r>
-            <a:endParaRPr lang="en-US" sz="1150" dirty="0"/>
-          </a:p>
-        </p:txBody>
-      </p:sp>
-      <p:sp>
-        <p:nvSpPr>
-          <p:cNvPr id="12" name="Shape 10"/>
-          <p:cNvSpPr/>
-          <p:nvPr/>
-        </p:nvSpPr>
-        <p:spPr>
-          <a:xfrm>
-            <a:off x="640080" y="4069080"/>
-            <a:ext cx="10881360" cy="960120"/>
-          </a:xfrm>
-          <a:prstGeom prst="roundRect">
-            <a:avLst>
-              <a:gd name="adj" fmla="val 7619"/>
-            </a:avLst>
-          </a:prstGeom>
-          <a:solidFill>
-            <a:srgbClr val="141B26"/>
-          </a:solidFill>
-          <a:ln w="12700">
-            <a:solidFill>
-              <a:srgbClr val="2B3849"/>
-            </a:solidFill>
-            <a:prstDash val="solid"/>
-          </a:ln>
-        </p:spPr>
-      </p:sp>
-      <p:sp>
-        <p:nvSpPr>
-          <p:cNvPr id="13" name="Text 11"/>
-          <p:cNvSpPr/>
-          <p:nvPr/>
-        </p:nvSpPr>
-        <p:spPr>
-          <a:xfrm>
-            <a:off x="914400" y="4251960"/>
-            <a:ext cx="457200" cy="548640"/>
-          </a:xfrm>
-          <a:prstGeom prst="rect">
-            <a:avLst/>
-          </a:prstGeom>
-          <a:noFill/>
-          <a:ln/>
-        </p:spPr>
-        <p:txBody>
-          <a:bodyPr wrap="square" rtlCol="0" anchor="ctr"/>
-          <a:lstStyle/>
-          <a:p>
-            <a:pPr indent="0" marL="0">
-              <a:buNone/>
-            </a:pPr>
-            <a:r>
-              <a:rPr lang="en-US" sz="2200" b="1" dirty="0">
-                <a:solidFill>
-                  <a:srgbClr val="45BD8A"/>
-                </a:solidFill>
-                <a:latin typeface="Verdana" pitchFamily="34" charset="0"/>
-                <a:ea typeface="Verdana" pitchFamily="34" charset="-122"/>
-                <a:cs typeface="Verdana" pitchFamily="34" charset="-120"/>
-              </a:rPr>
-              <a:t>3</a:t>
-            </a:r>
-            <a:endParaRPr lang="en-US" sz="2200" dirty="0"/>
-          </a:p>
-        </p:txBody>
-      </p:sp>
-      <p:sp>
-        <p:nvSpPr>
-          <p:cNvPr id="14" name="Text 12"/>
-          <p:cNvSpPr/>
-          <p:nvPr/>
-        </p:nvSpPr>
-        <p:spPr>
-          <a:xfrm>
-            <a:off x="1554480" y="4197096"/>
-            <a:ext cx="2926080" cy="320040"/>
-          </a:xfrm>
-          <a:prstGeom prst="rect">
-            <a:avLst/>
-          </a:prstGeom>
-          <a:noFill/>
-          <a:ln/>
-        </p:spPr>
-        <p:txBody>
-          <a:bodyPr wrap="square" rtlCol="0" anchor="ctr"/>
-          <a:lstStyle/>
-          <a:p>
-            <a:pPr indent="0" marL="0">
-              <a:buNone/>
-            </a:pPr>
-            <a:r>
-              <a:rPr lang="en-US" sz="1400" b="1" dirty="0">
-                <a:solidFill>
-                  <a:srgbClr val="FFFFFF"/>
-                </a:solidFill>
-                <a:latin typeface="Verdana" pitchFamily="34" charset="0"/>
-                <a:ea typeface="Verdana" pitchFamily="34" charset="-122"/>
-                <a:cs typeface="Verdana" pitchFamily="34" charset="-120"/>
-              </a:rPr>
-              <a:t>Assistente respondendo</a:t>
-            </a:r>
-            <a:endParaRPr lang="en-US" sz="1400" dirty="0"/>
-          </a:p>
-        </p:txBody>
-      </p:sp>
-      <p:sp>
-        <p:nvSpPr>
-          <p:cNvPr id="15" name="Text 13"/>
-          <p:cNvSpPr/>
-          <p:nvPr/>
-        </p:nvSpPr>
-        <p:spPr>
-          <a:xfrm>
-            <a:off x="4480560" y="4215384"/>
-            <a:ext cx="6858000" cy="685800"/>
-          </a:xfrm>
-          <a:prstGeom prst="rect">
-            <a:avLst/>
-          </a:prstGeom>
-          <a:noFill/>
-          <a:ln/>
-        </p:spPr>
-        <p:txBody>
-          <a:bodyPr wrap="square" rtlCol="0" anchor="ctr"/>
-          <a:lstStyle/>
-          <a:p>
-            <a:pPr indent="0" marL="0">
-              <a:lnSpc>
-                <a:spcPct val="110000"/>
-              </a:lnSpc>
-              <a:buNone/>
-            </a:pPr>
-            <a:r>
-              <a:rPr lang="en-US" sz="1150" dirty="0">
-                <a:solidFill>
-                  <a:srgbClr val="9FADBE"/>
-                </a:solidFill>
-                <a:latin typeface="Verdana" pitchFamily="34" charset="0"/>
-                <a:ea typeface="Verdana" pitchFamily="34" charset="-122"/>
-                <a:cs typeface="Verdana" pitchFamily="34" charset="-120"/>
-              </a:rPr>
-              <a:t>"Quando é a Prova P1?" Resposta com a data e a fonte citada, conferível contra o cronograma real.</a:t>
-            </a:r>
-            <a:endParaRPr lang="en-US" sz="1150" dirty="0"/>
-          </a:p>
-        </p:txBody>
-      </p:sp>
-      <p:sp>
-        <p:nvSpPr>
-          <p:cNvPr id="16" name="Shape 14"/>
-          <p:cNvSpPr/>
-          <p:nvPr/>
-        </p:nvSpPr>
-        <p:spPr>
-          <a:xfrm>
-            <a:off x="640080" y="5166360"/>
-            <a:ext cx="10881360" cy="960120"/>
-          </a:xfrm>
-          <a:prstGeom prst="roundRect">
-            <a:avLst>
-              <a:gd name="adj" fmla="val 7619"/>
-            </a:avLst>
-          </a:prstGeom>
-          <a:solidFill>
-            <a:srgbClr val="141B26"/>
-          </a:solidFill>
-          <a:ln w="12700">
-            <a:solidFill>
-              <a:srgbClr val="2B3849"/>
-            </a:solidFill>
-            <a:prstDash val="solid"/>
-          </a:ln>
-        </p:spPr>
-      </p:sp>
-      <p:sp>
-        <p:nvSpPr>
-          <p:cNvPr id="17" name="Text 15"/>
-          <p:cNvSpPr/>
-          <p:nvPr/>
-        </p:nvSpPr>
-        <p:spPr>
-          <a:xfrm>
-            <a:off x="914400" y="5349240"/>
-            <a:ext cx="457200" cy="548640"/>
-          </a:xfrm>
-          <a:prstGeom prst="rect">
-            <a:avLst/>
-          </a:prstGeom>
-          <a:noFill/>
-          <a:ln/>
-        </p:spPr>
-        <p:txBody>
-          <a:bodyPr wrap="square" rtlCol="0" anchor="ctr"/>
-          <a:lstStyle/>
-          <a:p>
-            <a:pPr indent="0" marL="0">
-              <a:buNone/>
-            </a:pPr>
-            <a:r>
-              <a:rPr lang="en-US" sz="2200" b="1" dirty="0">
-                <a:solidFill>
-                  <a:srgbClr val="45BD8A"/>
-                </a:solidFill>
-                <a:latin typeface="Verdana" pitchFamily="34" charset="0"/>
-                <a:ea typeface="Verdana" pitchFamily="34" charset="-122"/>
-                <a:cs typeface="Verdana" pitchFamily="34" charset="-120"/>
-              </a:rPr>
-              <a:t>4</a:t>
-            </a:r>
-            <a:endParaRPr lang="en-US" sz="2200" dirty="0"/>
-          </a:p>
-        </p:txBody>
-      </p:sp>
-      <p:sp>
-        <p:nvSpPr>
-          <p:cNvPr id="18" name="Text 16"/>
-          <p:cNvSpPr/>
-          <p:nvPr/>
-        </p:nvSpPr>
-        <p:spPr>
-          <a:xfrm>
-            <a:off x="1554480" y="5294376"/>
-            <a:ext cx="2926080" cy="320040"/>
-          </a:xfrm>
-          <a:prstGeom prst="rect">
-            <a:avLst/>
-          </a:prstGeom>
-          <a:noFill/>
-          <a:ln/>
-        </p:spPr>
-        <p:txBody>
-          <a:bodyPr wrap="square" rtlCol="0" anchor="ctr"/>
-          <a:lstStyle/>
-          <a:p>
-            <a:pPr indent="0" marL="0">
-              <a:buNone/>
-            </a:pPr>
-            <a:r>
-              <a:rPr lang="en-US" sz="1400" b="1" dirty="0">
-                <a:solidFill>
-                  <a:srgbClr val="FFFFFF"/>
-                </a:solidFill>
-                <a:latin typeface="Verdana" pitchFamily="34" charset="0"/>
-                <a:ea typeface="Verdana" pitchFamily="34" charset="-122"/>
-                <a:cs typeface="Verdana" pitchFamily="34" charset="-120"/>
-              </a:rPr>
-              <a:t>Assistente recusando</a:t>
-            </a:r>
-            <a:endParaRPr lang="en-US" sz="1400" dirty="0"/>
-          </a:p>
-        </p:txBody>
-      </p:sp>
-      <p:sp>
-        <p:nvSpPr>
-          <p:cNvPr id="19" name="Text 17"/>
-          <p:cNvSpPr/>
-          <p:nvPr/>
-        </p:nvSpPr>
-        <p:spPr>
-          <a:xfrm>
-            <a:off x="4480560" y="5312664"/>
-            <a:ext cx="6858000" cy="685800"/>
-          </a:xfrm>
-          <a:prstGeom prst="rect">
-            <a:avLst/>
-          </a:prstGeom>
-          <a:noFill/>
-          <a:ln/>
-        </p:spPr>
-        <p:txBody>
-          <a:bodyPr wrap="square" rtlCol="0" anchor="ctr"/>
-          <a:lstStyle/>
-          <a:p>
-            <a:pPr indent="0" marL="0">
-              <a:lnSpc>
-                <a:spcPct val="110000"/>
-              </a:lnSpc>
-              <a:buNone/>
-            </a:pPr>
-            <a:r>
-              <a:rPr lang="en-US" sz="1150" dirty="0">
-                <a:solidFill>
-                  <a:srgbClr val="9FADBE"/>
-                </a:solidFill>
-                <a:latin typeface="Verdana" pitchFamily="34" charset="0"/>
-                <a:ea typeface="Verdana" pitchFamily="34" charset="-122"/>
-                <a:cs typeface="Verdana" pitchFamily="34" charset="-120"/>
-              </a:rPr>
-              <a:t>"Qual o valor da mensalidade?" O sistema admite que não sabe.</a:t>
-            </a:r>
-            <a:endParaRPr lang="en-US" sz="1150" dirty="0"/>
-          </a:p>
-        </p:txBody>
-      </p:sp>
-      <p:sp>
-        <p:nvSpPr>
-          <p:cNvPr id="20" name="Text 18"/>
-          <p:cNvSpPr/>
-          <p:nvPr/>
-        </p:nvSpPr>
-        <p:spPr>
-          <a:xfrm>
-            <a:off x="640080" y="6263640"/>
-            <a:ext cx="10972800" cy="365760"/>
-          </a:xfrm>
-          <a:prstGeom prst="rect">
-            <a:avLst/>
-          </a:prstGeom>
-          <a:noFill/>
-          <a:ln/>
-        </p:spPr>
-        <p:txBody>
-          <a:bodyPr wrap="square" rtlCol="0" anchor="ctr"/>
-          <a:lstStyle/>
-          <a:p>
-            <a:pPr indent="0" marL="0">
-              <a:buNone/>
-            </a:pPr>
-            <a:r>
-              <a:rPr lang="en-US" sz="1500" b="1" dirty="0">
-                <a:solidFill>
-                  <a:srgbClr val="45BD8A"/>
-                </a:solidFill>
-                <a:latin typeface="Verdana" pitchFamily="34" charset="0"/>
-                <a:ea typeface="Verdana" pitchFamily="34" charset="-122"/>
-                <a:cs typeface="Verdana" pitchFamily="34" charset="-120"/>
-              </a:rPr>
-              <a:t>permaneia.vercel.app</a:t>
-            </a:r>
-            <a:endParaRPr lang="en-US" sz="1500" dirty="0"/>
-          </a:p>
-        </p:txBody>
-      </p:sp>
-      <p:sp>
-        <p:nvSpPr>
-          <p:cNvPr id="21" name="Text 19"/>
           <p:cNvSpPr/>
           <p:nvPr/>
         </p:nvSpPr>
@@ -3464,7 +4441,7 @@
       </p:sp>
       <p:sp>
         <p:nvSpPr>
-          <p:cNvPr id="22" name="Text 20"/>
+          <p:cNvPr id="12" name="Text 10"/>
           <p:cNvSpPr/>
           <p:nvPr/>
         </p:nvSpPr>
@@ -3512,6 +4489,929 @@
 <file path=ppt/slides/slide12.xml><?xml version="1.0" encoding="utf-8"?>
 <p:sld xmlns:a="http://schemas.openxmlformats.org/drawingml/2006/main" xmlns:r="http://schemas.openxmlformats.org/officeDocument/2006/relationships" xmlns:p="http://schemas.openxmlformats.org/presentationml/2006/main">
   <p:cSld name="Slide 12">
+    <p:bg>
+      <p:bgPr>
+        <a:solidFill>
+          <a:srgbClr val="0B1018"/>
+        </a:solidFill>
+      </p:bgPr>
+    </p:bg>
+    <p:spTree>
+      <p:nvGrpSpPr>
+        <p:cNvPr id="1" name=""/>
+        <p:cNvGrpSpPr/>
+        <p:nvPr/>
+      </p:nvGrpSpPr>
+      <p:grpSpPr>
+        <a:xfrm>
+          <a:off x="0" y="0"/>
+          <a:ext cx="0" cy="0"/>
+          <a:chOff x="0" y="0"/>
+          <a:chExt cx="0" cy="0"/>
+        </a:xfrm>
+      </p:grpSpPr>
+      <p:sp>
+        <p:nvSpPr>
+          <p:cNvPr id="2" name="Text 0"/>
+          <p:cNvSpPr/>
+          <p:nvPr/>
+        </p:nvSpPr>
+        <p:spPr>
+          <a:xfrm>
+            <a:off x="640080" y="457200"/>
+            <a:ext cx="10515600" cy="274320"/>
+          </a:xfrm>
+          <a:prstGeom prst="rect">
+            <a:avLst/>
+          </a:prstGeom>
+          <a:noFill/>
+          <a:ln/>
+        </p:spPr>
+        <p:txBody>
+          <a:bodyPr wrap="square" rtlCol="0" anchor="ctr"/>
+          <a:lstStyle/>
+          <a:p>
+            <a:pPr indent="0" marL="0">
+              <a:buNone/>
+            </a:pPr>
+            <a:r>
+              <a:rPr lang="en-US" sz="1100" b="1" spc="200" kern="0" dirty="0">
+                <a:solidFill>
+                  <a:srgbClr val="45BD8A"/>
+                </a:solidFill>
+                <a:latin typeface="Verdana" pitchFamily="34" charset="0"/>
+                <a:ea typeface="Verdana" pitchFamily="34" charset="-122"/>
+                <a:cs typeface="Verdana" pitchFamily="34" charset="-120"/>
+              </a:rPr>
+              <a:t>DEMONSTRAÇÃO</a:t>
+            </a:r>
+            <a:endParaRPr lang="en-US" sz="1100" dirty="0"/>
+          </a:p>
+        </p:txBody>
+      </p:sp>
+      <p:sp>
+        <p:nvSpPr>
+          <p:cNvPr id="3" name="Text 1"/>
+          <p:cNvSpPr/>
+          <p:nvPr/>
+        </p:nvSpPr>
+        <p:spPr>
+          <a:xfrm>
+            <a:off x="640080" y="777240"/>
+            <a:ext cx="10972800" cy="822960"/>
+          </a:xfrm>
+          <a:prstGeom prst="rect">
+            <a:avLst/>
+          </a:prstGeom>
+          <a:noFill/>
+          <a:ln/>
+        </p:spPr>
+        <p:txBody>
+          <a:bodyPr wrap="square" rtlCol="0" anchor="ctr"/>
+          <a:lstStyle/>
+          <a:p>
+            <a:pPr indent="0" marL="0">
+              <a:buNone/>
+            </a:pPr>
+            <a:r>
+              <a:rPr lang="en-US" sz="2800" b="1" dirty="0">
+                <a:solidFill>
+                  <a:srgbClr val="FFFFFF"/>
+                </a:solidFill>
+                <a:latin typeface="Verdana" pitchFamily="34" charset="0"/>
+                <a:ea typeface="Verdana" pitchFamily="34" charset="-122"/>
+                <a:cs typeface="Verdana" pitchFamily="34" charset="-120"/>
+              </a:rPr>
+              <a:t>Ao vivo, em permaneia.vercel.app</a:t>
+            </a:r>
+            <a:endParaRPr lang="en-US" sz="2800" dirty="0"/>
+          </a:p>
+        </p:txBody>
+      </p:sp>
+      <p:sp>
+        <p:nvSpPr>
+          <p:cNvPr id="4" name="Shape 2"/>
+          <p:cNvSpPr/>
+          <p:nvPr/>
+        </p:nvSpPr>
+        <p:spPr>
+          <a:xfrm>
+            <a:off x="640080" y="1737360"/>
+            <a:ext cx="10881360" cy="822960"/>
+          </a:xfrm>
+          <a:prstGeom prst="roundRect">
+            <a:avLst>
+              <a:gd name="adj" fmla="val 8889"/>
+            </a:avLst>
+          </a:prstGeom>
+          <a:solidFill>
+            <a:srgbClr val="141B26"/>
+          </a:solidFill>
+          <a:ln w="12700">
+            <a:solidFill>
+              <a:srgbClr val="2B3849"/>
+            </a:solidFill>
+            <a:prstDash val="solid"/>
+          </a:ln>
+        </p:spPr>
+      </p:sp>
+      <p:sp>
+        <p:nvSpPr>
+          <p:cNvPr id="5" name="Text 3"/>
+          <p:cNvSpPr/>
+          <p:nvPr/>
+        </p:nvSpPr>
+        <p:spPr>
+          <a:xfrm>
+            <a:off x="914400" y="1874520"/>
+            <a:ext cx="457200" cy="548640"/>
+          </a:xfrm>
+          <a:prstGeom prst="rect">
+            <a:avLst/>
+          </a:prstGeom>
+          <a:noFill/>
+          <a:ln/>
+        </p:spPr>
+        <p:txBody>
+          <a:bodyPr wrap="square" rtlCol="0" anchor="ctr"/>
+          <a:lstStyle/>
+          <a:p>
+            <a:pPr indent="0" marL="0">
+              <a:buNone/>
+            </a:pPr>
+            <a:r>
+              <a:rPr lang="en-US" sz="2000" b="1" dirty="0">
+                <a:solidFill>
+                  <a:srgbClr val="45BD8A"/>
+                </a:solidFill>
+                <a:latin typeface="Verdana" pitchFamily="34" charset="0"/>
+                <a:ea typeface="Verdana" pitchFamily="34" charset="-122"/>
+                <a:cs typeface="Verdana" pitchFamily="34" charset="-120"/>
+              </a:rPr>
+              <a:t>1</a:t>
+            </a:r>
+            <a:endParaRPr lang="en-US" sz="2000" dirty="0"/>
+          </a:p>
+        </p:txBody>
+      </p:sp>
+      <p:sp>
+        <p:nvSpPr>
+          <p:cNvPr id="6" name="Text 4"/>
+          <p:cNvSpPr/>
+          <p:nvPr/>
+        </p:nvSpPr>
+        <p:spPr>
+          <a:xfrm>
+            <a:off x="1554480" y="1828800"/>
+            <a:ext cx="2926080" cy="320040"/>
+          </a:xfrm>
+          <a:prstGeom prst="rect">
+            <a:avLst/>
+          </a:prstGeom>
+          <a:noFill/>
+          <a:ln/>
+        </p:spPr>
+        <p:txBody>
+          <a:bodyPr wrap="square" rtlCol="0" anchor="ctr"/>
+          <a:lstStyle/>
+          <a:p>
+            <a:pPr indent="0" marL="0">
+              <a:buNone/>
+            </a:pPr>
+            <a:r>
+              <a:rPr lang="en-US" sz="1350" b="1" dirty="0">
+                <a:solidFill>
+                  <a:srgbClr val="FFFFFF"/>
+                </a:solidFill>
+                <a:latin typeface="Verdana" pitchFamily="34" charset="0"/>
+                <a:ea typeface="Verdana" pitchFamily="34" charset="-122"/>
+                <a:cs typeface="Verdana" pitchFamily="34" charset="-120"/>
+              </a:rPr>
+              <a:t>Painel de risco</a:t>
+            </a:r>
+            <a:endParaRPr lang="en-US" sz="1350" dirty="0"/>
+          </a:p>
+        </p:txBody>
+      </p:sp>
+      <p:sp>
+        <p:nvSpPr>
+          <p:cNvPr id="7" name="Text 5"/>
+          <p:cNvSpPr/>
+          <p:nvPr/>
+        </p:nvSpPr>
+        <p:spPr>
+          <a:xfrm>
+            <a:off x="4480560" y="1847088"/>
+            <a:ext cx="6858000" cy="621792"/>
+          </a:xfrm>
+          <a:prstGeom prst="rect">
+            <a:avLst/>
+          </a:prstGeom>
+          <a:noFill/>
+          <a:ln/>
+        </p:spPr>
+        <p:txBody>
+          <a:bodyPr wrap="square" rtlCol="0" anchor="ctr"/>
+          <a:lstStyle/>
+          <a:p>
+            <a:pPr indent="0" marL="0">
+              <a:lnSpc>
+                <a:spcPct val="110000"/>
+              </a:lnSpc>
+              <a:buNone/>
+            </a:pPr>
+            <a:r>
+              <a:rPr lang="en-US" sz="1100" dirty="0">
+                <a:solidFill>
+                  <a:srgbClr val="9FADBE"/>
+                </a:solidFill>
+                <a:latin typeface="Verdana" pitchFamily="34" charset="0"/>
+                <a:ea typeface="Verdana" pitchFamily="34" charset="-122"/>
+                <a:cs typeface="Verdana" pitchFamily="34" charset="-120"/>
+              </a:rPr>
+              <a:t>Entrar como coordenação. A turma ordenada por score, abrir o aluno do topo e mostrar as regras que produziram o número.</a:t>
+            </a:r>
+            <a:endParaRPr lang="en-US" sz="1100" dirty="0"/>
+          </a:p>
+        </p:txBody>
+      </p:sp>
+      <p:sp>
+        <p:nvSpPr>
+          <p:cNvPr id="8" name="Shape 6"/>
+          <p:cNvSpPr/>
+          <p:nvPr/>
+        </p:nvSpPr>
+        <p:spPr>
+          <a:xfrm>
+            <a:off x="640080" y="2651760"/>
+            <a:ext cx="10881360" cy="822960"/>
+          </a:xfrm>
+          <a:prstGeom prst="roundRect">
+            <a:avLst>
+              <a:gd name="adj" fmla="val 8889"/>
+            </a:avLst>
+          </a:prstGeom>
+          <a:solidFill>
+            <a:srgbClr val="141B26"/>
+          </a:solidFill>
+          <a:ln w="12700">
+            <a:solidFill>
+              <a:srgbClr val="2B3849"/>
+            </a:solidFill>
+            <a:prstDash val="solid"/>
+          </a:ln>
+        </p:spPr>
+      </p:sp>
+      <p:sp>
+        <p:nvSpPr>
+          <p:cNvPr id="9" name="Text 7"/>
+          <p:cNvSpPr/>
+          <p:nvPr/>
+        </p:nvSpPr>
+        <p:spPr>
+          <a:xfrm>
+            <a:off x="914400" y="2788920"/>
+            <a:ext cx="457200" cy="548640"/>
+          </a:xfrm>
+          <a:prstGeom prst="rect">
+            <a:avLst/>
+          </a:prstGeom>
+          <a:noFill/>
+          <a:ln/>
+        </p:spPr>
+        <p:txBody>
+          <a:bodyPr wrap="square" rtlCol="0" anchor="ctr"/>
+          <a:lstStyle/>
+          <a:p>
+            <a:pPr indent="0" marL="0">
+              <a:buNone/>
+            </a:pPr>
+            <a:r>
+              <a:rPr lang="en-US" sz="2000" b="1" dirty="0">
+                <a:solidFill>
+                  <a:srgbClr val="45BD8A"/>
+                </a:solidFill>
+                <a:latin typeface="Verdana" pitchFamily="34" charset="0"/>
+                <a:ea typeface="Verdana" pitchFamily="34" charset="-122"/>
+                <a:cs typeface="Verdana" pitchFamily="34" charset="-120"/>
+              </a:rPr>
+              <a:t>2</a:t>
+            </a:r>
+            <a:endParaRPr lang="en-US" sz="2000" dirty="0"/>
+          </a:p>
+        </p:txBody>
+      </p:sp>
+      <p:sp>
+        <p:nvSpPr>
+          <p:cNvPr id="10" name="Text 8"/>
+          <p:cNvSpPr/>
+          <p:nvPr/>
+        </p:nvSpPr>
+        <p:spPr>
+          <a:xfrm>
+            <a:off x="1554480" y="2743200"/>
+            <a:ext cx="2926080" cy="320040"/>
+          </a:xfrm>
+          <a:prstGeom prst="rect">
+            <a:avLst/>
+          </a:prstGeom>
+          <a:noFill/>
+          <a:ln/>
+        </p:spPr>
+        <p:txBody>
+          <a:bodyPr wrap="square" rtlCol="0" anchor="ctr"/>
+          <a:lstStyle/>
+          <a:p>
+            <a:pPr indent="0" marL="0">
+              <a:buNone/>
+            </a:pPr>
+            <a:r>
+              <a:rPr lang="en-US" sz="1350" b="1" dirty="0">
+                <a:solidFill>
+                  <a:srgbClr val="FFFFFF"/>
+                </a:solidFill>
+                <a:latin typeface="Verdana" pitchFamily="34" charset="0"/>
+                <a:ea typeface="Verdana" pitchFamily="34" charset="-122"/>
+                <a:cs typeface="Verdana" pitchFamily="34" charset="-120"/>
+              </a:rPr>
+              <a:t>O caso central</a:t>
+            </a:r>
+            <a:endParaRPr lang="en-US" sz="1350" dirty="0"/>
+          </a:p>
+        </p:txBody>
+      </p:sp>
+      <p:sp>
+        <p:nvSpPr>
+          <p:cNvPr id="11" name="Text 9"/>
+          <p:cNvSpPr/>
+          <p:nvPr/>
+        </p:nvSpPr>
+        <p:spPr>
+          <a:xfrm>
+            <a:off x="4480560" y="2761488"/>
+            <a:ext cx="6858000" cy="621792"/>
+          </a:xfrm>
+          <a:prstGeom prst="rect">
+            <a:avLst/>
+          </a:prstGeom>
+          <a:noFill/>
+          <a:ln/>
+        </p:spPr>
+        <p:txBody>
+          <a:bodyPr wrap="square" rtlCol="0" anchor="ctr"/>
+          <a:lstStyle/>
+          <a:p>
+            <a:pPr indent="0" marL="0">
+              <a:lnSpc>
+                <a:spcPct val="110000"/>
+              </a:lnSpc>
+              <a:buNone/>
+            </a:pPr>
+            <a:r>
+              <a:rPr lang="en-US" sz="1100" dirty="0">
+                <a:solidFill>
+                  <a:srgbClr val="9FADBE"/>
+                </a:solidFill>
+                <a:latin typeface="Verdana" pitchFamily="34" charset="0"/>
+                <a:ea typeface="Verdana" pitchFamily="34" charset="-122"/>
+                <a:cs typeface="Verdana" pitchFamily="34" charset="-120"/>
+              </a:rPr>
+              <a:t>Frequência 34% com média 8,6. Risco alto pelo fuzzy, sem risco pelo critério de nota.</a:t>
+            </a:r>
+            <a:endParaRPr lang="en-US" sz="1100" dirty="0"/>
+          </a:p>
+        </p:txBody>
+      </p:sp>
+      <p:sp>
+        <p:nvSpPr>
+          <p:cNvPr id="12" name="Shape 10"/>
+          <p:cNvSpPr/>
+          <p:nvPr/>
+        </p:nvSpPr>
+        <p:spPr>
+          <a:xfrm>
+            <a:off x="640080" y="3566160"/>
+            <a:ext cx="10881360" cy="822960"/>
+          </a:xfrm>
+          <a:prstGeom prst="roundRect">
+            <a:avLst>
+              <a:gd name="adj" fmla="val 8889"/>
+            </a:avLst>
+          </a:prstGeom>
+          <a:solidFill>
+            <a:srgbClr val="141B26"/>
+          </a:solidFill>
+          <a:ln w="12700">
+            <a:solidFill>
+              <a:srgbClr val="2B3849"/>
+            </a:solidFill>
+            <a:prstDash val="solid"/>
+          </a:ln>
+        </p:spPr>
+      </p:sp>
+      <p:sp>
+        <p:nvSpPr>
+          <p:cNvPr id="13" name="Text 11"/>
+          <p:cNvSpPr/>
+          <p:nvPr/>
+        </p:nvSpPr>
+        <p:spPr>
+          <a:xfrm>
+            <a:off x="914400" y="3703320"/>
+            <a:ext cx="457200" cy="548640"/>
+          </a:xfrm>
+          <a:prstGeom prst="rect">
+            <a:avLst/>
+          </a:prstGeom>
+          <a:noFill/>
+          <a:ln/>
+        </p:spPr>
+        <p:txBody>
+          <a:bodyPr wrap="square" rtlCol="0" anchor="ctr"/>
+          <a:lstStyle/>
+          <a:p>
+            <a:pPr indent="0" marL="0">
+              <a:buNone/>
+            </a:pPr>
+            <a:r>
+              <a:rPr lang="en-US" sz="2000" b="1" dirty="0">
+                <a:solidFill>
+                  <a:srgbClr val="45BD8A"/>
+                </a:solidFill>
+                <a:latin typeface="Verdana" pitchFamily="34" charset="0"/>
+                <a:ea typeface="Verdana" pitchFamily="34" charset="-122"/>
+                <a:cs typeface="Verdana" pitchFamily="34" charset="-120"/>
+              </a:rPr>
+              <a:t>3</a:t>
+            </a:r>
+            <a:endParaRPr lang="en-US" sz="2000" dirty="0"/>
+          </a:p>
+        </p:txBody>
+      </p:sp>
+      <p:sp>
+        <p:nvSpPr>
+          <p:cNvPr id="14" name="Text 12"/>
+          <p:cNvSpPr/>
+          <p:nvPr/>
+        </p:nvSpPr>
+        <p:spPr>
+          <a:xfrm>
+            <a:off x="1554480" y="3657600"/>
+            <a:ext cx="2926080" cy="320040"/>
+          </a:xfrm>
+          <a:prstGeom prst="rect">
+            <a:avLst/>
+          </a:prstGeom>
+          <a:noFill/>
+          <a:ln/>
+        </p:spPr>
+        <p:txBody>
+          <a:bodyPr wrap="square" rtlCol="0" anchor="ctr"/>
+          <a:lstStyle/>
+          <a:p>
+            <a:pPr indent="0" marL="0">
+              <a:buNone/>
+            </a:pPr>
+            <a:r>
+              <a:rPr lang="en-US" sz="1350" b="1" dirty="0">
+                <a:solidFill>
+                  <a:srgbClr val="FFFFFF"/>
+                </a:solidFill>
+                <a:latin typeface="Verdana" pitchFamily="34" charset="0"/>
+                <a:ea typeface="Verdana" pitchFamily="34" charset="-122"/>
+                <a:cs typeface="Verdana" pitchFamily="34" charset="-120"/>
+              </a:rPr>
+              <a:t>Assistente respondendo</a:t>
+            </a:r>
+            <a:endParaRPr lang="en-US" sz="1350" dirty="0"/>
+          </a:p>
+        </p:txBody>
+      </p:sp>
+      <p:sp>
+        <p:nvSpPr>
+          <p:cNvPr id="15" name="Text 13"/>
+          <p:cNvSpPr/>
+          <p:nvPr/>
+        </p:nvSpPr>
+        <p:spPr>
+          <a:xfrm>
+            <a:off x="4480560" y="3675888"/>
+            <a:ext cx="6858000" cy="621792"/>
+          </a:xfrm>
+          <a:prstGeom prst="rect">
+            <a:avLst/>
+          </a:prstGeom>
+          <a:noFill/>
+          <a:ln/>
+        </p:spPr>
+        <p:txBody>
+          <a:bodyPr wrap="square" rtlCol="0" anchor="ctr"/>
+          <a:lstStyle/>
+          <a:p>
+            <a:pPr indent="0" marL="0">
+              <a:lnSpc>
+                <a:spcPct val="110000"/>
+              </a:lnSpc>
+              <a:buNone/>
+            </a:pPr>
+            <a:r>
+              <a:rPr lang="en-US" sz="1100" dirty="0">
+                <a:solidFill>
+                  <a:srgbClr val="9FADBE"/>
+                </a:solidFill>
+                <a:latin typeface="Verdana" pitchFamily="34" charset="0"/>
+                <a:ea typeface="Verdana" pitchFamily="34" charset="-122"/>
+                <a:cs typeface="Verdana" pitchFamily="34" charset="-120"/>
+              </a:rPr>
+              <a:t>Trocar para a conta de aluno: os dois papéis não se sobrepõem. "Quando é a Prova P1?" devolve a data com a fonte citada.</a:t>
+            </a:r>
+            <a:endParaRPr lang="en-US" sz="1100" dirty="0"/>
+          </a:p>
+        </p:txBody>
+      </p:sp>
+      <p:sp>
+        <p:nvSpPr>
+          <p:cNvPr id="16" name="Shape 14"/>
+          <p:cNvSpPr/>
+          <p:nvPr/>
+        </p:nvSpPr>
+        <p:spPr>
+          <a:xfrm>
+            <a:off x="640080" y="4480560"/>
+            <a:ext cx="10881360" cy="822960"/>
+          </a:xfrm>
+          <a:prstGeom prst="roundRect">
+            <a:avLst>
+              <a:gd name="adj" fmla="val 8889"/>
+            </a:avLst>
+          </a:prstGeom>
+          <a:solidFill>
+            <a:srgbClr val="141B26"/>
+          </a:solidFill>
+          <a:ln w="12700">
+            <a:solidFill>
+              <a:srgbClr val="2B3849"/>
+            </a:solidFill>
+            <a:prstDash val="solid"/>
+          </a:ln>
+        </p:spPr>
+      </p:sp>
+      <p:sp>
+        <p:nvSpPr>
+          <p:cNvPr id="17" name="Text 15"/>
+          <p:cNvSpPr/>
+          <p:nvPr/>
+        </p:nvSpPr>
+        <p:spPr>
+          <a:xfrm>
+            <a:off x="914400" y="4617720"/>
+            <a:ext cx="457200" cy="548640"/>
+          </a:xfrm>
+          <a:prstGeom prst="rect">
+            <a:avLst/>
+          </a:prstGeom>
+          <a:noFill/>
+          <a:ln/>
+        </p:spPr>
+        <p:txBody>
+          <a:bodyPr wrap="square" rtlCol="0" anchor="ctr"/>
+          <a:lstStyle/>
+          <a:p>
+            <a:pPr indent="0" marL="0">
+              <a:buNone/>
+            </a:pPr>
+            <a:r>
+              <a:rPr lang="en-US" sz="2000" b="1" dirty="0">
+                <a:solidFill>
+                  <a:srgbClr val="45BD8A"/>
+                </a:solidFill>
+                <a:latin typeface="Verdana" pitchFamily="34" charset="0"/>
+                <a:ea typeface="Verdana" pitchFamily="34" charset="-122"/>
+                <a:cs typeface="Verdana" pitchFamily="34" charset="-120"/>
+              </a:rPr>
+              <a:t>4</a:t>
+            </a:r>
+            <a:endParaRPr lang="en-US" sz="2000" dirty="0"/>
+          </a:p>
+        </p:txBody>
+      </p:sp>
+      <p:sp>
+        <p:nvSpPr>
+          <p:cNvPr id="18" name="Text 16"/>
+          <p:cNvSpPr/>
+          <p:nvPr/>
+        </p:nvSpPr>
+        <p:spPr>
+          <a:xfrm>
+            <a:off x="1554480" y="4572000"/>
+            <a:ext cx="2926080" cy="320040"/>
+          </a:xfrm>
+          <a:prstGeom prst="rect">
+            <a:avLst/>
+          </a:prstGeom>
+          <a:noFill/>
+          <a:ln/>
+        </p:spPr>
+        <p:txBody>
+          <a:bodyPr wrap="square" rtlCol="0" anchor="ctr"/>
+          <a:lstStyle/>
+          <a:p>
+            <a:pPr indent="0" marL="0">
+              <a:buNone/>
+            </a:pPr>
+            <a:r>
+              <a:rPr lang="en-US" sz="1350" b="1" dirty="0">
+                <a:solidFill>
+                  <a:srgbClr val="FFFFFF"/>
+                </a:solidFill>
+                <a:latin typeface="Verdana" pitchFamily="34" charset="0"/>
+                <a:ea typeface="Verdana" pitchFamily="34" charset="-122"/>
+                <a:cs typeface="Verdana" pitchFamily="34" charset="-120"/>
+              </a:rPr>
+              <a:t>Assistente enumerando</a:t>
+            </a:r>
+            <a:endParaRPr lang="en-US" sz="1350" dirty="0"/>
+          </a:p>
+        </p:txBody>
+      </p:sp>
+      <p:sp>
+        <p:nvSpPr>
+          <p:cNvPr id="19" name="Text 17"/>
+          <p:cNvSpPr/>
+          <p:nvPr/>
+        </p:nvSpPr>
+        <p:spPr>
+          <a:xfrm>
+            <a:off x="4480560" y="4590288"/>
+            <a:ext cx="6858000" cy="621792"/>
+          </a:xfrm>
+          <a:prstGeom prst="rect">
+            <a:avLst/>
+          </a:prstGeom>
+          <a:noFill/>
+          <a:ln/>
+        </p:spPr>
+        <p:txBody>
+          <a:bodyPr wrap="square" rtlCol="0" anchor="ctr"/>
+          <a:lstStyle/>
+          <a:p>
+            <a:pPr indent="0" marL="0">
+              <a:lnSpc>
+                <a:spcPct val="110000"/>
+              </a:lnSpc>
+              <a:buNone/>
+            </a:pPr>
+            <a:r>
+              <a:rPr lang="en-US" sz="1100" dirty="0">
+                <a:solidFill>
+                  <a:srgbClr val="9FADBE"/>
+                </a:solidFill>
+                <a:latin typeface="Verdana" pitchFamily="34" charset="0"/>
+                <a:ea typeface="Verdana" pitchFamily="34" charset="-122"/>
+                <a:cs typeface="Verdana" pitchFamily="34" charset="-120"/>
+              </a:rPr>
+              <a:t>"Quais são os temas de todas as aulas?" devolve o semestre inteiro, e não a aula que ficou em primeiro na busca.</a:t>
+            </a:r>
+            <a:endParaRPr lang="en-US" sz="1100" dirty="0"/>
+          </a:p>
+        </p:txBody>
+      </p:sp>
+      <p:sp>
+        <p:nvSpPr>
+          <p:cNvPr id="20" name="Shape 18"/>
+          <p:cNvSpPr/>
+          <p:nvPr/>
+        </p:nvSpPr>
+        <p:spPr>
+          <a:xfrm>
+            <a:off x="640080" y="5394960"/>
+            <a:ext cx="10881360" cy="822960"/>
+          </a:xfrm>
+          <a:prstGeom prst="roundRect">
+            <a:avLst>
+              <a:gd name="adj" fmla="val 8889"/>
+            </a:avLst>
+          </a:prstGeom>
+          <a:solidFill>
+            <a:srgbClr val="141B26"/>
+          </a:solidFill>
+          <a:ln w="12700">
+            <a:solidFill>
+              <a:srgbClr val="2B3849"/>
+            </a:solidFill>
+            <a:prstDash val="solid"/>
+          </a:ln>
+        </p:spPr>
+      </p:sp>
+      <p:sp>
+        <p:nvSpPr>
+          <p:cNvPr id="21" name="Text 19"/>
+          <p:cNvSpPr/>
+          <p:nvPr/>
+        </p:nvSpPr>
+        <p:spPr>
+          <a:xfrm>
+            <a:off x="914400" y="5532120"/>
+            <a:ext cx="457200" cy="548640"/>
+          </a:xfrm>
+          <a:prstGeom prst="rect">
+            <a:avLst/>
+          </a:prstGeom>
+          <a:noFill/>
+          <a:ln/>
+        </p:spPr>
+        <p:txBody>
+          <a:bodyPr wrap="square" rtlCol="0" anchor="ctr"/>
+          <a:lstStyle/>
+          <a:p>
+            <a:pPr indent="0" marL="0">
+              <a:buNone/>
+            </a:pPr>
+            <a:r>
+              <a:rPr lang="en-US" sz="2000" b="1" dirty="0">
+                <a:solidFill>
+                  <a:srgbClr val="45BD8A"/>
+                </a:solidFill>
+                <a:latin typeface="Verdana" pitchFamily="34" charset="0"/>
+                <a:ea typeface="Verdana" pitchFamily="34" charset="-122"/>
+                <a:cs typeface="Verdana" pitchFamily="34" charset="-120"/>
+              </a:rPr>
+              <a:t>5</a:t>
+            </a:r>
+            <a:endParaRPr lang="en-US" sz="2000" dirty="0"/>
+          </a:p>
+        </p:txBody>
+      </p:sp>
+      <p:sp>
+        <p:nvSpPr>
+          <p:cNvPr id="22" name="Text 20"/>
+          <p:cNvSpPr/>
+          <p:nvPr/>
+        </p:nvSpPr>
+        <p:spPr>
+          <a:xfrm>
+            <a:off x="1554480" y="5486400"/>
+            <a:ext cx="2926080" cy="320040"/>
+          </a:xfrm>
+          <a:prstGeom prst="rect">
+            <a:avLst/>
+          </a:prstGeom>
+          <a:noFill/>
+          <a:ln/>
+        </p:spPr>
+        <p:txBody>
+          <a:bodyPr wrap="square" rtlCol="0" anchor="ctr"/>
+          <a:lstStyle/>
+          <a:p>
+            <a:pPr indent="0" marL="0">
+              <a:buNone/>
+            </a:pPr>
+            <a:r>
+              <a:rPr lang="en-US" sz="1350" b="1" dirty="0">
+                <a:solidFill>
+                  <a:srgbClr val="FFFFFF"/>
+                </a:solidFill>
+                <a:latin typeface="Verdana" pitchFamily="34" charset="0"/>
+                <a:ea typeface="Verdana" pitchFamily="34" charset="-122"/>
+                <a:cs typeface="Verdana" pitchFamily="34" charset="-120"/>
+              </a:rPr>
+              <a:t>Assistente recusando</a:t>
+            </a:r>
+            <a:endParaRPr lang="en-US" sz="1350" dirty="0"/>
+          </a:p>
+        </p:txBody>
+      </p:sp>
+      <p:sp>
+        <p:nvSpPr>
+          <p:cNvPr id="23" name="Text 21"/>
+          <p:cNvSpPr/>
+          <p:nvPr/>
+        </p:nvSpPr>
+        <p:spPr>
+          <a:xfrm>
+            <a:off x="4480560" y="5504688"/>
+            <a:ext cx="6858000" cy="621792"/>
+          </a:xfrm>
+          <a:prstGeom prst="rect">
+            <a:avLst/>
+          </a:prstGeom>
+          <a:noFill/>
+          <a:ln/>
+        </p:spPr>
+        <p:txBody>
+          <a:bodyPr wrap="square" rtlCol="0" anchor="ctr"/>
+          <a:lstStyle/>
+          <a:p>
+            <a:pPr indent="0" marL="0">
+              <a:lnSpc>
+                <a:spcPct val="110000"/>
+              </a:lnSpc>
+              <a:buNone/>
+            </a:pPr>
+            <a:r>
+              <a:rPr lang="en-US" sz="1100" dirty="0">
+                <a:solidFill>
+                  <a:srgbClr val="9FADBE"/>
+                </a:solidFill>
+                <a:latin typeface="Verdana" pitchFamily="34" charset="0"/>
+                <a:ea typeface="Verdana" pitchFamily="34" charset="-122"/>
+                <a:cs typeface="Verdana" pitchFamily="34" charset="-120"/>
+              </a:rPr>
+              <a:t>"Qual o valor da mensalidade?" O sistema admite que não sabe.</a:t>
+            </a:r>
+            <a:endParaRPr lang="en-US" sz="1100" dirty="0"/>
+          </a:p>
+        </p:txBody>
+      </p:sp>
+      <p:sp>
+        <p:nvSpPr>
+          <p:cNvPr id="24" name="Text 22"/>
+          <p:cNvSpPr/>
+          <p:nvPr/>
+        </p:nvSpPr>
+        <p:spPr>
+          <a:xfrm>
+            <a:off x="548640" y="6400800"/>
+            <a:ext cx="7315200" cy="274320"/>
+          </a:xfrm>
+          <a:prstGeom prst="rect">
+            <a:avLst/>
+          </a:prstGeom>
+          <a:noFill/>
+          <a:ln/>
+        </p:spPr>
+        <p:txBody>
+          <a:bodyPr wrap="square" rtlCol="0" anchor="ctr"/>
+          <a:lstStyle/>
+          <a:p>
+            <a:pPr indent="0" marL="0">
+              <a:buNone/>
+            </a:pPr>
+            <a:r>
+              <a:rPr lang="en-US" sz="900" dirty="0">
+                <a:solidFill>
+                  <a:srgbClr val="71829A"/>
+                </a:solidFill>
+                <a:latin typeface="Verdana" pitchFamily="34" charset="0"/>
+                <a:ea typeface="Verdana" pitchFamily="34" charset="-122"/>
+                <a:cs typeface="Verdana" pitchFamily="34" charset="-120"/>
+              </a:rPr>
+              <a:t>PermaneIA · Inteligência Artificial · 2026-2</a:t>
+            </a:r>
+            <a:endParaRPr lang="en-US" sz="900" dirty="0"/>
+          </a:p>
+        </p:txBody>
+      </p:sp>
+      <p:sp>
+        <p:nvSpPr>
+          <p:cNvPr id="25" name="Text 23"/>
+          <p:cNvSpPr/>
+          <p:nvPr/>
+        </p:nvSpPr>
+        <p:spPr>
+          <a:xfrm>
+            <a:off x="11185855" y="6400800"/>
+            <a:ext cx="457200" cy="274320"/>
+          </a:xfrm>
+          <a:prstGeom prst="rect">
+            <a:avLst/>
+          </a:prstGeom>
+          <a:noFill/>
+          <a:ln/>
+        </p:spPr>
+        <p:txBody>
+          <a:bodyPr wrap="square" rtlCol="0" anchor="ctr"/>
+          <a:lstStyle/>
+          <a:p>
+            <a:pPr algn="r" indent="0" marL="0">
+              <a:buNone/>
+            </a:pPr>
+            <a:r>
+              <a:rPr lang="en-US" sz="900" dirty="0">
+                <a:solidFill>
+                  <a:srgbClr val="71829A"/>
+                </a:solidFill>
+                <a:latin typeface="Verdana" pitchFamily="34" charset="0"/>
+                <a:ea typeface="Verdana" pitchFamily="34" charset="-122"/>
+                <a:cs typeface="Verdana" pitchFamily="34" charset="-120"/>
+              </a:rPr>
+              <a:t>12</a:t>
+            </a:r>
+            <a:endParaRPr lang="en-US" sz="900" dirty="0"/>
+          </a:p>
+        </p:txBody>
+      </p:sp>
+    </p:spTree>
+  </p:cSld>
+  <p:clrMapOvr>
+    <a:masterClrMapping/>
+  </p:clrMapOvr>
+</p:sld>
+</file>
+
+<file path=ppt/slides/slide13.xml><?xml version="1.0" encoding="utf-8"?>
+<p:sld xmlns:a="http://schemas.openxmlformats.org/drawingml/2006/main" xmlns:r="http://schemas.openxmlformats.org/officeDocument/2006/relationships" xmlns:p="http://schemas.openxmlformats.org/presentationml/2006/main">
+  <p:cSld name="Slide 13">
     <p:bg>
       <p:bgPr>
         <a:solidFill>
@@ -9061,7 +10961,7 @@
                 <a:ea typeface="Verdana" pitchFamily="34" charset="-122"/>
                 <a:cs typeface="Verdana" pitchFamily="34" charset="-120"/>
               </a:rPr>
-              <a:t>O que medimos, e o que não conseguimos resolver</a:t>
+              <a:t>Mais dois, e os piores: os que pareciam funcionar</a:t>
             </a:r>
             <a:endParaRPr lang="en-US" sz="2800" dirty="0"/>
           </a:p>
@@ -9075,12 +10975,12 @@
         </p:nvSpPr>
         <p:spPr>
           <a:xfrm>
-            <a:off x="640080" y="1783080"/>
-            <a:ext cx="2560320" cy="1737360"/>
+            <a:off x="640080" y="2011680"/>
+            <a:ext cx="10881360" cy="1645920"/>
           </a:xfrm>
           <a:prstGeom prst="roundRect">
             <a:avLst>
-              <a:gd name="adj" fmla="val 4211"/>
+              <a:gd name="adj" fmla="val 4444"/>
             </a:avLst>
           </a:prstGeom>
           <a:solidFill>
@@ -9102,34 +11002,34 @@
         </p:nvSpPr>
         <p:spPr>
           <a:xfrm>
-            <a:off x="640080" y="1984248"/>
-            <a:ext cx="2560320" cy="777240"/>
-          </a:xfrm>
-          <a:prstGeom prst="rect">
-            <a:avLst/>
-          </a:prstGeom>
-          <a:noFill/>
-          <a:ln/>
-        </p:spPr>
-        <p:txBody>
-          <a:bodyPr wrap="square" rtlCol="0" anchor="ctr"/>
-          <a:lstStyle/>
-          <a:p>
-            <a:pPr algn="ctr" indent="0" marL="0">
-              <a:buNone/>
-            </a:pPr>
-            <a:r>
-              <a:rPr lang="en-US" sz="3400" b="1" dirty="0">
-                <a:solidFill>
-                  <a:srgbClr val="45BD8A"/>
-                </a:solidFill>
-                <a:latin typeface="Verdana" pitchFamily="34" charset="0"/>
-                <a:ea typeface="Verdana" pitchFamily="34" charset="-122"/>
-                <a:cs typeface="Verdana" pitchFamily="34" charset="-120"/>
-              </a:rPr>
-              <a:t>83,3%</a:t>
-            </a:r>
-            <a:endParaRPr lang="en-US" sz="3400" dirty="0"/>
+            <a:off x="914400" y="2194560"/>
+            <a:ext cx="4206240" cy="320040"/>
+          </a:xfrm>
+          <a:prstGeom prst="rect">
+            <a:avLst/>
+          </a:prstGeom>
+          <a:noFill/>
+          <a:ln/>
+        </p:spPr>
+        <p:txBody>
+          <a:bodyPr wrap="square" rtlCol="0" anchor="ctr"/>
+          <a:lstStyle/>
+          <a:p>
+            <a:pPr indent="0" marL="0">
+              <a:buNone/>
+            </a:pPr>
+            <a:r>
+              <a:rPr lang="en-US" sz="1500" b="1" dirty="0">
+                <a:solidFill>
+                  <a:srgbClr val="FFFFFF"/>
+                </a:solidFill>
+                <a:latin typeface="Verdana" pitchFamily="34" charset="0"/>
+                <a:ea typeface="Verdana" pitchFamily="34" charset="-122"/>
+                <a:cs typeface="Verdana" pitchFamily="34" charset="-120"/>
+              </a:rPr>
+              <a:t>Enumeração com um item só</a:t>
+            </a:r>
+            <a:endParaRPr lang="en-US" sz="1500" dirty="0"/>
           </a:p>
         </p:txBody>
       </p:sp>
@@ -9141,24 +11041,66 @@
         </p:nvSpPr>
         <p:spPr>
           <a:xfrm>
-            <a:off x="777240" y="2770632"/>
-            <a:ext cx="2286000" cy="640080"/>
-          </a:xfrm>
-          <a:prstGeom prst="rect">
-            <a:avLst/>
-          </a:prstGeom>
-          <a:noFill/>
-          <a:ln/>
-        </p:spPr>
-        <p:txBody>
-          <a:bodyPr wrap="square" rtlCol="0" anchor="ctr"/>
-          <a:lstStyle/>
-          <a:p>
-            <a:pPr algn="ctr" indent="0" marL="0">
-              <a:buNone/>
-            </a:pPr>
-            <a:r>
-              <a:rPr lang="en-US" sz="1100" dirty="0">
+            <a:off x="914400" y="2633472"/>
+            <a:ext cx="4206240" cy="320040"/>
+          </a:xfrm>
+          <a:prstGeom prst="rect">
+            <a:avLst/>
+          </a:prstGeom>
+          <a:noFill/>
+          <a:ln/>
+        </p:spPr>
+        <p:txBody>
+          <a:bodyPr wrap="square" rtlCol="0" anchor="ctr"/>
+          <a:lstStyle/>
+          <a:p>
+            <a:pPr indent="0" marL="0">
+              <a:buNone/>
+            </a:pPr>
+            <a:r>
+              <a:rPr lang="en-US" sz="1250" b="1" dirty="0">
+                <a:solidFill>
+                  <a:srgbClr val="E2703A"/>
+                </a:solidFill>
+                <a:latin typeface="Verdana" pitchFamily="34" charset="0"/>
+                <a:ea typeface="Verdana" pitchFamily="34" charset="-122"/>
+                <a:cs typeface="Verdana" pitchFamily="34" charset="-120"/>
+              </a:rPr>
+              <a:t>Cobertura 78% → 91%</a:t>
+            </a:r>
+            <a:endParaRPr lang="en-US" sz="1250" dirty="0"/>
+          </a:p>
+        </p:txBody>
+      </p:sp>
+      <p:sp>
+        <p:nvSpPr>
+          <p:cNvPr id="7" name="Text 5"/>
+          <p:cNvSpPr/>
+          <p:nvPr/>
+        </p:nvSpPr>
+        <p:spPr>
+          <a:xfrm>
+            <a:off x="5303520" y="2212848"/>
+            <a:ext cx="6035040" cy="1234440"/>
+          </a:xfrm>
+          <a:prstGeom prst="rect">
+            <a:avLst/>
+          </a:prstGeom>
+          <a:noFill/>
+          <a:ln/>
+        </p:spPr>
+        <p:txBody>
+          <a:bodyPr wrap="square" rtlCol="0" anchor="ctr"/>
+          <a:lstStyle/>
+          <a:p>
+            <a:pPr indent="0" marL="0">
+              <a:lnSpc>
+                <a:spcPct val="115000"/>
+              </a:lnSpc>
+              <a:buNone/>
+            </a:pPr>
+            <a:r>
+              <a:rPr lang="en-US" sz="1200" dirty="0">
                 <a:solidFill>
                   <a:srgbClr val="9FADBE"/>
                 </a:solidFill>
@@ -9166,26 +11108,26 @@
                 <a:ea typeface="Verdana" pitchFamily="34" charset="-122"/>
                 <a:cs typeface="Verdana" pitchFamily="34" charset="-120"/>
               </a:rPr>
-              <a:t>das perguntas respondíveis foram respondidas</a:t>
-            </a:r>
-            <a:endParaRPr lang="en-US" sz="1100" dirty="0"/>
-          </a:p>
-        </p:txBody>
-      </p:sp>
-      <p:sp>
-        <p:nvSpPr>
-          <p:cNvPr id="7" name="Shape 5"/>
-          <p:cNvSpPr/>
-          <p:nvPr/>
-        </p:nvSpPr>
-        <p:spPr>
-          <a:xfrm>
-            <a:off x="3429000" y="1783080"/>
-            <a:ext cx="2560320" cy="1737360"/>
+              <a:t>"Qual é o conteúdo das aulas?" devolvia a primeira aula do semestre, citada e correta. Similaridade alta, fonte apontada, metade da resposta faltando, e nada sinalizando isso.</a:t>
+            </a:r>
+            <a:endParaRPr lang="en-US" sz="1200" dirty="0"/>
+          </a:p>
+        </p:txBody>
+      </p:sp>
+      <p:sp>
+        <p:nvSpPr>
+          <p:cNvPr id="8" name="Shape 6"/>
+          <p:cNvSpPr/>
+          <p:nvPr/>
+        </p:nvSpPr>
+        <p:spPr>
+          <a:xfrm>
+            <a:off x="640080" y="3840480"/>
+            <a:ext cx="10881360" cy="1645920"/>
           </a:xfrm>
           <a:prstGeom prst="roundRect">
             <a:avLst>
-              <a:gd name="adj" fmla="val 4211"/>
+              <a:gd name="adj" fmla="val 4444"/>
             </a:avLst>
           </a:prstGeom>
           <a:solidFill>
@@ -9201,69 +11143,111 @@
       </p:sp>
       <p:sp>
         <p:nvSpPr>
-          <p:cNvPr id="8" name="Text 6"/>
-          <p:cNvSpPr/>
-          <p:nvPr/>
-        </p:nvSpPr>
-        <p:spPr>
-          <a:xfrm>
-            <a:off x="3429000" y="1984248"/>
-            <a:ext cx="2560320" cy="777240"/>
-          </a:xfrm>
-          <a:prstGeom prst="rect">
-            <a:avLst/>
-          </a:prstGeom>
-          <a:noFill/>
-          <a:ln/>
-        </p:spPr>
-        <p:txBody>
-          <a:bodyPr wrap="square" rtlCol="0" anchor="ctr"/>
-          <a:lstStyle/>
-          <a:p>
-            <a:pPr algn="ctr" indent="0" marL="0">
-              <a:buNone/>
-            </a:pPr>
-            <a:r>
-              <a:rPr lang="en-US" sz="3400" b="1" dirty="0">
-                <a:solidFill>
-                  <a:srgbClr val="45BD8A"/>
-                </a:solidFill>
-                <a:latin typeface="Verdana" pitchFamily="34" charset="0"/>
-                <a:ea typeface="Verdana" pitchFamily="34" charset="-122"/>
-                <a:cs typeface="Verdana" pitchFamily="34" charset="-120"/>
-              </a:rPr>
-              <a:t>75,0%</a:t>
-            </a:r>
-            <a:endParaRPr lang="en-US" sz="3400" dirty="0"/>
-          </a:p>
-        </p:txBody>
-      </p:sp>
-      <p:sp>
-        <p:nvSpPr>
           <p:cNvPr id="9" name="Text 7"/>
           <p:cNvSpPr/>
           <p:nvPr/>
         </p:nvSpPr>
         <p:spPr>
           <a:xfrm>
-            <a:off x="3566160" y="2770632"/>
-            <a:ext cx="2286000" cy="640080"/>
-          </a:xfrm>
-          <a:prstGeom prst="rect">
-            <a:avLst/>
-          </a:prstGeom>
-          <a:noFill/>
-          <a:ln/>
-        </p:spPr>
-        <p:txBody>
-          <a:bodyPr wrap="square" rtlCol="0" anchor="ctr"/>
-          <a:lstStyle/>
-          <a:p>
-            <a:pPr algn="ctr" indent="0" marL="0">
-              <a:buNone/>
-            </a:pPr>
-            <a:r>
-              <a:rPr lang="en-US" sz="1100" dirty="0">
+            <a:off x="914400" y="4023360"/>
+            <a:ext cx="4206240" cy="320040"/>
+          </a:xfrm>
+          <a:prstGeom prst="rect">
+            <a:avLst/>
+          </a:prstGeom>
+          <a:noFill/>
+          <a:ln/>
+        </p:spPr>
+        <p:txBody>
+          <a:bodyPr wrap="square" rtlCol="0" anchor="ctr"/>
+          <a:lstStyle/>
+          <a:p>
+            <a:pPr indent="0" marL="0">
+              <a:buNone/>
+            </a:pPr>
+            <a:r>
+              <a:rPr lang="en-US" sz="1500" b="1" dirty="0">
+                <a:solidFill>
+                  <a:srgbClr val="FFFFFF"/>
+                </a:solidFill>
+                <a:latin typeface="Verdana" pitchFamily="34" charset="0"/>
+                <a:ea typeface="Verdana" pitchFamily="34" charset="-122"/>
+                <a:cs typeface="Verdana" pitchFamily="34" charset="-120"/>
+              </a:rPr>
+              <a:t>A régua medindo errado</a:t>
+            </a:r>
+            <a:endParaRPr lang="en-US" sz="1500" dirty="0"/>
+          </a:p>
+        </p:txBody>
+      </p:sp>
+      <p:sp>
+        <p:nvSpPr>
+          <p:cNvPr id="10" name="Text 8"/>
+          <p:cNvSpPr/>
+          <p:nvPr/>
+        </p:nvSpPr>
+        <p:spPr>
+          <a:xfrm>
+            <a:off x="914400" y="4462272"/>
+            <a:ext cx="4206240" cy="320040"/>
+          </a:xfrm>
+          <a:prstGeom prst="rect">
+            <a:avLst/>
+          </a:prstGeom>
+          <a:noFill/>
+          <a:ln/>
+        </p:spPr>
+        <p:txBody>
+          <a:bodyPr wrap="square" rtlCol="0" anchor="ctr"/>
+          <a:lstStyle/>
+          <a:p>
+            <a:pPr indent="0" marL="0">
+              <a:buNone/>
+            </a:pPr>
+            <a:r>
+              <a:rPr lang="en-US" sz="1250" b="1" dirty="0">
+                <a:solidFill>
+                  <a:srgbClr val="E2703A"/>
+                </a:solidFill>
+                <a:latin typeface="Verdana" pitchFamily="34" charset="0"/>
+                <a:ea typeface="Verdana" pitchFamily="34" charset="-122"/>
+                <a:cs typeface="Verdana" pitchFamily="34" charset="-120"/>
+              </a:rPr>
+              <a:t>Recusa 0/8 → 6/8</a:t>
+            </a:r>
+            <a:endParaRPr lang="en-US" sz="1250" dirty="0"/>
+          </a:p>
+        </p:txBody>
+      </p:sp>
+      <p:sp>
+        <p:nvSpPr>
+          <p:cNvPr id="11" name="Text 9"/>
+          <p:cNvSpPr/>
+          <p:nvPr/>
+        </p:nvSpPr>
+        <p:spPr>
+          <a:xfrm>
+            <a:off x="5303520" y="4041648"/>
+            <a:ext cx="6035040" cy="1234440"/>
+          </a:xfrm>
+          <a:prstGeom prst="rect">
+            <a:avLst/>
+          </a:prstGeom>
+          <a:noFill/>
+          <a:ln/>
+        </p:spPr>
+        <p:txBody>
+          <a:bodyPr wrap="square" rtlCol="0" anchor="ctr"/>
+          <a:lstStyle/>
+          <a:p>
+            <a:pPr indent="0" marL="0">
+              <a:lnSpc>
+                <a:spcPct val="115000"/>
+              </a:lnSpc>
+              <a:buNone/>
+            </a:pPr>
+            <a:r>
+              <a:rPr lang="en-US" sz="1200" dirty="0">
                 <a:solidFill>
                   <a:srgbClr val="9FADBE"/>
                 </a:solidFill>
@@ -9271,75 +11255,9 @@
                 <a:ea typeface="Verdana" pitchFamily="34" charset="-122"/>
                 <a:cs typeface="Verdana" pitchFamily="34" charset="-120"/>
               </a:rPr>
-              <a:t>das perguntas fora do material foram recusadas</a:t>
-            </a:r>
-            <a:endParaRPr lang="en-US" sz="1100" dirty="0"/>
-          </a:p>
-        </p:txBody>
-      </p:sp>
-      <p:sp>
-        <p:nvSpPr>
-          <p:cNvPr id="10" name="Shape 8"/>
-          <p:cNvSpPr/>
-          <p:nvPr/>
-        </p:nvSpPr>
-        <p:spPr>
-          <a:xfrm>
-            <a:off x="6217920" y="1783080"/>
-            <a:ext cx="2560320" cy="1737360"/>
-          </a:xfrm>
-          <a:prstGeom prst="roundRect">
-            <a:avLst>
-              <a:gd name="adj" fmla="val 4211"/>
-            </a:avLst>
-          </a:prstGeom>
-          <a:solidFill>
-            <a:srgbClr val="141B26"/>
-          </a:solidFill>
-          <a:ln w="12700">
-            <a:solidFill>
-              <a:srgbClr val="2B3849"/>
-            </a:solidFill>
-            <a:prstDash val="solid"/>
-          </a:ln>
-        </p:spPr>
-      </p:sp>
-      <p:sp>
-        <p:nvSpPr>
-          <p:cNvPr id="11" name="Text 9"/>
-          <p:cNvSpPr/>
-          <p:nvPr/>
-        </p:nvSpPr>
-        <p:spPr>
-          <a:xfrm>
-            <a:off x="6217920" y="1984248"/>
-            <a:ext cx="2560320" cy="777240"/>
-          </a:xfrm>
-          <a:prstGeom prst="rect">
-            <a:avLst/>
-          </a:prstGeom>
-          <a:noFill/>
-          <a:ln/>
-        </p:spPr>
-        <p:txBody>
-          <a:bodyPr wrap="square" rtlCol="0" anchor="ctr"/>
-          <a:lstStyle/>
-          <a:p>
-            <a:pPr algn="ctr" indent="0" marL="0">
-              <a:buNone/>
-            </a:pPr>
-            <a:r>
-              <a:rPr lang="en-US" sz="3400" b="1" dirty="0">
-                <a:solidFill>
-                  <a:srgbClr val="45BD8A"/>
-                </a:solidFill>
-                <a:latin typeface="Verdana" pitchFamily="34" charset="0"/>
-                <a:ea typeface="Verdana" pitchFamily="34" charset="-122"/>
-                <a:cs typeface="Verdana" pitchFamily="34" charset="-120"/>
-              </a:rPr>
-              <a:t>0</a:t>
-            </a:r>
-            <a:endParaRPr lang="en-US" sz="3400" dirty="0"/>
+              <a:t>A bateria de avaliação aplicava o limiar do modo local (0,15) também ao modo generativo, cujo limiar é 0,65. A métrica media o que a ferramenta fazia, não o que o sistema fazia.</a:t>
+            </a:r>
+            <a:endParaRPr lang="en-US" sz="1200" dirty="0"/>
           </a:p>
         </p:txBody>
       </p:sp>
@@ -9351,282 +11269,40 @@
         </p:nvSpPr>
         <p:spPr>
           <a:xfrm>
-            <a:off x="6355080" y="2770632"/>
-            <a:ext cx="2286000" cy="640080"/>
-          </a:xfrm>
-          <a:prstGeom prst="rect">
-            <a:avLst/>
-          </a:prstGeom>
-          <a:noFill/>
-          <a:ln/>
-        </p:spPr>
-        <p:txBody>
-          <a:bodyPr wrap="square" rtlCol="0" anchor="ctr"/>
-          <a:lstStyle/>
-          <a:p>
-            <a:pPr algn="ctr" indent="0" marL="0">
-              <a:buNone/>
-            </a:pPr>
-            <a:r>
-              <a:rPr lang="en-US" sz="1100" dirty="0">
-                <a:solidFill>
-                  <a:srgbClr val="9FADBE"/>
-                </a:solidFill>
-                <a:latin typeface="Verdana" pitchFamily="34" charset="0"/>
-                <a:ea typeface="Verdana" pitchFamily="34" charset="-122"/>
-                <a:cs typeface="Verdana" pitchFamily="34" charset="-120"/>
-              </a:rPr>
-              <a:t>inversões de faixa em 26.460 comparações</a:t>
-            </a:r>
-            <a:endParaRPr lang="en-US" sz="1100" dirty="0"/>
-          </a:p>
-        </p:txBody>
-      </p:sp>
-      <p:sp>
-        <p:nvSpPr>
-          <p:cNvPr id="13" name="Shape 11"/>
-          <p:cNvSpPr/>
-          <p:nvPr/>
-        </p:nvSpPr>
-        <p:spPr>
-          <a:xfrm>
-            <a:off x="9006840" y="1783080"/>
-            <a:ext cx="2560320" cy="1737360"/>
-          </a:xfrm>
-          <a:prstGeom prst="roundRect">
-            <a:avLst>
-              <a:gd name="adj" fmla="val 4211"/>
-            </a:avLst>
-          </a:prstGeom>
-          <a:solidFill>
-            <a:srgbClr val="141B26"/>
-          </a:solidFill>
-          <a:ln w="12700">
-            <a:solidFill>
-              <a:srgbClr val="2B3849"/>
-            </a:solidFill>
-            <a:prstDash val="solid"/>
-          </a:ln>
-        </p:spPr>
-      </p:sp>
-      <p:sp>
-        <p:nvSpPr>
-          <p:cNvPr id="14" name="Text 12"/>
-          <p:cNvSpPr/>
-          <p:nvPr/>
-        </p:nvSpPr>
-        <p:spPr>
-          <a:xfrm>
-            <a:off x="9006840" y="1984248"/>
-            <a:ext cx="2560320" cy="777240"/>
-          </a:xfrm>
-          <a:prstGeom prst="rect">
-            <a:avLst/>
-          </a:prstGeom>
-          <a:noFill/>
-          <a:ln/>
-        </p:spPr>
-        <p:txBody>
-          <a:bodyPr wrap="square" rtlCol="0" anchor="ctr"/>
-          <a:lstStyle/>
-          <a:p>
-            <a:pPr algn="ctr" indent="0" marL="0">
-              <a:buNone/>
-            </a:pPr>
-            <a:r>
-              <a:rPr lang="en-US" sz="3400" b="1" dirty="0">
-                <a:solidFill>
-                  <a:srgbClr val="45BD8A"/>
-                </a:solidFill>
-                <a:latin typeface="Verdana" pitchFamily="34" charset="0"/>
-                <a:ea typeface="Verdana" pitchFamily="34" charset="-122"/>
-                <a:cs typeface="Verdana" pitchFamily="34" charset="-120"/>
-              </a:rPr>
-              <a:t>21/21</a:t>
-            </a:r>
-            <a:endParaRPr lang="en-US" sz="3400" dirty="0"/>
-          </a:p>
-        </p:txBody>
-      </p:sp>
-      <p:sp>
-        <p:nvSpPr>
-          <p:cNvPr id="15" name="Text 13"/>
-          <p:cNvSpPr/>
-          <p:nvPr/>
-        </p:nvSpPr>
-        <p:spPr>
-          <a:xfrm>
-            <a:off x="9144000" y="2770632"/>
-            <a:ext cx="2286000" cy="640080"/>
-          </a:xfrm>
-          <a:prstGeom prst="rect">
-            <a:avLst/>
-          </a:prstGeom>
-          <a:noFill/>
-          <a:ln/>
-        </p:spPr>
-        <p:txBody>
-          <a:bodyPr wrap="square" rtlCol="0" anchor="ctr"/>
-          <a:lstStyle/>
-          <a:p>
-            <a:pPr algn="ctr" indent="0" marL="0">
-              <a:buNone/>
-            </a:pPr>
-            <a:r>
-              <a:rPr lang="en-US" sz="1100" dirty="0">
-                <a:solidFill>
-                  <a:srgbClr val="9FADBE"/>
-                </a:solidFill>
-                <a:latin typeface="Verdana" pitchFamily="34" charset="0"/>
-                <a:ea typeface="Verdana" pitchFamily="34" charset="-122"/>
-                <a:cs typeface="Verdana" pitchFamily="34" charset="-120"/>
-              </a:rPr>
-              <a:t>casos da bateria adversarial de barreiras</a:t>
-            </a:r>
-            <a:endParaRPr lang="en-US" sz="1100" dirty="0"/>
-          </a:p>
-        </p:txBody>
-      </p:sp>
-      <p:sp>
-        <p:nvSpPr>
-          <p:cNvPr id="16" name="Shape 14"/>
-          <p:cNvSpPr/>
-          <p:nvPr/>
-        </p:nvSpPr>
-        <p:spPr>
-          <a:xfrm>
-            <a:off x="640080" y="3840480"/>
-            <a:ext cx="10881360" cy="1920240"/>
-          </a:xfrm>
-          <a:prstGeom prst="roundRect">
-            <a:avLst>
-              <a:gd name="adj" fmla="val 3810"/>
-            </a:avLst>
-          </a:prstGeom>
-          <a:solidFill>
-            <a:srgbClr val="141B26"/>
-          </a:solidFill>
-          <a:ln w="12700">
-            <a:solidFill>
-              <a:srgbClr val="2B3849"/>
-            </a:solidFill>
-            <a:prstDash val="solid"/>
-          </a:ln>
-        </p:spPr>
-      </p:sp>
-      <p:sp>
-        <p:nvSpPr>
-          <p:cNvPr id="17" name="Text 15"/>
-          <p:cNvSpPr/>
-          <p:nvPr/>
-        </p:nvSpPr>
-        <p:spPr>
-          <a:xfrm>
-            <a:off x="914400" y="4023360"/>
-            <a:ext cx="10058400" cy="365760"/>
-          </a:xfrm>
-          <a:prstGeom prst="rect">
-            <a:avLst/>
-          </a:prstGeom>
-          <a:noFill/>
-          <a:ln/>
-        </p:spPr>
-        <p:txBody>
-          <a:bodyPr wrap="square" rtlCol="0" anchor="ctr"/>
-          <a:lstStyle/>
-          <a:p>
-            <a:pPr indent="0" marL="0">
-              <a:buNone/>
-            </a:pPr>
-            <a:r>
-              <a:rPr lang="en-US" sz="1600" b="1" dirty="0">
-                <a:solidFill>
-                  <a:srgbClr val="FFFFFF"/>
-                </a:solidFill>
-                <a:latin typeface="Verdana" pitchFamily="34" charset="0"/>
-                <a:ea typeface="Verdana" pitchFamily="34" charset="-122"/>
-                <a:cs typeface="Verdana" pitchFamily="34" charset="-120"/>
-              </a:rPr>
-              <a:t>O risco que não conseguimos eliminar</a:t>
-            </a:r>
-            <a:endParaRPr lang="en-US" sz="1600" dirty="0"/>
-          </a:p>
-        </p:txBody>
-      </p:sp>
-      <p:sp>
-        <p:nvSpPr>
-          <p:cNvPr id="18" name="Text 16"/>
-          <p:cNvSpPr/>
-          <p:nvPr/>
-        </p:nvSpPr>
-        <p:spPr>
-          <a:xfrm>
-            <a:off x="914400" y="4434840"/>
-            <a:ext cx="10332720" cy="1188720"/>
-          </a:xfrm>
-          <a:prstGeom prst="rect">
-            <a:avLst/>
-          </a:prstGeom>
-          <a:noFill/>
-          <a:ln/>
-        </p:spPr>
-        <p:txBody>
-          <a:bodyPr wrap="square" rtlCol="0" anchor="ctr"/>
-          <a:lstStyle/>
-          <a:p>
-            <a:pPr indent="0" marL="0">
-              <a:lnSpc>
-                <a:spcPct val="120000"/>
-              </a:lnSpc>
-              <a:buNone/>
-            </a:pPr>
-            <a:r>
-              <a:rPr lang="en-US" sz="1250" dirty="0">
-                <a:solidFill>
-                  <a:srgbClr val="9FADBE"/>
-                </a:solidFill>
-                <a:latin typeface="Verdana" pitchFamily="34" charset="0"/>
-                <a:ea typeface="Verdana" pitchFamily="34" charset="-122"/>
-                <a:cs typeface="Verdana" pitchFamily="34" charset="-120"/>
-              </a:rPr>
-              <a:t>O maior risco deste sistema não é inventar uma data. É repetir com confiança a data certa de uma ementa do semestre passado. O RAG resolve alucinação, não desatualização.</a:t>
-            </a:r>
-            <a:endParaRPr lang="en-US" sz="1250" dirty="0"/>
-          </a:p>
-          <a:p>
-            <a:pPr indent="0" marL="0">
-              <a:lnSpc>
-                <a:spcPct val="120000"/>
-              </a:lnSpc>
-              <a:buNone/>
-            </a:pPr>
-            <a:endParaRPr lang="en-US" sz="1250" dirty="0"/>
-          </a:p>
-          <a:p>
-            <a:pPr indent="0" marL="0">
-              <a:lnSpc>
-                <a:spcPct val="120000"/>
-              </a:lnSpc>
-              <a:buNone/>
-            </a:pPr>
-            <a:r>
-              <a:rPr lang="en-US" sz="1250" dirty="0">
-                <a:solidFill>
-                  <a:srgbClr val="9FADBE"/>
-                </a:solidFill>
-                <a:latin typeface="Verdana" pitchFamily="34" charset="0"/>
-                <a:ea typeface="Verdana" pitchFamily="34" charset="-122"/>
-                <a:cs typeface="Verdana" pitchFamily="34" charset="-120"/>
-              </a:rPr>
-              <a:t>A mitigação é parcial: todo documento carrega uma referência de data que aparece em toda citação. Uma solução real exigiria integração com o sistema acadêmico.</a:t>
-            </a:r>
-            <a:endParaRPr lang="en-US" sz="1250" dirty="0"/>
-          </a:p>
-        </p:txBody>
-      </p:sp>
-      <p:sp>
-        <p:nvSpPr>
-          <p:cNvPr id="19" name="Text 17"/>
+            <a:off x="640080" y="5943600"/>
+            <a:ext cx="10972800" cy="320040"/>
+          </a:xfrm>
+          <a:prstGeom prst="rect">
+            <a:avLst/>
+          </a:prstGeom>
+          <a:noFill/>
+          <a:ln/>
+        </p:spPr>
+        <p:txBody>
+          <a:bodyPr wrap="square" rtlCol="0" anchor="ctr"/>
+          <a:lstStyle/>
+          <a:p>
+            <a:pPr indent="0" marL="0">
+              <a:buNone/>
+            </a:pPr>
+            <a:r>
+              <a:rPr lang="en-US" sz="1300" b="1" dirty="0">
+                <a:solidFill>
+                  <a:srgbClr val="E6EAEF"/>
+                </a:solidFill>
+                <a:latin typeface="Verdana" pitchFamily="34" charset="0"/>
+                <a:ea typeface="Verdana" pitchFamily="34" charset="-122"/>
+                <a:cs typeface="Verdana" pitchFamily="34" charset="-120"/>
+              </a:rPr>
+              <a:t>Uma métrica que ninguém audita mede o que a ferramenta faz, e não o que o sistema faz.</a:t>
+            </a:r>
+            <a:endParaRPr lang="en-US" sz="1300" dirty="0"/>
+          </a:p>
+        </p:txBody>
+      </p:sp>
+      <p:sp>
+        <p:nvSpPr>
+          <p:cNvPr id="13" name="Text 11"/>
           <p:cNvSpPr/>
           <p:nvPr/>
         </p:nvSpPr>
@@ -9665,7 +11341,7 @@
       </p:sp>
       <p:sp>
         <p:nvSpPr>
-          <p:cNvPr id="20" name="Text 18"/>
+          <p:cNvPr id="14" name="Text 12"/>
           <p:cNvSpPr/>
           <p:nvPr/>
         </p:nvSpPr>
@@ -9767,7 +11443,7 @@
                 <a:ea typeface="Verdana" pitchFamily="34" charset="-122"/>
                 <a:cs typeface="Verdana" pitchFamily="34" charset="-120"/>
               </a:rPr>
-              <a:t>FERRAMENTAS DE IA GENERATIVA</a:t>
+              <a:t>VISÃO CRÍTICA</a:t>
             </a:r>
             <a:endParaRPr lang="en-US" sz="1100" dirty="0"/>
           </a:p>
@@ -9806,1495 +11482,508 @@
                 <a:ea typeface="Verdana" pitchFamily="34" charset="-122"/>
                 <a:cs typeface="Verdana" pitchFamily="34" charset="-120"/>
               </a:rPr>
-              <a:t>O que cada uma resolveu, e onde falhou</a:t>
+              <a:t>O que medimos, e o que não conseguimos resolver</a:t>
             </a:r>
             <a:endParaRPr lang="en-US" sz="2800" dirty="0"/>
           </a:p>
         </p:txBody>
       </p:sp>
-      <p:graphicFrame>
-        <p:nvGraphicFramePr>
-          <p:cNvPr id="10" name="Table 0"/>
-          <p:cNvGraphicFramePr>
-            <a:graphicFrameLocks noGrp="1"/>
-          </p:cNvGraphicFramePr>
-          <p:nvPr>
-            <p:extLst>
-              <p:ext uri="{D42A27DB-BD31-4B8C-83A1-F6EECF244321}">
-                <p14:modId xmlns:p14="http://schemas.microsoft.com/office/powerpoint/2010/main" val="1579011935"/>
-              </p:ext>
-            </p:extLst>
-          </p:nvPr>
-        </p:nvGraphicFramePr>
-        <p:xfrm>
-          <a:off x="640080" y="1828800"/>
-          <a:ext cx="10881360" cy="914400"/>
-        </p:xfrm>
-        <a:graphic>
-          <a:graphicData uri="http://schemas.openxmlformats.org/drawingml/2006/table">
-            <a:tbl>
-              <a:tblPr/>
-              <a:tblGrid>
-                <a:gridCol w="2011680"/>
-                <a:gridCol w="4206240"/>
-                <a:gridCol w="4663440"/>
-              </a:tblGrid>
-              <a:tr h="475488">
-                <a:tc>
-                  <a:txBody>
-                    <a:bodyPr/>
-                    <a:lstStyle/>
-                    <a:p>
-                      <a:pPr indent="0" marL="0">
-                        <a:buNone/>
-                      </a:pPr>
-                      <a:r>
-                        <a:rPr lang="en-US" sz="1200" b="1" dirty="0">
-                          <a:solidFill>
-                            <a:srgbClr val="FFFFFF"/>
-                          </a:solidFill>
-                          <a:latin typeface="Verdana" pitchFamily="34" charset="0"/>
-                          <a:ea typeface="Verdana" pitchFamily="34" charset="-122"/>
-                          <a:cs typeface="Verdana" pitchFamily="34" charset="-120"/>
-                        </a:rPr>
-                        <a:t>Ferramenta</a:t>
-                      </a:r>
-                      <a:endParaRPr lang="en-US" sz="1200" dirty="0">
-                        <a:latin typeface="Verdana" charset="0"/>
-                        <a:ea typeface="Verdana" charset="0"/>
-                        <a:cs typeface="Verdana" charset="0"/>
-                      </a:endParaRPr>
-                    </a:p>
-                  </a:txBody>
-                  <a:tcPr marL="91440" marR="91440" marT="45720" marB="45720" anchor="ctr">
-                    <a:lnL w="12700" cap="flat" cmpd="sng" algn="ctr">
-                      <a:solidFill>
-                        <a:srgbClr val="2B3849"/>
-                      </a:solidFill>
-                      <a:prstDash val="solid"/>
-                      <a:round/>
-                      <a:headEnd type="none" w="med" len="med"/>
-                      <a:tailEnd type="none" w="med" len="med"/>
-                    </a:lnL>
-                    <a:lnR w="12700" cap="flat" cmpd="sng" algn="ctr">
-                      <a:solidFill>
-                        <a:srgbClr val="2B3849"/>
-                      </a:solidFill>
-                      <a:prstDash val="solid"/>
-                      <a:round/>
-                      <a:headEnd type="none" w="med" len="med"/>
-                      <a:tailEnd type="none" w="med" len="med"/>
-                    </a:lnR>
-                    <a:lnT w="12700" cap="flat" cmpd="sng" algn="ctr">
-                      <a:solidFill>
-                        <a:srgbClr val="2B3849"/>
-                      </a:solidFill>
-                      <a:prstDash val="solid"/>
-                      <a:round/>
-                      <a:headEnd type="none" w="med" len="med"/>
-                      <a:tailEnd type="none" w="med" len="med"/>
-                    </a:lnT>
-                    <a:lnB w="12700" cap="flat" cmpd="sng" algn="ctr">
-                      <a:solidFill>
-                        <a:srgbClr val="2B3849"/>
-                      </a:solidFill>
-                      <a:prstDash val="solid"/>
-                      <a:round/>
-                      <a:headEnd type="none" w="med" len="med"/>
-                      <a:tailEnd type="none" w="med" len="med"/>
-                    </a:lnB>
-                    <a:solidFill>
-                      <a:srgbClr val="141B26"/>
-                    </a:solidFill>
-                  </a:tcPr>
-                </a:tc>
-                <a:tc>
-                  <a:txBody>
-                    <a:bodyPr/>
-                    <a:lstStyle/>
-                    <a:p>
-                      <a:pPr indent="0" marL="0">
-                        <a:buNone/>
-                      </a:pPr>
-                      <a:r>
-                        <a:rPr lang="en-US" sz="1200" b="1" dirty="0">
-                          <a:solidFill>
-                            <a:srgbClr val="FFFFFF"/>
-                          </a:solidFill>
-                          <a:latin typeface="Verdana" pitchFamily="34" charset="0"/>
-                          <a:ea typeface="Verdana" pitchFamily="34" charset="-122"/>
-                          <a:cs typeface="Verdana" pitchFamily="34" charset="-120"/>
-                        </a:rPr>
-                        <a:t>Uso no projeto</a:t>
-                      </a:r>
-                      <a:endParaRPr lang="en-US" sz="1200" dirty="0">
-                        <a:latin typeface="Verdana" charset="0"/>
-                        <a:ea typeface="Verdana" charset="0"/>
-                        <a:cs typeface="Verdana" charset="0"/>
-                      </a:endParaRPr>
-                    </a:p>
-                  </a:txBody>
-                  <a:tcPr marL="91440" marR="91440" marT="45720" marB="45720" anchor="ctr">
-                    <a:lnL w="12700" cap="flat" cmpd="sng" algn="ctr">
-                      <a:solidFill>
-                        <a:srgbClr val="2B3849"/>
-                      </a:solidFill>
-                      <a:prstDash val="solid"/>
-                      <a:round/>
-                      <a:headEnd type="none" w="med" len="med"/>
-                      <a:tailEnd type="none" w="med" len="med"/>
-                    </a:lnL>
-                    <a:lnR w="12700" cap="flat" cmpd="sng" algn="ctr">
-                      <a:solidFill>
-                        <a:srgbClr val="2B3849"/>
-                      </a:solidFill>
-                      <a:prstDash val="solid"/>
-                      <a:round/>
-                      <a:headEnd type="none" w="med" len="med"/>
-                      <a:tailEnd type="none" w="med" len="med"/>
-                    </a:lnR>
-                    <a:lnT w="12700" cap="flat" cmpd="sng" algn="ctr">
-                      <a:solidFill>
-                        <a:srgbClr val="2B3849"/>
-                      </a:solidFill>
-                      <a:prstDash val="solid"/>
-                      <a:round/>
-                      <a:headEnd type="none" w="med" len="med"/>
-                      <a:tailEnd type="none" w="med" len="med"/>
-                    </a:lnT>
-                    <a:lnB w="12700" cap="flat" cmpd="sng" algn="ctr">
-                      <a:solidFill>
-                        <a:srgbClr val="2B3849"/>
-                      </a:solidFill>
-                      <a:prstDash val="solid"/>
-                      <a:round/>
-                      <a:headEnd type="none" w="med" len="med"/>
-                      <a:tailEnd type="none" w="med" len="med"/>
-                    </a:lnB>
-                    <a:solidFill>
-                      <a:srgbClr val="141B26"/>
-                    </a:solidFill>
-                  </a:tcPr>
-                </a:tc>
-                <a:tc>
-                  <a:txBody>
-                    <a:bodyPr/>
-                    <a:lstStyle/>
-                    <a:p>
-                      <a:pPr indent="0" marL="0">
-                        <a:buNone/>
-                      </a:pPr>
-                      <a:r>
-                        <a:rPr lang="en-US" sz="1200" b="1" dirty="0">
-                          <a:solidFill>
-                            <a:srgbClr val="FFFFFF"/>
-                          </a:solidFill>
-                          <a:latin typeface="Verdana" pitchFamily="34" charset="0"/>
-                          <a:ea typeface="Verdana" pitchFamily="34" charset="-122"/>
-                          <a:cs typeface="Verdana" pitchFamily="34" charset="-120"/>
-                        </a:rPr>
-                        <a:t>Limitação observada</a:t>
-                      </a:r>
-                      <a:endParaRPr lang="en-US" sz="1200" dirty="0">
-                        <a:latin typeface="Verdana" charset="0"/>
-                        <a:ea typeface="Verdana" charset="0"/>
-                        <a:cs typeface="Verdana" charset="0"/>
-                      </a:endParaRPr>
-                    </a:p>
-                  </a:txBody>
-                  <a:tcPr marL="91440" marR="91440" marT="45720" marB="45720" anchor="ctr">
-                    <a:lnL w="12700" cap="flat" cmpd="sng" algn="ctr">
-                      <a:solidFill>
-                        <a:srgbClr val="2B3849"/>
-                      </a:solidFill>
-                      <a:prstDash val="solid"/>
-                      <a:round/>
-                      <a:headEnd type="none" w="med" len="med"/>
-                      <a:tailEnd type="none" w="med" len="med"/>
-                    </a:lnL>
-                    <a:lnR w="12700" cap="flat" cmpd="sng" algn="ctr">
-                      <a:solidFill>
-                        <a:srgbClr val="2B3849"/>
-                      </a:solidFill>
-                      <a:prstDash val="solid"/>
-                      <a:round/>
-                      <a:headEnd type="none" w="med" len="med"/>
-                      <a:tailEnd type="none" w="med" len="med"/>
-                    </a:lnR>
-                    <a:lnT w="12700" cap="flat" cmpd="sng" algn="ctr">
-                      <a:solidFill>
-                        <a:srgbClr val="2B3849"/>
-                      </a:solidFill>
-                      <a:prstDash val="solid"/>
-                      <a:round/>
-                      <a:headEnd type="none" w="med" len="med"/>
-                      <a:tailEnd type="none" w="med" len="med"/>
-                    </a:lnT>
-                    <a:lnB w="12700" cap="flat" cmpd="sng" algn="ctr">
-                      <a:solidFill>
-                        <a:srgbClr val="2B3849"/>
-                      </a:solidFill>
-                      <a:prstDash val="solid"/>
-                      <a:round/>
-                      <a:headEnd type="none" w="med" len="med"/>
-                      <a:tailEnd type="none" w="med" len="med"/>
-                    </a:lnB>
-                    <a:solidFill>
-                      <a:srgbClr val="141B26"/>
-                    </a:solidFill>
-                  </a:tcPr>
-                </a:tc>
-              </a:tr>
-              <a:tr h="475488">
-                <a:tc>
-                  <a:txBody>
-                    <a:bodyPr/>
-                    <a:lstStyle/>
-                    <a:p>
-                      <a:pPr indent="0" marL="0">
-                        <a:buNone/>
-                      </a:pPr>
-                      <a:r>
-                        <a:rPr lang="en-US" sz="1200" dirty="0">
-                          <a:solidFill>
-                            <a:srgbClr val="9FADBE"/>
-                          </a:solidFill>
-                          <a:latin typeface="Verdana" pitchFamily="34" charset="0"/>
-                          <a:ea typeface="Verdana" pitchFamily="34" charset="-122"/>
-                          <a:cs typeface="Verdana" pitchFamily="34" charset="-120"/>
-                        </a:rPr>
-                        <a:t>ChatGPT</a:t>
-                      </a:r>
-                      <a:endParaRPr lang="en-US" sz="1200" dirty="0">
-                        <a:latin typeface="Verdana" charset="0"/>
-                        <a:ea typeface="Verdana" charset="0"/>
-                        <a:cs typeface="Verdana" charset="0"/>
-                      </a:endParaRPr>
-                    </a:p>
-                  </a:txBody>
-                  <a:tcPr marL="91440" marR="91440" marT="45720" marB="45720" anchor="ctr">
-                    <a:lnL w="12700" cap="flat" cmpd="sng" algn="ctr">
-                      <a:solidFill>
-                        <a:srgbClr val="2B3849"/>
-                      </a:solidFill>
-                      <a:prstDash val="solid"/>
-                      <a:round/>
-                      <a:headEnd type="none" w="med" len="med"/>
-                      <a:tailEnd type="none" w="med" len="med"/>
-                    </a:lnL>
-                    <a:lnR w="12700" cap="flat" cmpd="sng" algn="ctr">
-                      <a:solidFill>
-                        <a:srgbClr val="2B3849"/>
-                      </a:solidFill>
-                      <a:prstDash val="solid"/>
-                      <a:round/>
-                      <a:headEnd type="none" w="med" len="med"/>
-                      <a:tailEnd type="none" w="med" len="med"/>
-                    </a:lnR>
-                    <a:lnT w="12700" cap="flat" cmpd="sng" algn="ctr">
-                      <a:solidFill>
-                        <a:srgbClr val="2B3849"/>
-                      </a:solidFill>
-                      <a:prstDash val="solid"/>
-                      <a:round/>
-                      <a:headEnd type="none" w="med" len="med"/>
-                      <a:tailEnd type="none" w="med" len="med"/>
-                    </a:lnT>
-                    <a:lnB w="12700" cap="flat" cmpd="sng" algn="ctr">
-                      <a:solidFill>
-                        <a:srgbClr val="2B3849"/>
-                      </a:solidFill>
-                      <a:prstDash val="solid"/>
-                      <a:round/>
-                      <a:headEnd type="none" w="med" len="med"/>
-                      <a:tailEnd type="none" w="med" len="med"/>
-                    </a:lnB>
-                    <a:solidFill>
-                      <a:srgbClr val="141B26"/>
-                    </a:solidFill>
-                  </a:tcPr>
-                </a:tc>
-                <a:tc>
-                  <a:txBody>
-                    <a:bodyPr/>
-                    <a:lstStyle/>
-                    <a:p>
-                      <a:pPr indent="0" marL="0">
-                        <a:buNone/>
-                      </a:pPr>
-                      <a:r>
-                        <a:rPr lang="en-US" sz="1200" dirty="0">
-                          <a:solidFill>
-                            <a:srgbClr val="9FADBE"/>
-                          </a:solidFill>
-                          <a:latin typeface="Verdana" pitchFamily="34" charset="0"/>
-                          <a:ea typeface="Verdana" pitchFamily="34" charset="-122"/>
-                          <a:cs typeface="Verdana" pitchFamily="34" charset="-120"/>
-                        </a:rPr>
-                        <a:t>Brainstorm de modelagem e critérios</a:t>
-                      </a:r>
-                      <a:endParaRPr lang="en-US" sz="1200" dirty="0">
-                        <a:latin typeface="Verdana" charset="0"/>
-                        <a:ea typeface="Verdana" charset="0"/>
-                        <a:cs typeface="Verdana" charset="0"/>
-                      </a:endParaRPr>
-                    </a:p>
-                  </a:txBody>
-                  <a:tcPr marL="91440" marR="91440" marT="45720" marB="45720" anchor="ctr">
-                    <a:lnL w="12700" cap="flat" cmpd="sng" algn="ctr">
-                      <a:solidFill>
-                        <a:srgbClr val="2B3849"/>
-                      </a:solidFill>
-                      <a:prstDash val="solid"/>
-                      <a:round/>
-                      <a:headEnd type="none" w="med" len="med"/>
-                      <a:tailEnd type="none" w="med" len="med"/>
-                    </a:lnL>
-                    <a:lnR w="12700" cap="flat" cmpd="sng" algn="ctr">
-                      <a:solidFill>
-                        <a:srgbClr val="2B3849"/>
-                      </a:solidFill>
-                      <a:prstDash val="solid"/>
-                      <a:round/>
-                      <a:headEnd type="none" w="med" len="med"/>
-                      <a:tailEnd type="none" w="med" len="med"/>
-                    </a:lnR>
-                    <a:lnT w="12700" cap="flat" cmpd="sng" algn="ctr">
-                      <a:solidFill>
-                        <a:srgbClr val="2B3849"/>
-                      </a:solidFill>
-                      <a:prstDash val="solid"/>
-                      <a:round/>
-                      <a:headEnd type="none" w="med" len="med"/>
-                      <a:tailEnd type="none" w="med" len="med"/>
-                    </a:lnT>
-                    <a:lnB w="12700" cap="flat" cmpd="sng" algn="ctr">
-                      <a:solidFill>
-                        <a:srgbClr val="2B3849"/>
-                      </a:solidFill>
-                      <a:prstDash val="solid"/>
-                      <a:round/>
-                      <a:headEnd type="none" w="med" len="med"/>
-                      <a:tailEnd type="none" w="med" len="med"/>
-                    </a:lnB>
-                    <a:solidFill>
-                      <a:srgbClr val="141B26"/>
-                    </a:solidFill>
-                  </a:tcPr>
-                </a:tc>
-                <a:tc>
-                  <a:txBody>
-                    <a:bodyPr/>
-                    <a:lstStyle/>
-                    <a:p>
-                      <a:pPr indent="0" marL="0">
-                        <a:buNone/>
-                      </a:pPr>
-                      <a:r>
-                        <a:rPr lang="en-US" sz="1200" dirty="0">
-                          <a:solidFill>
-                            <a:srgbClr val="9FADBE"/>
-                          </a:solidFill>
-                          <a:latin typeface="Verdana" pitchFamily="34" charset="0"/>
-                          <a:ea typeface="Verdana" pitchFamily="34" charset="-122"/>
-                          <a:cs typeface="Verdana" pitchFamily="34" charset="-120"/>
-                        </a:rPr>
-                        <a:t>Sugere estruturas plausíveis, mas genéricas</a:t>
-                      </a:r>
-                      <a:endParaRPr lang="en-US" sz="1200" dirty="0">
-                        <a:latin typeface="Verdana" charset="0"/>
-                        <a:ea typeface="Verdana" charset="0"/>
-                        <a:cs typeface="Verdana" charset="0"/>
-                      </a:endParaRPr>
-                    </a:p>
-                  </a:txBody>
-                  <a:tcPr marL="91440" marR="91440" marT="45720" marB="45720" anchor="ctr">
-                    <a:lnL w="12700" cap="flat" cmpd="sng" algn="ctr">
-                      <a:solidFill>
-                        <a:srgbClr val="2B3849"/>
-                      </a:solidFill>
-                      <a:prstDash val="solid"/>
-                      <a:round/>
-                      <a:headEnd type="none" w="med" len="med"/>
-                      <a:tailEnd type="none" w="med" len="med"/>
-                    </a:lnL>
-                    <a:lnR w="12700" cap="flat" cmpd="sng" algn="ctr">
-                      <a:solidFill>
-                        <a:srgbClr val="2B3849"/>
-                      </a:solidFill>
-                      <a:prstDash val="solid"/>
-                      <a:round/>
-                      <a:headEnd type="none" w="med" len="med"/>
-                      <a:tailEnd type="none" w="med" len="med"/>
-                    </a:lnR>
-                    <a:lnT w="12700" cap="flat" cmpd="sng" algn="ctr">
-                      <a:solidFill>
-                        <a:srgbClr val="2B3849"/>
-                      </a:solidFill>
-                      <a:prstDash val="solid"/>
-                      <a:round/>
-                      <a:headEnd type="none" w="med" len="med"/>
-                      <a:tailEnd type="none" w="med" len="med"/>
-                    </a:lnT>
-                    <a:lnB w="12700" cap="flat" cmpd="sng" algn="ctr">
-                      <a:solidFill>
-                        <a:srgbClr val="2B3849"/>
-                      </a:solidFill>
-                      <a:prstDash val="solid"/>
-                      <a:round/>
-                      <a:headEnd type="none" w="med" len="med"/>
-                      <a:tailEnd type="none" w="med" len="med"/>
-                    </a:lnB>
-                    <a:solidFill>
-                      <a:srgbClr val="141B26"/>
-                    </a:solidFill>
-                  </a:tcPr>
-                </a:tc>
-              </a:tr>
-              <a:tr h="475488">
-                <a:tc>
-                  <a:txBody>
-                    <a:bodyPr/>
-                    <a:lstStyle/>
-                    <a:p>
-                      <a:pPr indent="0" marL="0">
-                        <a:buNone/>
-                      </a:pPr>
-                      <a:r>
-                        <a:rPr lang="en-US" sz="1200" dirty="0">
-                          <a:solidFill>
-                            <a:srgbClr val="9FADBE"/>
-                          </a:solidFill>
-                          <a:latin typeface="Verdana" pitchFamily="34" charset="0"/>
-                          <a:ea typeface="Verdana" pitchFamily="34" charset="-122"/>
-                          <a:cs typeface="Verdana" pitchFamily="34" charset="-120"/>
-                        </a:rPr>
-                        <a:t>Claude</a:t>
-                      </a:r>
-                      <a:endParaRPr lang="en-US" sz="1200" dirty="0">
-                        <a:latin typeface="Verdana" charset="0"/>
-                        <a:ea typeface="Verdana" charset="0"/>
-                        <a:cs typeface="Verdana" charset="0"/>
-                      </a:endParaRPr>
-                    </a:p>
-                  </a:txBody>
-                  <a:tcPr marL="91440" marR="91440" marT="45720" marB="45720" anchor="ctr">
-                    <a:lnL w="12700" cap="flat" cmpd="sng" algn="ctr">
-                      <a:solidFill>
-                        <a:srgbClr val="2B3849"/>
-                      </a:solidFill>
-                      <a:prstDash val="solid"/>
-                      <a:round/>
-                      <a:headEnd type="none" w="med" len="med"/>
-                      <a:tailEnd type="none" w="med" len="med"/>
-                    </a:lnL>
-                    <a:lnR w="12700" cap="flat" cmpd="sng" algn="ctr">
-                      <a:solidFill>
-                        <a:srgbClr val="2B3849"/>
-                      </a:solidFill>
-                      <a:prstDash val="solid"/>
-                      <a:round/>
-                      <a:headEnd type="none" w="med" len="med"/>
-                      <a:tailEnd type="none" w="med" len="med"/>
-                    </a:lnR>
-                    <a:lnT w="12700" cap="flat" cmpd="sng" algn="ctr">
-                      <a:solidFill>
-                        <a:srgbClr val="2B3849"/>
-                      </a:solidFill>
-                      <a:prstDash val="solid"/>
-                      <a:round/>
-                      <a:headEnd type="none" w="med" len="med"/>
-                      <a:tailEnd type="none" w="med" len="med"/>
-                    </a:lnT>
-                    <a:lnB w="12700" cap="flat" cmpd="sng" algn="ctr">
-                      <a:solidFill>
-                        <a:srgbClr val="2B3849"/>
-                      </a:solidFill>
-                      <a:prstDash val="solid"/>
-                      <a:round/>
-                      <a:headEnd type="none" w="med" len="med"/>
-                      <a:tailEnd type="none" w="med" len="med"/>
-                    </a:lnB>
-                    <a:solidFill>
-                      <a:srgbClr val="141B26"/>
-                    </a:solidFill>
-                  </a:tcPr>
-                </a:tc>
-                <a:tc>
-                  <a:txBody>
-                    <a:bodyPr/>
-                    <a:lstStyle/>
-                    <a:p>
-                      <a:pPr indent="0" marL="0">
-                        <a:buNone/>
-                      </a:pPr>
-                      <a:r>
-                        <a:rPr lang="en-US" sz="1200" dirty="0">
-                          <a:solidFill>
-                            <a:srgbClr val="9FADBE"/>
-                          </a:solidFill>
-                          <a:latin typeface="Verdana" pitchFamily="34" charset="0"/>
-                          <a:ea typeface="Verdana" pitchFamily="34" charset="-122"/>
-                          <a:cs typeface="Verdana" pitchFamily="34" charset="-120"/>
-                        </a:rPr>
-                        <a:t>Documentação técnica e código</a:t>
-                      </a:r>
-                      <a:endParaRPr lang="en-US" sz="1200" dirty="0">
-                        <a:latin typeface="Verdana" charset="0"/>
-                        <a:ea typeface="Verdana" charset="0"/>
-                        <a:cs typeface="Verdana" charset="0"/>
-                      </a:endParaRPr>
-                    </a:p>
-                  </a:txBody>
-                  <a:tcPr marL="91440" marR="91440" marT="45720" marB="45720" anchor="ctr">
-                    <a:lnL w="12700" cap="flat" cmpd="sng" algn="ctr">
-                      <a:solidFill>
-                        <a:srgbClr val="2B3849"/>
-                      </a:solidFill>
-                      <a:prstDash val="solid"/>
-                      <a:round/>
-                      <a:headEnd type="none" w="med" len="med"/>
-                      <a:tailEnd type="none" w="med" len="med"/>
-                    </a:lnL>
-                    <a:lnR w="12700" cap="flat" cmpd="sng" algn="ctr">
-                      <a:solidFill>
-                        <a:srgbClr val="2B3849"/>
-                      </a:solidFill>
-                      <a:prstDash val="solid"/>
-                      <a:round/>
-                      <a:headEnd type="none" w="med" len="med"/>
-                      <a:tailEnd type="none" w="med" len="med"/>
-                    </a:lnR>
-                    <a:lnT w="12700" cap="flat" cmpd="sng" algn="ctr">
-                      <a:solidFill>
-                        <a:srgbClr val="2B3849"/>
-                      </a:solidFill>
-                      <a:prstDash val="solid"/>
-                      <a:round/>
-                      <a:headEnd type="none" w="med" len="med"/>
-                      <a:tailEnd type="none" w="med" len="med"/>
-                    </a:lnT>
-                    <a:lnB w="12700" cap="flat" cmpd="sng" algn="ctr">
-                      <a:solidFill>
-                        <a:srgbClr val="2B3849"/>
-                      </a:solidFill>
-                      <a:prstDash val="solid"/>
-                      <a:round/>
-                      <a:headEnd type="none" w="med" len="med"/>
-                      <a:tailEnd type="none" w="med" len="med"/>
-                    </a:lnB>
-                    <a:solidFill>
-                      <a:srgbClr val="141B26"/>
-                    </a:solidFill>
-                  </a:tcPr>
-                </a:tc>
-                <a:tc>
-                  <a:txBody>
-                    <a:bodyPr/>
-                    <a:lstStyle/>
-                    <a:p>
-                      <a:pPr indent="0" marL="0">
-                        <a:buNone/>
-                      </a:pPr>
-                      <a:r>
-                        <a:rPr lang="en-US" sz="1200" dirty="0">
-                          <a:solidFill>
-                            <a:srgbClr val="9FADBE"/>
-                          </a:solidFill>
-                          <a:latin typeface="Verdana" pitchFamily="34" charset="0"/>
-                          <a:ea typeface="Verdana" pitchFamily="34" charset="-122"/>
-                          <a:cs typeface="Verdana" pitchFamily="34" charset="-120"/>
-                        </a:rPr>
-                        <a:t>Escreve mais do que o necessário se não for contido</a:t>
-                      </a:r>
-                      <a:endParaRPr lang="en-US" sz="1200" dirty="0">
-                        <a:latin typeface="Verdana" charset="0"/>
-                        <a:ea typeface="Verdana" charset="0"/>
-                        <a:cs typeface="Verdana" charset="0"/>
-                      </a:endParaRPr>
-                    </a:p>
-                  </a:txBody>
-                  <a:tcPr marL="91440" marR="91440" marT="45720" marB="45720" anchor="ctr">
-                    <a:lnL w="12700" cap="flat" cmpd="sng" algn="ctr">
-                      <a:solidFill>
-                        <a:srgbClr val="2B3849"/>
-                      </a:solidFill>
-                      <a:prstDash val="solid"/>
-                      <a:round/>
-                      <a:headEnd type="none" w="med" len="med"/>
-                      <a:tailEnd type="none" w="med" len="med"/>
-                    </a:lnL>
-                    <a:lnR w="12700" cap="flat" cmpd="sng" algn="ctr">
-                      <a:solidFill>
-                        <a:srgbClr val="2B3849"/>
-                      </a:solidFill>
-                      <a:prstDash val="solid"/>
-                      <a:round/>
-                      <a:headEnd type="none" w="med" len="med"/>
-                      <a:tailEnd type="none" w="med" len="med"/>
-                    </a:lnR>
-                    <a:lnT w="12700" cap="flat" cmpd="sng" algn="ctr">
-                      <a:solidFill>
-                        <a:srgbClr val="2B3849"/>
-                      </a:solidFill>
-                      <a:prstDash val="solid"/>
-                      <a:round/>
-                      <a:headEnd type="none" w="med" len="med"/>
-                      <a:tailEnd type="none" w="med" len="med"/>
-                    </a:lnT>
-                    <a:lnB w="12700" cap="flat" cmpd="sng" algn="ctr">
-                      <a:solidFill>
-                        <a:srgbClr val="2B3849"/>
-                      </a:solidFill>
-                      <a:prstDash val="solid"/>
-                      <a:round/>
-                      <a:headEnd type="none" w="med" len="med"/>
-                      <a:tailEnd type="none" w="med" len="med"/>
-                    </a:lnB>
-                    <a:solidFill>
-                      <a:srgbClr val="141B26"/>
-                    </a:solidFill>
-                  </a:tcPr>
-                </a:tc>
-              </a:tr>
-              <a:tr h="475488">
-                <a:tc>
-                  <a:txBody>
-                    <a:bodyPr/>
-                    <a:lstStyle/>
-                    <a:p>
-                      <a:pPr indent="0" marL="0">
-                        <a:buNone/>
-                      </a:pPr>
-                      <a:r>
-                        <a:rPr lang="en-US" sz="1200" dirty="0">
-                          <a:solidFill>
-                            <a:srgbClr val="9FADBE"/>
-                          </a:solidFill>
-                          <a:latin typeface="Verdana" pitchFamily="34" charset="0"/>
-                          <a:ea typeface="Verdana" pitchFamily="34" charset="-122"/>
-                          <a:cs typeface="Verdana" pitchFamily="34" charset="-120"/>
-                        </a:rPr>
-                        <a:t>Gemini</a:t>
-                      </a:r>
-                      <a:endParaRPr lang="en-US" sz="1200" dirty="0">
-                        <a:latin typeface="Verdana" charset="0"/>
-                        <a:ea typeface="Verdana" charset="0"/>
-                        <a:cs typeface="Verdana" charset="0"/>
-                      </a:endParaRPr>
-                    </a:p>
-                  </a:txBody>
-                  <a:tcPr marL="91440" marR="91440" marT="45720" marB="45720" anchor="ctr">
-                    <a:lnL w="12700" cap="flat" cmpd="sng" algn="ctr">
-                      <a:solidFill>
-                        <a:srgbClr val="2B3849"/>
-                      </a:solidFill>
-                      <a:prstDash val="solid"/>
-                      <a:round/>
-                      <a:headEnd type="none" w="med" len="med"/>
-                      <a:tailEnd type="none" w="med" len="med"/>
-                    </a:lnL>
-                    <a:lnR w="12700" cap="flat" cmpd="sng" algn="ctr">
-                      <a:solidFill>
-                        <a:srgbClr val="2B3849"/>
-                      </a:solidFill>
-                      <a:prstDash val="solid"/>
-                      <a:round/>
-                      <a:headEnd type="none" w="med" len="med"/>
-                      <a:tailEnd type="none" w="med" len="med"/>
-                    </a:lnR>
-                    <a:lnT w="12700" cap="flat" cmpd="sng" algn="ctr">
-                      <a:solidFill>
-                        <a:srgbClr val="2B3849"/>
-                      </a:solidFill>
-                      <a:prstDash val="solid"/>
-                      <a:round/>
-                      <a:headEnd type="none" w="med" len="med"/>
-                      <a:tailEnd type="none" w="med" len="med"/>
-                    </a:lnT>
-                    <a:lnB w="12700" cap="flat" cmpd="sng" algn="ctr">
-                      <a:solidFill>
-                        <a:srgbClr val="2B3849"/>
-                      </a:solidFill>
-                      <a:prstDash val="solid"/>
-                      <a:round/>
-                      <a:headEnd type="none" w="med" len="med"/>
-                      <a:tailEnd type="none" w="med" len="med"/>
-                    </a:lnB>
-                    <a:solidFill>
-                      <a:srgbClr val="141B26"/>
-                    </a:solidFill>
-                  </a:tcPr>
-                </a:tc>
-                <a:tc>
-                  <a:txBody>
-                    <a:bodyPr/>
-                    <a:lstStyle/>
-                    <a:p>
-                      <a:pPr indent="0" marL="0">
-                        <a:buNone/>
-                      </a:pPr>
-                      <a:r>
-                        <a:rPr lang="en-US" sz="1200" dirty="0">
-                          <a:solidFill>
-                            <a:srgbClr val="9FADBE"/>
-                          </a:solidFill>
-                          <a:latin typeface="Verdana" pitchFamily="34" charset="0"/>
-                          <a:ea typeface="Verdana" pitchFamily="34" charset="-122"/>
-                          <a:cs typeface="Verdana" pitchFamily="34" charset="-120"/>
-                        </a:rPr>
-                        <a:t>Motor embarcado: texto e embeddings</a:t>
-                      </a:r>
-                      <a:endParaRPr lang="en-US" sz="1200" dirty="0">
-                        <a:latin typeface="Verdana" charset="0"/>
-                        <a:ea typeface="Verdana" charset="0"/>
-                        <a:cs typeface="Verdana" charset="0"/>
-                      </a:endParaRPr>
-                    </a:p>
-                  </a:txBody>
-                  <a:tcPr marL="91440" marR="91440" marT="45720" marB="45720" anchor="ctr">
-                    <a:lnL w="12700" cap="flat" cmpd="sng" algn="ctr">
-                      <a:solidFill>
-                        <a:srgbClr val="2B3849"/>
-                      </a:solidFill>
-                      <a:prstDash val="solid"/>
-                      <a:round/>
-                      <a:headEnd type="none" w="med" len="med"/>
-                      <a:tailEnd type="none" w="med" len="med"/>
-                    </a:lnL>
-                    <a:lnR w="12700" cap="flat" cmpd="sng" algn="ctr">
-                      <a:solidFill>
-                        <a:srgbClr val="2B3849"/>
-                      </a:solidFill>
-                      <a:prstDash val="solid"/>
-                      <a:round/>
-                      <a:headEnd type="none" w="med" len="med"/>
-                      <a:tailEnd type="none" w="med" len="med"/>
-                    </a:lnR>
-                    <a:lnT w="12700" cap="flat" cmpd="sng" algn="ctr">
-                      <a:solidFill>
-                        <a:srgbClr val="2B3849"/>
-                      </a:solidFill>
-                      <a:prstDash val="solid"/>
-                      <a:round/>
-                      <a:headEnd type="none" w="med" len="med"/>
-                      <a:tailEnd type="none" w="med" len="med"/>
-                    </a:lnT>
-                    <a:lnB w="12700" cap="flat" cmpd="sng" algn="ctr">
-                      <a:solidFill>
-                        <a:srgbClr val="2B3849"/>
-                      </a:solidFill>
-                      <a:prstDash val="solid"/>
-                      <a:round/>
-                      <a:headEnd type="none" w="med" len="med"/>
-                      <a:tailEnd type="none" w="med" len="med"/>
-                    </a:lnB>
-                    <a:solidFill>
-                      <a:srgbClr val="141B26"/>
-                    </a:solidFill>
-                  </a:tcPr>
-                </a:tc>
-                <a:tc>
-                  <a:txBody>
-                    <a:bodyPr/>
-                    <a:lstStyle/>
-                    <a:p>
-                      <a:pPr indent="0" marL="0">
-                        <a:buNone/>
-                      </a:pPr>
-                      <a:r>
-                        <a:rPr lang="en-US" sz="1200" dirty="0">
-                          <a:solidFill>
-                            <a:srgbClr val="9FADBE"/>
-                          </a:solidFill>
-                          <a:latin typeface="Verdana" pitchFamily="34" charset="0"/>
-                          <a:ea typeface="Verdana" pitchFamily="34" charset="-122"/>
-                          <a:cs typeface="Verdana" pitchFamily="34" charset="-120"/>
-                        </a:rPr>
-                        <a:t>Cota da linha flash acaba; versões são aposentadas</a:t>
-                      </a:r>
-                      <a:endParaRPr lang="en-US" sz="1200" dirty="0">
-                        <a:latin typeface="Verdana" charset="0"/>
-                        <a:ea typeface="Verdana" charset="0"/>
-                        <a:cs typeface="Verdana" charset="0"/>
-                      </a:endParaRPr>
-                    </a:p>
-                  </a:txBody>
-                  <a:tcPr marL="91440" marR="91440" marT="45720" marB="45720" anchor="ctr">
-                    <a:lnL w="12700" cap="flat" cmpd="sng" algn="ctr">
-                      <a:solidFill>
-                        <a:srgbClr val="2B3849"/>
-                      </a:solidFill>
-                      <a:prstDash val="solid"/>
-                      <a:round/>
-                      <a:headEnd type="none" w="med" len="med"/>
-                      <a:tailEnd type="none" w="med" len="med"/>
-                    </a:lnL>
-                    <a:lnR w="12700" cap="flat" cmpd="sng" algn="ctr">
-                      <a:solidFill>
-                        <a:srgbClr val="2B3849"/>
-                      </a:solidFill>
-                      <a:prstDash val="solid"/>
-                      <a:round/>
-                      <a:headEnd type="none" w="med" len="med"/>
-                      <a:tailEnd type="none" w="med" len="med"/>
-                    </a:lnR>
-                    <a:lnT w="12700" cap="flat" cmpd="sng" algn="ctr">
-                      <a:solidFill>
-                        <a:srgbClr val="2B3849"/>
-                      </a:solidFill>
-                      <a:prstDash val="solid"/>
-                      <a:round/>
-                      <a:headEnd type="none" w="med" len="med"/>
-                      <a:tailEnd type="none" w="med" len="med"/>
-                    </a:lnT>
-                    <a:lnB w="12700" cap="flat" cmpd="sng" algn="ctr">
-                      <a:solidFill>
-                        <a:srgbClr val="2B3849"/>
-                      </a:solidFill>
-                      <a:prstDash val="solid"/>
-                      <a:round/>
-                      <a:headEnd type="none" w="med" len="med"/>
-                      <a:tailEnd type="none" w="med" len="med"/>
-                    </a:lnB>
-                    <a:solidFill>
-                      <a:srgbClr val="141B26"/>
-                    </a:solidFill>
-                  </a:tcPr>
-                </a:tc>
-              </a:tr>
-              <a:tr h="475488">
-                <a:tc>
-                  <a:txBody>
-                    <a:bodyPr/>
-                    <a:lstStyle/>
-                    <a:p>
-                      <a:pPr indent="0" marL="0">
-                        <a:buNone/>
-                      </a:pPr>
-                      <a:r>
-                        <a:rPr lang="en-US" sz="1200" dirty="0">
-                          <a:solidFill>
-                            <a:srgbClr val="9FADBE"/>
-                          </a:solidFill>
-                          <a:latin typeface="Verdana" pitchFamily="34" charset="0"/>
-                          <a:ea typeface="Verdana" pitchFamily="34" charset="-122"/>
-                          <a:cs typeface="Verdana" pitchFamily="34" charset="-120"/>
-                        </a:rPr>
-                        <a:t>Grok</a:t>
-                      </a:r>
-                      <a:endParaRPr lang="en-US" sz="1200" dirty="0">
-                        <a:latin typeface="Verdana" charset="0"/>
-                        <a:ea typeface="Verdana" charset="0"/>
-                        <a:cs typeface="Verdana" charset="0"/>
-                      </a:endParaRPr>
-                    </a:p>
-                  </a:txBody>
-                  <a:tcPr marL="91440" marR="91440" marT="45720" marB="45720" anchor="ctr">
-                    <a:lnL w="12700" cap="flat" cmpd="sng" algn="ctr">
-                      <a:solidFill>
-                        <a:srgbClr val="2B3849"/>
-                      </a:solidFill>
-                      <a:prstDash val="solid"/>
-                      <a:round/>
-                      <a:headEnd type="none" w="med" len="med"/>
-                      <a:tailEnd type="none" w="med" len="med"/>
-                    </a:lnL>
-                    <a:lnR w="12700" cap="flat" cmpd="sng" algn="ctr">
-                      <a:solidFill>
-                        <a:srgbClr val="2B3849"/>
-                      </a:solidFill>
-                      <a:prstDash val="solid"/>
-                      <a:round/>
-                      <a:headEnd type="none" w="med" len="med"/>
-                      <a:tailEnd type="none" w="med" len="med"/>
-                    </a:lnR>
-                    <a:lnT w="12700" cap="flat" cmpd="sng" algn="ctr">
-                      <a:solidFill>
-                        <a:srgbClr val="2B3849"/>
-                      </a:solidFill>
-                      <a:prstDash val="solid"/>
-                      <a:round/>
-                      <a:headEnd type="none" w="med" len="med"/>
-                      <a:tailEnd type="none" w="med" len="med"/>
-                    </a:lnT>
-                    <a:lnB w="12700" cap="flat" cmpd="sng" algn="ctr">
-                      <a:solidFill>
-                        <a:srgbClr val="2B3849"/>
-                      </a:solidFill>
-                      <a:prstDash val="solid"/>
-                      <a:round/>
-                      <a:headEnd type="none" w="med" len="med"/>
-                      <a:tailEnd type="none" w="med" len="med"/>
-                    </a:lnB>
-                    <a:solidFill>
-                      <a:srgbClr val="141B26"/>
-                    </a:solidFill>
-                  </a:tcPr>
-                </a:tc>
-                <a:tc>
-                  <a:txBody>
-                    <a:bodyPr/>
-                    <a:lstStyle/>
-                    <a:p>
-                      <a:pPr indent="0" marL="0">
-                        <a:buNone/>
-                      </a:pPr>
-                      <a:r>
-                        <a:rPr lang="en-US" sz="1200" dirty="0">
-                          <a:solidFill>
-                            <a:srgbClr val="9FADBE"/>
-                          </a:solidFill>
-                          <a:latin typeface="Verdana" pitchFamily="34" charset="0"/>
-                          <a:ea typeface="Verdana" pitchFamily="34" charset="-122"/>
-                          <a:cs typeface="Verdana" pitchFamily="34" charset="-120"/>
-                        </a:rPr>
-                        <a:t>Teste comparativo de respostas</a:t>
-                      </a:r>
-                      <a:endParaRPr lang="en-US" sz="1200" dirty="0">
-                        <a:latin typeface="Verdana" charset="0"/>
-                        <a:ea typeface="Verdana" charset="0"/>
-                        <a:cs typeface="Verdana" charset="0"/>
-                      </a:endParaRPr>
-                    </a:p>
-                  </a:txBody>
-                  <a:tcPr marL="91440" marR="91440" marT="45720" marB="45720" anchor="ctr">
-                    <a:lnL w="12700" cap="flat" cmpd="sng" algn="ctr">
-                      <a:solidFill>
-                        <a:srgbClr val="2B3849"/>
-                      </a:solidFill>
-                      <a:prstDash val="solid"/>
-                      <a:round/>
-                      <a:headEnd type="none" w="med" len="med"/>
-                      <a:tailEnd type="none" w="med" len="med"/>
-                    </a:lnL>
-                    <a:lnR w="12700" cap="flat" cmpd="sng" algn="ctr">
-                      <a:solidFill>
-                        <a:srgbClr val="2B3849"/>
-                      </a:solidFill>
-                      <a:prstDash val="solid"/>
-                      <a:round/>
-                      <a:headEnd type="none" w="med" len="med"/>
-                      <a:tailEnd type="none" w="med" len="med"/>
-                    </a:lnR>
-                    <a:lnT w="12700" cap="flat" cmpd="sng" algn="ctr">
-                      <a:solidFill>
-                        <a:srgbClr val="2B3849"/>
-                      </a:solidFill>
-                      <a:prstDash val="solid"/>
-                      <a:round/>
-                      <a:headEnd type="none" w="med" len="med"/>
-                      <a:tailEnd type="none" w="med" len="med"/>
-                    </a:lnT>
-                    <a:lnB w="12700" cap="flat" cmpd="sng" algn="ctr">
-                      <a:solidFill>
-                        <a:srgbClr val="2B3849"/>
-                      </a:solidFill>
-                      <a:prstDash val="solid"/>
-                      <a:round/>
-                      <a:headEnd type="none" w="med" len="med"/>
-                      <a:tailEnd type="none" w="med" len="med"/>
-                    </a:lnB>
-                    <a:solidFill>
-                      <a:srgbClr val="141B26"/>
-                    </a:solidFill>
-                  </a:tcPr>
-                </a:tc>
-                <a:tc>
-                  <a:txBody>
-                    <a:bodyPr/>
-                    <a:lstStyle/>
-                    <a:p>
-                      <a:pPr indent="0" marL="0">
-                        <a:buNone/>
-                      </a:pPr>
-                      <a:r>
-                        <a:rPr lang="en-US" sz="1200" dirty="0">
-                          <a:solidFill>
-                            <a:srgbClr val="9FADBE"/>
-                          </a:solidFill>
-                          <a:latin typeface="Verdana" pitchFamily="34" charset="0"/>
-                          <a:ea typeface="Verdana" pitchFamily="34" charset="-122"/>
-                          <a:cs typeface="Verdana" pitchFamily="34" charset="-120"/>
-                        </a:rPr>
-                        <a:t>Sem API gratuita e sem endpoint de embeddings</a:t>
-                      </a:r>
-                      <a:endParaRPr lang="en-US" sz="1200" dirty="0">
-                        <a:latin typeface="Verdana" charset="0"/>
-                        <a:ea typeface="Verdana" charset="0"/>
-                        <a:cs typeface="Verdana" charset="0"/>
-                      </a:endParaRPr>
-                    </a:p>
-                  </a:txBody>
-                  <a:tcPr marL="91440" marR="91440" marT="45720" marB="45720" anchor="ctr">
-                    <a:lnL w="12700" cap="flat" cmpd="sng" algn="ctr">
-                      <a:solidFill>
-                        <a:srgbClr val="2B3849"/>
-                      </a:solidFill>
-                      <a:prstDash val="solid"/>
-                      <a:round/>
-                      <a:headEnd type="none" w="med" len="med"/>
-                      <a:tailEnd type="none" w="med" len="med"/>
-                    </a:lnL>
-                    <a:lnR w="12700" cap="flat" cmpd="sng" algn="ctr">
-                      <a:solidFill>
-                        <a:srgbClr val="2B3849"/>
-                      </a:solidFill>
-                      <a:prstDash val="solid"/>
-                      <a:round/>
-                      <a:headEnd type="none" w="med" len="med"/>
-                      <a:tailEnd type="none" w="med" len="med"/>
-                    </a:lnR>
-                    <a:lnT w="12700" cap="flat" cmpd="sng" algn="ctr">
-                      <a:solidFill>
-                        <a:srgbClr val="2B3849"/>
-                      </a:solidFill>
-                      <a:prstDash val="solid"/>
-                      <a:round/>
-                      <a:headEnd type="none" w="med" len="med"/>
-                      <a:tailEnd type="none" w="med" len="med"/>
-                    </a:lnT>
-                    <a:lnB w="12700" cap="flat" cmpd="sng" algn="ctr">
-                      <a:solidFill>
-                        <a:srgbClr val="2B3849"/>
-                      </a:solidFill>
-                      <a:prstDash val="solid"/>
-                      <a:round/>
-                      <a:headEnd type="none" w="med" len="med"/>
-                      <a:tailEnd type="none" w="med" len="med"/>
-                    </a:lnB>
-                    <a:solidFill>
-                      <a:srgbClr val="141B26"/>
-                    </a:solidFill>
-                  </a:tcPr>
-                </a:tc>
-              </a:tr>
-              <a:tr h="475488">
-                <a:tc>
-                  <a:txBody>
-                    <a:bodyPr/>
-                    <a:lstStyle/>
-                    <a:p>
-                      <a:pPr indent="0" marL="0">
-                        <a:buNone/>
-                      </a:pPr>
-                      <a:r>
-                        <a:rPr lang="en-US" sz="1200" dirty="0">
-                          <a:solidFill>
-                            <a:srgbClr val="9FADBE"/>
-                          </a:solidFill>
-                          <a:latin typeface="Verdana" pitchFamily="34" charset="0"/>
-                          <a:ea typeface="Verdana" pitchFamily="34" charset="-122"/>
-                          <a:cs typeface="Verdana" pitchFamily="34" charset="-120"/>
-                        </a:rPr>
-                        <a:t>Cursor</a:t>
-                      </a:r>
-                      <a:endParaRPr lang="en-US" sz="1200" dirty="0">
-                        <a:latin typeface="Verdana" charset="0"/>
-                        <a:ea typeface="Verdana" charset="0"/>
-                        <a:cs typeface="Verdana" charset="0"/>
-                      </a:endParaRPr>
-                    </a:p>
-                  </a:txBody>
-                  <a:tcPr marL="91440" marR="91440" marT="45720" marB="45720" anchor="ctr">
-                    <a:lnL w="12700" cap="flat" cmpd="sng" algn="ctr">
-                      <a:solidFill>
-                        <a:srgbClr val="2B3849"/>
-                      </a:solidFill>
-                      <a:prstDash val="solid"/>
-                      <a:round/>
-                      <a:headEnd type="none" w="med" len="med"/>
-                      <a:tailEnd type="none" w="med" len="med"/>
-                    </a:lnL>
-                    <a:lnR w="12700" cap="flat" cmpd="sng" algn="ctr">
-                      <a:solidFill>
-                        <a:srgbClr val="2B3849"/>
-                      </a:solidFill>
-                      <a:prstDash val="solid"/>
-                      <a:round/>
-                      <a:headEnd type="none" w="med" len="med"/>
-                      <a:tailEnd type="none" w="med" len="med"/>
-                    </a:lnR>
-                    <a:lnT w="12700" cap="flat" cmpd="sng" algn="ctr">
-                      <a:solidFill>
-                        <a:srgbClr val="2B3849"/>
-                      </a:solidFill>
-                      <a:prstDash val="solid"/>
-                      <a:round/>
-                      <a:headEnd type="none" w="med" len="med"/>
-                      <a:tailEnd type="none" w="med" len="med"/>
-                    </a:lnT>
-                    <a:lnB w="12700" cap="flat" cmpd="sng" algn="ctr">
-                      <a:solidFill>
-                        <a:srgbClr val="2B3849"/>
-                      </a:solidFill>
-                      <a:prstDash val="solid"/>
-                      <a:round/>
-                      <a:headEnd type="none" w="med" len="med"/>
-                      <a:tailEnd type="none" w="med" len="med"/>
-                    </a:lnB>
-                    <a:solidFill>
-                      <a:srgbClr val="141B26"/>
-                    </a:solidFill>
-                  </a:tcPr>
-                </a:tc>
-                <a:tc>
-                  <a:txBody>
-                    <a:bodyPr/>
-                    <a:lstStyle/>
-                    <a:p>
-                      <a:pPr indent="0" marL="0">
-                        <a:buNone/>
-                      </a:pPr>
-                      <a:r>
-                        <a:rPr lang="en-US" sz="1200" dirty="0">
-                          <a:solidFill>
-                            <a:srgbClr val="9FADBE"/>
-                          </a:solidFill>
-                          <a:latin typeface="Verdana" pitchFamily="34" charset="0"/>
-                          <a:ea typeface="Verdana" pitchFamily="34" charset="-122"/>
-                          <a:cs typeface="Verdana" pitchFamily="34" charset="-120"/>
-                        </a:rPr>
-                        <a:t>Desenvolvimento do código</a:t>
-                      </a:r>
-                      <a:endParaRPr lang="en-US" sz="1200" dirty="0">
-                        <a:latin typeface="Verdana" charset="0"/>
-                        <a:ea typeface="Verdana" charset="0"/>
-                        <a:cs typeface="Verdana" charset="0"/>
-                      </a:endParaRPr>
-                    </a:p>
-                  </a:txBody>
-                  <a:tcPr marL="91440" marR="91440" marT="45720" marB="45720" anchor="ctr">
-                    <a:lnL w="12700" cap="flat" cmpd="sng" algn="ctr">
-                      <a:solidFill>
-                        <a:srgbClr val="2B3849"/>
-                      </a:solidFill>
-                      <a:prstDash val="solid"/>
-                      <a:round/>
-                      <a:headEnd type="none" w="med" len="med"/>
-                      <a:tailEnd type="none" w="med" len="med"/>
-                    </a:lnL>
-                    <a:lnR w="12700" cap="flat" cmpd="sng" algn="ctr">
-                      <a:solidFill>
-                        <a:srgbClr val="2B3849"/>
-                      </a:solidFill>
-                      <a:prstDash val="solid"/>
-                      <a:round/>
-                      <a:headEnd type="none" w="med" len="med"/>
-                      <a:tailEnd type="none" w="med" len="med"/>
-                    </a:lnR>
-                    <a:lnT w="12700" cap="flat" cmpd="sng" algn="ctr">
-                      <a:solidFill>
-                        <a:srgbClr val="2B3849"/>
-                      </a:solidFill>
-                      <a:prstDash val="solid"/>
-                      <a:round/>
-                      <a:headEnd type="none" w="med" len="med"/>
-                      <a:tailEnd type="none" w="med" len="med"/>
-                    </a:lnT>
-                    <a:lnB w="12700" cap="flat" cmpd="sng" algn="ctr">
-                      <a:solidFill>
-                        <a:srgbClr val="2B3849"/>
-                      </a:solidFill>
-                      <a:prstDash val="solid"/>
-                      <a:round/>
-                      <a:headEnd type="none" w="med" len="med"/>
-                      <a:tailEnd type="none" w="med" len="med"/>
-                    </a:lnB>
-                    <a:solidFill>
-                      <a:srgbClr val="141B26"/>
-                    </a:solidFill>
-                  </a:tcPr>
-                </a:tc>
-                <a:tc>
-                  <a:txBody>
-                    <a:bodyPr/>
-                    <a:lstStyle/>
-                    <a:p>
-                      <a:pPr indent="0" marL="0">
-                        <a:buNone/>
-                      </a:pPr>
-                      <a:r>
-                        <a:rPr lang="en-US" sz="1200" dirty="0">
-                          <a:solidFill>
-                            <a:srgbClr val="9FADBE"/>
-                          </a:solidFill>
-                          <a:latin typeface="Verdana" pitchFamily="34" charset="0"/>
-                          <a:ea typeface="Verdana" pitchFamily="34" charset="-122"/>
-                          <a:cs typeface="Verdana" pitchFamily="34" charset="-120"/>
-                        </a:rPr>
-                        <a:t>Erra em silêncio no que parece certo</a:t>
-                      </a:r>
-                      <a:endParaRPr lang="en-US" sz="1200" dirty="0">
-                        <a:latin typeface="Verdana" charset="0"/>
-                        <a:ea typeface="Verdana" charset="0"/>
-                        <a:cs typeface="Verdana" charset="0"/>
-                      </a:endParaRPr>
-                    </a:p>
-                  </a:txBody>
-                  <a:tcPr marL="91440" marR="91440" marT="45720" marB="45720" anchor="ctr">
-                    <a:lnL w="12700" cap="flat" cmpd="sng" algn="ctr">
-                      <a:solidFill>
-                        <a:srgbClr val="2B3849"/>
-                      </a:solidFill>
-                      <a:prstDash val="solid"/>
-                      <a:round/>
-                      <a:headEnd type="none" w="med" len="med"/>
-                      <a:tailEnd type="none" w="med" len="med"/>
-                    </a:lnL>
-                    <a:lnR w="12700" cap="flat" cmpd="sng" algn="ctr">
-                      <a:solidFill>
-                        <a:srgbClr val="2B3849"/>
-                      </a:solidFill>
-                      <a:prstDash val="solid"/>
-                      <a:round/>
-                      <a:headEnd type="none" w="med" len="med"/>
-                      <a:tailEnd type="none" w="med" len="med"/>
-                    </a:lnR>
-                    <a:lnT w="12700" cap="flat" cmpd="sng" algn="ctr">
-                      <a:solidFill>
-                        <a:srgbClr val="2B3849"/>
-                      </a:solidFill>
-                      <a:prstDash val="solid"/>
-                      <a:round/>
-                      <a:headEnd type="none" w="med" len="med"/>
-                      <a:tailEnd type="none" w="med" len="med"/>
-                    </a:lnT>
-                    <a:lnB w="12700" cap="flat" cmpd="sng" algn="ctr">
-                      <a:solidFill>
-                        <a:srgbClr val="2B3849"/>
-                      </a:solidFill>
-                      <a:prstDash val="solid"/>
-                      <a:round/>
-                      <a:headEnd type="none" w="med" len="med"/>
-                      <a:tailEnd type="none" w="med" len="med"/>
-                    </a:lnB>
-                    <a:solidFill>
-                      <a:srgbClr val="141B26"/>
-                    </a:solidFill>
-                  </a:tcPr>
-                </a:tc>
-              </a:tr>
-              <a:tr h="475488">
-                <a:tc>
-                  <a:txBody>
-                    <a:bodyPr/>
-                    <a:lstStyle/>
-                    <a:p>
-                      <a:pPr indent="0" marL="0">
-                        <a:buNone/>
-                      </a:pPr>
-                      <a:r>
-                        <a:rPr lang="en-US" sz="1200" dirty="0">
-                          <a:solidFill>
-                            <a:srgbClr val="9FADBE"/>
-                          </a:solidFill>
-                          <a:latin typeface="Verdana" pitchFamily="34" charset="0"/>
-                          <a:ea typeface="Verdana" pitchFamily="34" charset="-122"/>
-                          <a:cs typeface="Verdana" pitchFamily="34" charset="-120"/>
-                        </a:rPr>
-                        <a:t>Dify</a:t>
-                      </a:r>
-                      <a:endParaRPr lang="en-US" sz="1200" dirty="0">
-                        <a:latin typeface="Verdana" charset="0"/>
-                        <a:ea typeface="Verdana" charset="0"/>
-                        <a:cs typeface="Verdana" charset="0"/>
-                      </a:endParaRPr>
-                    </a:p>
-                  </a:txBody>
-                  <a:tcPr marL="91440" marR="91440" marT="45720" marB="45720" anchor="ctr">
-                    <a:lnL w="12700" cap="flat" cmpd="sng" algn="ctr">
-                      <a:solidFill>
-                        <a:srgbClr val="2B3849"/>
-                      </a:solidFill>
-                      <a:prstDash val="solid"/>
-                      <a:round/>
-                      <a:headEnd type="none" w="med" len="med"/>
-                      <a:tailEnd type="none" w="med" len="med"/>
-                    </a:lnL>
-                    <a:lnR w="12700" cap="flat" cmpd="sng" algn="ctr">
-                      <a:solidFill>
-                        <a:srgbClr val="2B3849"/>
-                      </a:solidFill>
-                      <a:prstDash val="solid"/>
-                      <a:round/>
-                      <a:headEnd type="none" w="med" len="med"/>
-                      <a:tailEnd type="none" w="med" len="med"/>
-                    </a:lnR>
-                    <a:lnT w="12700" cap="flat" cmpd="sng" algn="ctr">
-                      <a:solidFill>
-                        <a:srgbClr val="2B3849"/>
-                      </a:solidFill>
-                      <a:prstDash val="solid"/>
-                      <a:round/>
-                      <a:headEnd type="none" w="med" len="med"/>
-                      <a:tailEnd type="none" w="med" len="med"/>
-                    </a:lnT>
-                    <a:lnB w="12700" cap="flat" cmpd="sng" algn="ctr">
-                      <a:solidFill>
-                        <a:srgbClr val="2B3849"/>
-                      </a:solidFill>
-                      <a:prstDash val="solid"/>
-                      <a:round/>
-                      <a:headEnd type="none" w="med" len="med"/>
-                      <a:tailEnd type="none" w="med" len="med"/>
-                    </a:lnB>
-                    <a:solidFill>
-                      <a:srgbClr val="141B26"/>
-                    </a:solidFill>
-                  </a:tcPr>
-                </a:tc>
-                <a:tc>
-                  <a:txBody>
-                    <a:bodyPr/>
-                    <a:lstStyle/>
-                    <a:p>
-                      <a:pPr indent="0" marL="0">
-                        <a:buNone/>
-                      </a:pPr>
-                      <a:r>
-                        <a:rPr lang="en-US" sz="1200" dirty="0">
-                          <a:solidFill>
-                            <a:srgbClr val="9FADBE"/>
-                          </a:solidFill>
-                          <a:latin typeface="Verdana" pitchFamily="34" charset="0"/>
-                          <a:ea typeface="Verdana" pitchFamily="34" charset="-122"/>
-                          <a:cs typeface="Verdana" pitchFamily="34" charset="-120"/>
-                        </a:rPr>
-                        <a:t>Protótipo do RAG antes do código</a:t>
-                      </a:r>
-                      <a:endParaRPr lang="en-US" sz="1200" dirty="0">
-                        <a:latin typeface="Verdana" charset="0"/>
-                        <a:ea typeface="Verdana" charset="0"/>
-                        <a:cs typeface="Verdana" charset="0"/>
-                      </a:endParaRPr>
-                    </a:p>
-                  </a:txBody>
-                  <a:tcPr marL="91440" marR="91440" marT="45720" marB="45720" anchor="ctr">
-                    <a:lnL w="12700" cap="flat" cmpd="sng" algn="ctr">
-                      <a:solidFill>
-                        <a:srgbClr val="2B3849"/>
-                      </a:solidFill>
-                      <a:prstDash val="solid"/>
-                      <a:round/>
-                      <a:headEnd type="none" w="med" len="med"/>
-                      <a:tailEnd type="none" w="med" len="med"/>
-                    </a:lnL>
-                    <a:lnR w="12700" cap="flat" cmpd="sng" algn="ctr">
-                      <a:solidFill>
-                        <a:srgbClr val="2B3849"/>
-                      </a:solidFill>
-                      <a:prstDash val="solid"/>
-                      <a:round/>
-                      <a:headEnd type="none" w="med" len="med"/>
-                      <a:tailEnd type="none" w="med" len="med"/>
-                    </a:lnR>
-                    <a:lnT w="12700" cap="flat" cmpd="sng" algn="ctr">
-                      <a:solidFill>
-                        <a:srgbClr val="2B3849"/>
-                      </a:solidFill>
-                      <a:prstDash val="solid"/>
-                      <a:round/>
-                      <a:headEnd type="none" w="med" len="med"/>
-                      <a:tailEnd type="none" w="med" len="med"/>
-                    </a:lnT>
-                    <a:lnB w="12700" cap="flat" cmpd="sng" algn="ctr">
-                      <a:solidFill>
-                        <a:srgbClr val="2B3849"/>
-                      </a:solidFill>
-                      <a:prstDash val="solid"/>
-                      <a:round/>
-                      <a:headEnd type="none" w="med" len="med"/>
-                      <a:tailEnd type="none" w="med" len="med"/>
-                    </a:lnB>
-                    <a:solidFill>
-                      <a:srgbClr val="141B26"/>
-                    </a:solidFill>
-                  </a:tcPr>
-                </a:tc>
-                <a:tc>
-                  <a:txBody>
-                    <a:bodyPr/>
-                    <a:lstStyle/>
-                    <a:p>
-                      <a:pPr indent="0" marL="0">
-                        <a:buNone/>
-                      </a:pPr>
-                      <a:r>
-                        <a:rPr lang="en-US" sz="1200" dirty="0">
-                          <a:solidFill>
-                            <a:srgbClr val="9FADBE"/>
-                          </a:solidFill>
-                          <a:latin typeface="Verdana" pitchFamily="34" charset="0"/>
-                          <a:ea typeface="Verdana" pitchFamily="34" charset="-122"/>
-                          <a:cs typeface="Verdana" pitchFamily="34" charset="-120"/>
-                        </a:rPr>
-                        <a:t>Não permite controlar o limiar de relevância</a:t>
-                      </a:r>
-                      <a:endParaRPr lang="en-US" sz="1200" dirty="0">
-                        <a:latin typeface="Verdana" charset="0"/>
-                        <a:ea typeface="Verdana" charset="0"/>
-                        <a:cs typeface="Verdana" charset="0"/>
-                      </a:endParaRPr>
-                    </a:p>
-                  </a:txBody>
-                  <a:tcPr marL="91440" marR="91440" marT="45720" marB="45720" anchor="ctr">
-                    <a:lnL w="12700" cap="flat" cmpd="sng" algn="ctr">
-                      <a:solidFill>
-                        <a:srgbClr val="2B3849"/>
-                      </a:solidFill>
-                      <a:prstDash val="solid"/>
-                      <a:round/>
-                      <a:headEnd type="none" w="med" len="med"/>
-                      <a:tailEnd type="none" w="med" len="med"/>
-                    </a:lnL>
-                    <a:lnR w="12700" cap="flat" cmpd="sng" algn="ctr">
-                      <a:solidFill>
-                        <a:srgbClr val="2B3849"/>
-                      </a:solidFill>
-                      <a:prstDash val="solid"/>
-                      <a:round/>
-                      <a:headEnd type="none" w="med" len="med"/>
-                      <a:tailEnd type="none" w="med" len="med"/>
-                    </a:lnR>
-                    <a:lnT w="12700" cap="flat" cmpd="sng" algn="ctr">
-                      <a:solidFill>
-                        <a:srgbClr val="2B3849"/>
-                      </a:solidFill>
-                      <a:prstDash val="solid"/>
-                      <a:round/>
-                      <a:headEnd type="none" w="med" len="med"/>
-                      <a:tailEnd type="none" w="med" len="med"/>
-                    </a:lnT>
-                    <a:lnB w="12700" cap="flat" cmpd="sng" algn="ctr">
-                      <a:solidFill>
-                        <a:srgbClr val="2B3849"/>
-                      </a:solidFill>
-                      <a:prstDash val="solid"/>
-                      <a:round/>
-                      <a:headEnd type="none" w="med" len="med"/>
-                      <a:tailEnd type="none" w="med" len="med"/>
-                    </a:lnB>
-                    <a:solidFill>
-                      <a:srgbClr val="141B26"/>
-                    </a:solidFill>
-                  </a:tcPr>
-                </a:tc>
-              </a:tr>
-            </a:tbl>
-          </a:graphicData>
-        </a:graphic>
-      </p:graphicFrame>
-      <p:sp>
-        <p:nvSpPr>
-          <p:cNvPr id="5" name="Text 2"/>
-          <p:cNvSpPr/>
-          <p:nvPr/>
-        </p:nvSpPr>
-        <p:spPr>
-          <a:xfrm>
-            <a:off x="640080" y="5349240"/>
-            <a:ext cx="10881360" cy="640080"/>
+      <p:sp>
+        <p:nvSpPr>
+          <p:cNvPr id="4" name="Shape 2"/>
+          <p:cNvSpPr/>
+          <p:nvPr/>
+        </p:nvSpPr>
+        <p:spPr>
+          <a:xfrm>
+            <a:off x="640080" y="1783080"/>
+            <a:ext cx="2560320" cy="1737360"/>
+          </a:xfrm>
+          <a:prstGeom prst="roundRect">
+            <a:avLst>
+              <a:gd name="adj" fmla="val 4211"/>
+            </a:avLst>
+          </a:prstGeom>
+          <a:solidFill>
+            <a:srgbClr val="141B26"/>
+          </a:solidFill>
+          <a:ln w="12700">
+            <a:solidFill>
+              <a:srgbClr val="2B3849"/>
+            </a:solidFill>
+            <a:prstDash val="solid"/>
+          </a:ln>
+        </p:spPr>
+      </p:sp>
+      <p:sp>
+        <p:nvSpPr>
+          <p:cNvPr id="5" name="Text 3"/>
+          <p:cNvSpPr/>
+          <p:nvPr/>
+        </p:nvSpPr>
+        <p:spPr>
+          <a:xfrm>
+            <a:off x="640080" y="1984248"/>
+            <a:ext cx="2560320" cy="777240"/>
+          </a:xfrm>
+          <a:prstGeom prst="rect">
+            <a:avLst/>
+          </a:prstGeom>
+          <a:noFill/>
+          <a:ln/>
+        </p:spPr>
+        <p:txBody>
+          <a:bodyPr wrap="square" rtlCol="0" anchor="ctr"/>
+          <a:lstStyle/>
+          <a:p>
+            <a:pPr algn="ctr" indent="0" marL="0">
+              <a:buNone/>
+            </a:pPr>
+            <a:r>
+              <a:rPr lang="en-US" sz="3400" b="1" dirty="0">
+                <a:solidFill>
+                  <a:srgbClr val="45BD8A"/>
+                </a:solidFill>
+                <a:latin typeface="Verdana" pitchFamily="34" charset="0"/>
+                <a:ea typeface="Verdana" pitchFamily="34" charset="-122"/>
+                <a:cs typeface="Verdana" pitchFamily="34" charset="-120"/>
+              </a:rPr>
+              <a:t>91,3%</a:t>
+            </a:r>
+            <a:endParaRPr lang="en-US" sz="3400" dirty="0"/>
+          </a:p>
+        </p:txBody>
+      </p:sp>
+      <p:sp>
+        <p:nvSpPr>
+          <p:cNvPr id="6" name="Text 4"/>
+          <p:cNvSpPr/>
+          <p:nvPr/>
+        </p:nvSpPr>
+        <p:spPr>
+          <a:xfrm>
+            <a:off x="777240" y="2770632"/>
+            <a:ext cx="2286000" cy="640080"/>
+          </a:xfrm>
+          <a:prstGeom prst="rect">
+            <a:avLst/>
+          </a:prstGeom>
+          <a:noFill/>
+          <a:ln/>
+        </p:spPr>
+        <p:txBody>
+          <a:bodyPr wrap="square" rtlCol="0" anchor="ctr"/>
+          <a:lstStyle/>
+          <a:p>
+            <a:pPr algn="ctr" indent="0" marL="0">
+              <a:buNone/>
+            </a:pPr>
+            <a:r>
+              <a:rPr lang="en-US" sz="1100" dirty="0">
+                <a:solidFill>
+                  <a:srgbClr val="9FADBE"/>
+                </a:solidFill>
+                <a:latin typeface="Verdana" pitchFamily="34" charset="0"/>
+                <a:ea typeface="Verdana" pitchFamily="34" charset="-122"/>
+                <a:cs typeface="Verdana" pitchFamily="34" charset="-120"/>
+              </a:rPr>
+              <a:t>das perguntas respondíveis foram respondidas</a:t>
+            </a:r>
+            <a:endParaRPr lang="en-US" sz="1100" dirty="0"/>
+          </a:p>
+        </p:txBody>
+      </p:sp>
+      <p:sp>
+        <p:nvSpPr>
+          <p:cNvPr id="7" name="Shape 5"/>
+          <p:cNvSpPr/>
+          <p:nvPr/>
+        </p:nvSpPr>
+        <p:spPr>
+          <a:xfrm>
+            <a:off x="3429000" y="1783080"/>
+            <a:ext cx="2560320" cy="1737360"/>
+          </a:xfrm>
+          <a:prstGeom prst="roundRect">
+            <a:avLst>
+              <a:gd name="adj" fmla="val 4211"/>
+            </a:avLst>
+          </a:prstGeom>
+          <a:solidFill>
+            <a:srgbClr val="141B26"/>
+          </a:solidFill>
+          <a:ln w="12700">
+            <a:solidFill>
+              <a:srgbClr val="2B3849"/>
+            </a:solidFill>
+            <a:prstDash val="solid"/>
+          </a:ln>
+        </p:spPr>
+      </p:sp>
+      <p:sp>
+        <p:nvSpPr>
+          <p:cNvPr id="8" name="Text 6"/>
+          <p:cNvSpPr/>
+          <p:nvPr/>
+        </p:nvSpPr>
+        <p:spPr>
+          <a:xfrm>
+            <a:off x="3429000" y="1984248"/>
+            <a:ext cx="2560320" cy="777240"/>
+          </a:xfrm>
+          <a:prstGeom prst="rect">
+            <a:avLst/>
+          </a:prstGeom>
+          <a:noFill/>
+          <a:ln/>
+        </p:spPr>
+        <p:txBody>
+          <a:bodyPr wrap="square" rtlCol="0" anchor="ctr"/>
+          <a:lstStyle/>
+          <a:p>
+            <a:pPr algn="ctr" indent="0" marL="0">
+              <a:buNone/>
+            </a:pPr>
+            <a:r>
+              <a:rPr lang="en-US" sz="3400" b="1" dirty="0">
+                <a:solidFill>
+                  <a:srgbClr val="45BD8A"/>
+                </a:solidFill>
+                <a:latin typeface="Verdana" pitchFamily="34" charset="0"/>
+                <a:ea typeface="Verdana" pitchFamily="34" charset="-122"/>
+                <a:cs typeface="Verdana" pitchFamily="34" charset="-120"/>
+              </a:rPr>
+              <a:t>75,0%</a:t>
+            </a:r>
+            <a:endParaRPr lang="en-US" sz="3400" dirty="0"/>
+          </a:p>
+        </p:txBody>
+      </p:sp>
+      <p:sp>
+        <p:nvSpPr>
+          <p:cNvPr id="9" name="Text 7"/>
+          <p:cNvSpPr/>
+          <p:nvPr/>
+        </p:nvSpPr>
+        <p:spPr>
+          <a:xfrm>
+            <a:off x="3566160" y="2770632"/>
+            <a:ext cx="2286000" cy="640080"/>
+          </a:xfrm>
+          <a:prstGeom prst="rect">
+            <a:avLst/>
+          </a:prstGeom>
+          <a:noFill/>
+          <a:ln/>
+        </p:spPr>
+        <p:txBody>
+          <a:bodyPr wrap="square" rtlCol="0" anchor="ctr"/>
+          <a:lstStyle/>
+          <a:p>
+            <a:pPr algn="ctr" indent="0" marL="0">
+              <a:buNone/>
+            </a:pPr>
+            <a:r>
+              <a:rPr lang="en-US" sz="1100" dirty="0">
+                <a:solidFill>
+                  <a:srgbClr val="9FADBE"/>
+                </a:solidFill>
+                <a:latin typeface="Verdana" pitchFamily="34" charset="0"/>
+                <a:ea typeface="Verdana" pitchFamily="34" charset="-122"/>
+                <a:cs typeface="Verdana" pitchFamily="34" charset="-120"/>
+              </a:rPr>
+              <a:t>das perguntas fora do material foram recusadas</a:t>
+            </a:r>
+            <a:endParaRPr lang="en-US" sz="1100" dirty="0"/>
+          </a:p>
+        </p:txBody>
+      </p:sp>
+      <p:sp>
+        <p:nvSpPr>
+          <p:cNvPr id="10" name="Shape 8"/>
+          <p:cNvSpPr/>
+          <p:nvPr/>
+        </p:nvSpPr>
+        <p:spPr>
+          <a:xfrm>
+            <a:off x="6217920" y="1783080"/>
+            <a:ext cx="2560320" cy="1737360"/>
+          </a:xfrm>
+          <a:prstGeom prst="roundRect">
+            <a:avLst>
+              <a:gd name="adj" fmla="val 4211"/>
+            </a:avLst>
+          </a:prstGeom>
+          <a:solidFill>
+            <a:srgbClr val="141B26"/>
+          </a:solidFill>
+          <a:ln w="12700">
+            <a:solidFill>
+              <a:srgbClr val="2B3849"/>
+            </a:solidFill>
+            <a:prstDash val="solid"/>
+          </a:ln>
+        </p:spPr>
+      </p:sp>
+      <p:sp>
+        <p:nvSpPr>
+          <p:cNvPr id="11" name="Text 9"/>
+          <p:cNvSpPr/>
+          <p:nvPr/>
+        </p:nvSpPr>
+        <p:spPr>
+          <a:xfrm>
+            <a:off x="6217920" y="1984248"/>
+            <a:ext cx="2560320" cy="777240"/>
+          </a:xfrm>
+          <a:prstGeom prst="rect">
+            <a:avLst/>
+          </a:prstGeom>
+          <a:noFill/>
+          <a:ln/>
+        </p:spPr>
+        <p:txBody>
+          <a:bodyPr wrap="square" rtlCol="0" anchor="ctr"/>
+          <a:lstStyle/>
+          <a:p>
+            <a:pPr algn="ctr" indent="0" marL="0">
+              <a:buNone/>
+            </a:pPr>
+            <a:r>
+              <a:rPr lang="en-US" sz="3400" b="1" dirty="0">
+                <a:solidFill>
+                  <a:srgbClr val="45BD8A"/>
+                </a:solidFill>
+                <a:latin typeface="Verdana" pitchFamily="34" charset="0"/>
+                <a:ea typeface="Verdana" pitchFamily="34" charset="-122"/>
+                <a:cs typeface="Verdana" pitchFamily="34" charset="-120"/>
+              </a:rPr>
+              <a:t>0</a:t>
+            </a:r>
+            <a:endParaRPr lang="en-US" sz="3400" dirty="0"/>
+          </a:p>
+        </p:txBody>
+      </p:sp>
+      <p:sp>
+        <p:nvSpPr>
+          <p:cNvPr id="12" name="Text 10"/>
+          <p:cNvSpPr/>
+          <p:nvPr/>
+        </p:nvSpPr>
+        <p:spPr>
+          <a:xfrm>
+            <a:off x="6355080" y="2770632"/>
+            <a:ext cx="2286000" cy="640080"/>
+          </a:xfrm>
+          <a:prstGeom prst="rect">
+            <a:avLst/>
+          </a:prstGeom>
+          <a:noFill/>
+          <a:ln/>
+        </p:spPr>
+        <p:txBody>
+          <a:bodyPr wrap="square" rtlCol="0" anchor="ctr"/>
+          <a:lstStyle/>
+          <a:p>
+            <a:pPr algn="ctr" indent="0" marL="0">
+              <a:buNone/>
+            </a:pPr>
+            <a:r>
+              <a:rPr lang="en-US" sz="1100" dirty="0">
+                <a:solidFill>
+                  <a:srgbClr val="9FADBE"/>
+                </a:solidFill>
+                <a:latin typeface="Verdana" pitchFamily="34" charset="0"/>
+                <a:ea typeface="Verdana" pitchFamily="34" charset="-122"/>
+                <a:cs typeface="Verdana" pitchFamily="34" charset="-120"/>
+              </a:rPr>
+              <a:t>inversões de faixa em 26.460 comparações</a:t>
+            </a:r>
+            <a:endParaRPr lang="en-US" sz="1100" dirty="0"/>
+          </a:p>
+        </p:txBody>
+      </p:sp>
+      <p:sp>
+        <p:nvSpPr>
+          <p:cNvPr id="13" name="Shape 11"/>
+          <p:cNvSpPr/>
+          <p:nvPr/>
+        </p:nvSpPr>
+        <p:spPr>
+          <a:xfrm>
+            <a:off x="9006840" y="1783080"/>
+            <a:ext cx="2560320" cy="1737360"/>
+          </a:xfrm>
+          <a:prstGeom prst="roundRect">
+            <a:avLst>
+              <a:gd name="adj" fmla="val 4211"/>
+            </a:avLst>
+          </a:prstGeom>
+          <a:solidFill>
+            <a:srgbClr val="141B26"/>
+          </a:solidFill>
+          <a:ln w="12700">
+            <a:solidFill>
+              <a:srgbClr val="2B3849"/>
+            </a:solidFill>
+            <a:prstDash val="solid"/>
+          </a:ln>
+        </p:spPr>
+      </p:sp>
+      <p:sp>
+        <p:nvSpPr>
+          <p:cNvPr id="14" name="Text 12"/>
+          <p:cNvSpPr/>
+          <p:nvPr/>
+        </p:nvSpPr>
+        <p:spPr>
+          <a:xfrm>
+            <a:off x="9006840" y="1984248"/>
+            <a:ext cx="2560320" cy="777240"/>
+          </a:xfrm>
+          <a:prstGeom prst="rect">
+            <a:avLst/>
+          </a:prstGeom>
+          <a:noFill/>
+          <a:ln/>
+        </p:spPr>
+        <p:txBody>
+          <a:bodyPr wrap="square" rtlCol="0" anchor="ctr"/>
+          <a:lstStyle/>
+          <a:p>
+            <a:pPr algn="ctr" indent="0" marL="0">
+              <a:buNone/>
+            </a:pPr>
+            <a:r>
+              <a:rPr lang="en-US" sz="3400" b="1" dirty="0">
+                <a:solidFill>
+                  <a:srgbClr val="45BD8A"/>
+                </a:solidFill>
+                <a:latin typeface="Verdana" pitchFamily="34" charset="0"/>
+                <a:ea typeface="Verdana" pitchFamily="34" charset="-122"/>
+                <a:cs typeface="Verdana" pitchFamily="34" charset="-120"/>
+              </a:rPr>
+              <a:t>21/21</a:t>
+            </a:r>
+            <a:endParaRPr lang="en-US" sz="3400" dirty="0"/>
+          </a:p>
+        </p:txBody>
+      </p:sp>
+      <p:sp>
+        <p:nvSpPr>
+          <p:cNvPr id="15" name="Text 13"/>
+          <p:cNvSpPr/>
+          <p:nvPr/>
+        </p:nvSpPr>
+        <p:spPr>
+          <a:xfrm>
+            <a:off x="9144000" y="2770632"/>
+            <a:ext cx="2286000" cy="640080"/>
+          </a:xfrm>
+          <a:prstGeom prst="rect">
+            <a:avLst/>
+          </a:prstGeom>
+          <a:noFill/>
+          <a:ln/>
+        </p:spPr>
+        <p:txBody>
+          <a:bodyPr wrap="square" rtlCol="0" anchor="ctr"/>
+          <a:lstStyle/>
+          <a:p>
+            <a:pPr algn="ctr" indent="0" marL="0">
+              <a:buNone/>
+            </a:pPr>
+            <a:r>
+              <a:rPr lang="en-US" sz="1100" dirty="0">
+                <a:solidFill>
+                  <a:srgbClr val="9FADBE"/>
+                </a:solidFill>
+                <a:latin typeface="Verdana" pitchFamily="34" charset="0"/>
+                <a:ea typeface="Verdana" pitchFamily="34" charset="-122"/>
+                <a:cs typeface="Verdana" pitchFamily="34" charset="-120"/>
+              </a:rPr>
+              <a:t>casos da bateria adversarial de barreiras</a:t>
+            </a:r>
+            <a:endParaRPr lang="en-US" sz="1100" dirty="0"/>
+          </a:p>
+        </p:txBody>
+      </p:sp>
+      <p:sp>
+        <p:nvSpPr>
+          <p:cNvPr id="16" name="Shape 14"/>
+          <p:cNvSpPr/>
+          <p:nvPr/>
+        </p:nvSpPr>
+        <p:spPr>
+          <a:xfrm>
+            <a:off x="640080" y="3840480"/>
+            <a:ext cx="10881360" cy="1920240"/>
+          </a:xfrm>
+          <a:prstGeom prst="roundRect">
+            <a:avLst>
+              <a:gd name="adj" fmla="val 3810"/>
+            </a:avLst>
+          </a:prstGeom>
+          <a:solidFill>
+            <a:srgbClr val="141B26"/>
+          </a:solidFill>
+          <a:ln w="12700">
+            <a:solidFill>
+              <a:srgbClr val="2B3849"/>
+            </a:solidFill>
+            <a:prstDash val="solid"/>
+          </a:ln>
+        </p:spPr>
+      </p:sp>
+      <p:sp>
+        <p:nvSpPr>
+          <p:cNvPr id="17" name="Text 15"/>
+          <p:cNvSpPr/>
+          <p:nvPr/>
+        </p:nvSpPr>
+        <p:spPr>
+          <a:xfrm>
+            <a:off x="914400" y="4023360"/>
+            <a:ext cx="10058400" cy="365760"/>
+          </a:xfrm>
+          <a:prstGeom prst="rect">
+            <a:avLst/>
+          </a:prstGeom>
+          <a:noFill/>
+          <a:ln/>
+        </p:spPr>
+        <p:txBody>
+          <a:bodyPr wrap="square" rtlCol="0" anchor="ctr"/>
+          <a:lstStyle/>
+          <a:p>
+            <a:pPr indent="0" marL="0">
+              <a:buNone/>
+            </a:pPr>
+            <a:r>
+              <a:rPr lang="en-US" sz="1600" b="1" dirty="0">
+                <a:solidFill>
+                  <a:srgbClr val="FFFFFF"/>
+                </a:solidFill>
+                <a:latin typeface="Verdana" pitchFamily="34" charset="0"/>
+                <a:ea typeface="Verdana" pitchFamily="34" charset="-122"/>
+                <a:cs typeface="Verdana" pitchFamily="34" charset="-120"/>
+              </a:rPr>
+              <a:t>O risco que não conseguimos eliminar</a:t>
+            </a:r>
+            <a:endParaRPr lang="en-US" sz="1600" dirty="0"/>
+          </a:p>
+        </p:txBody>
+      </p:sp>
+      <p:sp>
+        <p:nvSpPr>
+          <p:cNvPr id="18" name="Text 16"/>
+          <p:cNvSpPr/>
+          <p:nvPr/>
+        </p:nvSpPr>
+        <p:spPr>
+          <a:xfrm>
+            <a:off x="914400" y="4434840"/>
+            <a:ext cx="10332720" cy="1188720"/>
           </a:xfrm>
           <a:prstGeom prst="rect">
             <a:avLst/>
@@ -11315,21 +12004,50 @@
             <a:r>
               <a:rPr lang="en-US" sz="1250" dirty="0">
                 <a:solidFill>
-                  <a:srgbClr val="E6EAEF"/>
-                </a:solidFill>
-                <a:latin typeface="Verdana" pitchFamily="34" charset="0"/>
-                <a:ea typeface="Verdana" pitchFamily="34" charset="-122"/>
-                <a:cs typeface="Verdana" pitchFamily="34" charset="-120"/>
-              </a:rPr>
-              <a:t>A limitação do Dify foi o que nos levou ao código próprio: o limiar é o parâmetro que decide entre responder e admitir ignorância, e é o mais importante do sistema para o nosso objetivo.</a:t>
+                  <a:srgbClr val="9FADBE"/>
+                </a:solidFill>
+                <a:latin typeface="Verdana" pitchFamily="34" charset="0"/>
+                <a:ea typeface="Verdana" pitchFamily="34" charset="-122"/>
+                <a:cs typeface="Verdana" pitchFamily="34" charset="-120"/>
+              </a:rPr>
+              <a:t>O maior risco deste sistema não é inventar uma data. É repetir com confiança a data certa de uma ementa do semestre passado. O RAG resolve alucinação, não desatualização.</a:t>
             </a:r>
             <a:endParaRPr lang="en-US" sz="1250" dirty="0"/>
           </a:p>
-        </p:txBody>
-      </p:sp>
-      <p:sp>
-        <p:nvSpPr>
-          <p:cNvPr id="6" name="Text 3"/>
+          <a:p>
+            <a:pPr indent="0" marL="0">
+              <a:lnSpc>
+                <a:spcPct val="120000"/>
+              </a:lnSpc>
+              <a:buNone/>
+            </a:pPr>
+            <a:endParaRPr lang="en-US" sz="1250" dirty="0"/>
+          </a:p>
+          <a:p>
+            <a:pPr indent="0" marL="0">
+              <a:lnSpc>
+                <a:spcPct val="120000"/>
+              </a:lnSpc>
+              <a:buNone/>
+            </a:pPr>
+            <a:r>
+              <a:rPr lang="en-US" sz="1250" dirty="0">
+                <a:solidFill>
+                  <a:srgbClr val="9FADBE"/>
+                </a:solidFill>
+                <a:latin typeface="Verdana" pitchFamily="34" charset="0"/>
+                <a:ea typeface="Verdana" pitchFamily="34" charset="-122"/>
+                <a:cs typeface="Verdana" pitchFamily="34" charset="-120"/>
+              </a:rPr>
+              <a:t>A mitigação é parcial: todo documento carrega uma referência de data que aparece em toda citação. Uma solução real exigiria integração com o sistema acadêmico.</a:t>
+            </a:r>
+            <a:endParaRPr lang="en-US" sz="1250" dirty="0"/>
+          </a:p>
+        </p:txBody>
+      </p:sp>
+      <p:sp>
+        <p:nvSpPr>
+          <p:cNvPr id="19" name="Text 17"/>
           <p:cNvSpPr/>
           <p:nvPr/>
         </p:nvSpPr>
@@ -11368,7 +12086,7 @@
       </p:sp>
       <p:sp>
         <p:nvSpPr>
-          <p:cNvPr id="7" name="Text 4"/>
+          <p:cNvPr id="20" name="Text 18"/>
           <p:cNvSpPr/>
           <p:nvPr/>
         </p:nvSpPr>

--- a/PermaneIA-Apresentacao.pptx
+++ b/PermaneIA-Apresentacao.pptx
@@ -10961,7 +10961,7 @@
                 <a:ea typeface="Verdana" pitchFamily="34" charset="-122"/>
                 <a:cs typeface="Verdana" pitchFamily="34" charset="-120"/>
               </a:rPr>
-              <a:t>Mais dois, e os piores: os que pareciam funcionar</a:t>
+              <a:t>Mais três, e os piores: os que pareciam funcionar</a:t>
             </a:r>
             <a:endParaRPr lang="en-US" sz="2800" dirty="0"/>
           </a:p>
@@ -10975,12 +10975,12 @@
         </p:nvSpPr>
         <p:spPr>
           <a:xfrm>
-            <a:off x="640080" y="2011680"/>
-            <a:ext cx="10881360" cy="1645920"/>
+            <a:off x="640080" y="1828800"/>
+            <a:ext cx="10881360" cy="1371600"/>
           </a:xfrm>
           <a:prstGeom prst="roundRect">
             <a:avLst>
-              <a:gd name="adj" fmla="val 4444"/>
+              <a:gd name="adj" fmla="val 5333"/>
             </a:avLst>
           </a:prstGeom>
           <a:solidFill>
@@ -11002,7 +11002,7 @@
         </p:nvSpPr>
         <p:spPr>
           <a:xfrm>
-            <a:off x="914400" y="2194560"/>
+            <a:off x="914400" y="1965960"/>
             <a:ext cx="4206240" cy="320040"/>
           </a:xfrm>
           <a:prstGeom prst="rect">
@@ -11019,7 +11019,7 @@
               <a:buNone/>
             </a:pPr>
             <a:r>
-              <a:rPr lang="en-US" sz="1500" b="1" dirty="0">
+              <a:rPr lang="en-US" sz="1400" b="1" dirty="0">
                 <a:solidFill>
                   <a:srgbClr val="FFFFFF"/>
                 </a:solidFill>
@@ -11029,7 +11029,7 @@
               </a:rPr>
               <a:t>Enumeração com um item só</a:t>
             </a:r>
-            <a:endParaRPr lang="en-US" sz="1500" dirty="0"/>
+            <a:endParaRPr lang="en-US" sz="1400" dirty="0"/>
           </a:p>
         </p:txBody>
       </p:sp>
@@ -11041,7 +11041,7 @@
         </p:nvSpPr>
         <p:spPr>
           <a:xfrm>
-            <a:off x="914400" y="2633472"/>
+            <a:off x="914400" y="2359152"/>
             <a:ext cx="4206240" cy="320040"/>
           </a:xfrm>
           <a:prstGeom prst="rect">
@@ -11058,7 +11058,7 @@
               <a:buNone/>
             </a:pPr>
             <a:r>
-              <a:rPr lang="en-US" sz="1250" b="1" dirty="0">
+              <a:rPr lang="en-US" sz="1200" b="1" dirty="0">
                 <a:solidFill>
                   <a:srgbClr val="E2703A"/>
                 </a:solidFill>
@@ -11068,7 +11068,7 @@
               </a:rPr>
               <a:t>Cobertura 78% → 91%</a:t>
             </a:r>
-            <a:endParaRPr lang="en-US" sz="1250" dirty="0"/>
+            <a:endParaRPr lang="en-US" sz="1200" dirty="0"/>
           </a:p>
         </p:txBody>
       </p:sp>
@@ -11080,8 +11080,8 @@
         </p:nvSpPr>
         <p:spPr>
           <a:xfrm>
-            <a:off x="5303520" y="2212848"/>
-            <a:ext cx="6035040" cy="1234440"/>
+            <a:off x="5303520" y="1993392"/>
+            <a:ext cx="6035040" cy="1005840"/>
           </a:xfrm>
           <a:prstGeom prst="rect">
             <a:avLst/>
@@ -11100,7 +11100,7 @@
               <a:buNone/>
             </a:pPr>
             <a:r>
-              <a:rPr lang="en-US" sz="1200" dirty="0">
+              <a:rPr lang="en-US" sz="1150" dirty="0">
                 <a:solidFill>
                   <a:srgbClr val="9FADBE"/>
                 </a:solidFill>
@@ -11110,7 +11110,7 @@
               </a:rPr>
               <a:t>"Qual é o conteúdo das aulas?" devolvia a primeira aula do semestre, citada e correta. Similaridade alta, fonte apontada, metade da resposta faltando, e nada sinalizando isso.</a:t>
             </a:r>
-            <a:endParaRPr lang="en-US" sz="1200" dirty="0"/>
+            <a:endParaRPr lang="en-US" sz="1150" dirty="0"/>
           </a:p>
         </p:txBody>
       </p:sp>
@@ -11122,12 +11122,12 @@
         </p:nvSpPr>
         <p:spPr>
           <a:xfrm>
-            <a:off x="640080" y="3840480"/>
-            <a:ext cx="10881360" cy="1645920"/>
+            <a:off x="640080" y="3310128"/>
+            <a:ext cx="10881360" cy="1371600"/>
           </a:xfrm>
           <a:prstGeom prst="roundRect">
             <a:avLst>
-              <a:gd name="adj" fmla="val 4444"/>
+              <a:gd name="adj" fmla="val 5333"/>
             </a:avLst>
           </a:prstGeom>
           <a:solidFill>
@@ -11149,7 +11149,7 @@
         </p:nvSpPr>
         <p:spPr>
           <a:xfrm>
-            <a:off x="914400" y="4023360"/>
+            <a:off x="914400" y="3447288"/>
             <a:ext cx="4206240" cy="320040"/>
           </a:xfrm>
           <a:prstGeom prst="rect">
@@ -11166,7 +11166,7 @@
               <a:buNone/>
             </a:pPr>
             <a:r>
-              <a:rPr lang="en-US" sz="1500" b="1" dirty="0">
+              <a:rPr lang="en-US" sz="1400" b="1" dirty="0">
                 <a:solidFill>
                   <a:srgbClr val="FFFFFF"/>
                 </a:solidFill>
@@ -11176,7 +11176,7 @@
               </a:rPr>
               <a:t>A régua medindo errado</a:t>
             </a:r>
-            <a:endParaRPr lang="en-US" sz="1500" dirty="0"/>
+            <a:endParaRPr lang="en-US" sz="1400" dirty="0"/>
           </a:p>
         </p:txBody>
       </p:sp>
@@ -11188,7 +11188,7 @@
         </p:nvSpPr>
         <p:spPr>
           <a:xfrm>
-            <a:off x="914400" y="4462272"/>
+            <a:off x="914400" y="3840480"/>
             <a:ext cx="4206240" cy="320040"/>
           </a:xfrm>
           <a:prstGeom prst="rect">
@@ -11205,7 +11205,7 @@
               <a:buNone/>
             </a:pPr>
             <a:r>
-              <a:rPr lang="en-US" sz="1250" b="1" dirty="0">
+              <a:rPr lang="en-US" sz="1200" b="1" dirty="0">
                 <a:solidFill>
                   <a:srgbClr val="E2703A"/>
                 </a:solidFill>
@@ -11215,7 +11215,7 @@
               </a:rPr>
               <a:t>Recusa 0/8 → 6/8</a:t>
             </a:r>
-            <a:endParaRPr lang="en-US" sz="1250" dirty="0"/>
+            <a:endParaRPr lang="en-US" sz="1200" dirty="0"/>
           </a:p>
         </p:txBody>
       </p:sp>
@@ -11227,8 +11227,8 @@
         </p:nvSpPr>
         <p:spPr>
           <a:xfrm>
-            <a:off x="5303520" y="4041648"/>
-            <a:ext cx="6035040" cy="1234440"/>
+            <a:off x="5303520" y="3474720"/>
+            <a:ext cx="6035040" cy="1005840"/>
           </a:xfrm>
           <a:prstGeom prst="rect">
             <a:avLst/>
@@ -11247,7 +11247,7 @@
               <a:buNone/>
             </a:pPr>
             <a:r>
-              <a:rPr lang="en-US" sz="1200" dirty="0">
+              <a:rPr lang="en-US" sz="1150" dirty="0">
                 <a:solidFill>
                   <a:srgbClr val="9FADBE"/>
                 </a:solidFill>
@@ -11257,19 +11257,166 @@
               </a:rPr>
               <a:t>A bateria de avaliação aplicava o limiar do modo local (0,15) também ao modo generativo, cujo limiar é 0,65. A métrica media o que a ferramenta fazia, não o que o sistema fazia.</a:t>
             </a:r>
+            <a:endParaRPr lang="en-US" sz="1150" dirty="0"/>
+          </a:p>
+        </p:txBody>
+      </p:sp>
+      <p:sp>
+        <p:nvSpPr>
+          <p:cNvPr id="12" name="Shape 10"/>
+          <p:cNvSpPr/>
+          <p:nvPr/>
+        </p:nvSpPr>
+        <p:spPr>
+          <a:xfrm>
+            <a:off x="640080" y="4791456"/>
+            <a:ext cx="10881360" cy="1371600"/>
+          </a:xfrm>
+          <a:prstGeom prst="roundRect">
+            <a:avLst>
+              <a:gd name="adj" fmla="val 5333"/>
+            </a:avLst>
+          </a:prstGeom>
+          <a:solidFill>
+            <a:srgbClr val="141B26"/>
+          </a:solidFill>
+          <a:ln w="12700">
+            <a:solidFill>
+              <a:srgbClr val="2B3849"/>
+            </a:solidFill>
+            <a:prstDash val="solid"/>
+          </a:ln>
+        </p:spPr>
+      </p:sp>
+      <p:sp>
+        <p:nvSpPr>
+          <p:cNvPr id="13" name="Text 11"/>
+          <p:cNvSpPr/>
+          <p:nvPr/>
+        </p:nvSpPr>
+        <p:spPr>
+          <a:xfrm>
+            <a:off x="914400" y="4928616"/>
+            <a:ext cx="4206240" cy="320040"/>
+          </a:xfrm>
+          <a:prstGeom prst="rect">
+            <a:avLst/>
+          </a:prstGeom>
+          <a:noFill/>
+          <a:ln/>
+        </p:spPr>
+        <p:txBody>
+          <a:bodyPr wrap="square" rtlCol="0" anchor="ctr"/>
+          <a:lstStyle/>
+          <a:p>
+            <a:pPr indent="0" marL="0">
+              <a:buNone/>
+            </a:pPr>
+            <a:r>
+              <a:rPr lang="en-US" sz="1400" b="1" dirty="0">
+                <a:solidFill>
+                  <a:srgbClr val="FFFFFF"/>
+                </a:solidFill>
+                <a:latin typeface="Verdana" pitchFamily="34" charset="0"/>
+                <a:ea typeface="Verdana" pitchFamily="34" charset="-122"/>
+                <a:cs typeface="Verdana" pitchFamily="34" charset="-120"/>
+              </a:rPr>
+              <a:t>Pergunta curta, recusa errada</a:t>
+            </a:r>
+            <a:endParaRPr lang="en-US" sz="1400" dirty="0"/>
+          </a:p>
+        </p:txBody>
+      </p:sp>
+      <p:sp>
+        <p:nvSpPr>
+          <p:cNvPr id="14" name="Text 12"/>
+          <p:cNvSpPr/>
+          <p:nvPr/>
+        </p:nvSpPr>
+        <p:spPr>
+          <a:xfrm>
+            <a:off x="914400" y="5321808"/>
+            <a:ext cx="4206240" cy="320040"/>
+          </a:xfrm>
+          <a:prstGeom prst="rect">
+            <a:avLst/>
+          </a:prstGeom>
+          <a:noFill/>
+          <a:ln/>
+        </p:spPr>
+        <p:txBody>
+          <a:bodyPr wrap="square" rtlCol="0" anchor="ctr"/>
+          <a:lstStyle/>
+          <a:p>
+            <a:pPr indent="0" marL="0">
+              <a:buNone/>
+            </a:pPr>
+            <a:r>
+              <a:rPr lang="en-US" sz="1200" b="1" dirty="0">
+                <a:solidFill>
+                  <a:srgbClr val="E2703A"/>
+                </a:solidFill>
+                <a:latin typeface="Verdana" pitchFamily="34" charset="0"/>
+                <a:ea typeface="Verdana" pitchFamily="34" charset="-122"/>
+                <a:cs typeface="Verdana" pitchFamily="34" charset="-120"/>
+              </a:rPr>
+              <a:t>Cobertura 89% → 100%</a:t>
+            </a:r>
             <a:endParaRPr lang="en-US" sz="1200" dirty="0"/>
           </a:p>
         </p:txBody>
       </p:sp>
       <p:sp>
         <p:nvSpPr>
-          <p:cNvPr id="12" name="Text 10"/>
-          <p:cNvSpPr/>
-          <p:nvPr/>
-        </p:nvSpPr>
-        <p:spPr>
-          <a:xfrm>
-            <a:off x="640080" y="5943600"/>
+          <p:cNvPr id="15" name="Text 13"/>
+          <p:cNvSpPr/>
+          <p:nvPr/>
+        </p:nvSpPr>
+        <p:spPr>
+          <a:xfrm>
+            <a:off x="5303520" y="4956048"/>
+            <a:ext cx="6035040" cy="1005840"/>
+          </a:xfrm>
+          <a:prstGeom prst="rect">
+            <a:avLst/>
+          </a:prstGeom>
+          <a:noFill/>
+          <a:ln/>
+        </p:spPr>
+        <p:txBody>
+          <a:bodyPr wrap="square" rtlCol="0" anchor="ctr"/>
+          <a:lstStyle/>
+          <a:p>
+            <a:pPr indent="0" marL="0">
+              <a:lnSpc>
+                <a:spcPct val="115000"/>
+              </a:lnSpc>
+              <a:buNone/>
+            </a:pPr>
+            <a:r>
+              <a:rPr lang="en-US" sz="1150" dirty="0">
+                <a:solidFill>
+                  <a:srgbClr val="9FADBE"/>
+                </a:solidFill>
+                <a:latin typeface="Verdana" pitchFamily="34" charset="0"/>
+                <a:ea typeface="Verdana" pitchFamily="34" charset="-122"/>
+                <a:cs typeface="Verdana" pitchFamily="34" charset="-120"/>
+              </a:rPr>
+              <a:t>"Quando é a Prova P1?" respondia; "quando vai ser a prova" recusava, com a mesma similaridade. O registro de consultas mostrou o par. A busca ganhou um segundo braço, por casamento de termos.</a:t>
+            </a:r>
+            <a:endParaRPr lang="en-US" sz="1150" dirty="0"/>
+          </a:p>
+        </p:txBody>
+      </p:sp>
+      <p:sp>
+        <p:nvSpPr>
+          <p:cNvPr id="16" name="Text 14"/>
+          <p:cNvSpPr/>
+          <p:nvPr/>
+        </p:nvSpPr>
+        <p:spPr>
+          <a:xfrm>
+            <a:off x="640080" y="6309360"/>
             <a:ext cx="10972800" cy="320040"/>
           </a:xfrm>
           <a:prstGeom prst="rect">
@@ -11286,7 +11433,7 @@
               <a:buNone/>
             </a:pPr>
             <a:r>
-              <a:rPr lang="en-US" sz="1300" b="1" dirty="0">
+              <a:rPr lang="en-US" sz="1200" b="1" dirty="0">
                 <a:solidFill>
                   <a:srgbClr val="E6EAEF"/>
                 </a:solidFill>
@@ -11294,15 +11441,15 @@
                 <a:ea typeface="Verdana" pitchFamily="34" charset="-122"/>
                 <a:cs typeface="Verdana" pitchFamily="34" charset="-120"/>
               </a:rPr>
-              <a:t>Uma métrica que ninguém audita mede o que a ferramenta faz, e não o que o sistema faz.</a:t>
-            </a:r>
-            <a:endParaRPr lang="en-US" sz="1300" dirty="0"/>
-          </a:p>
-        </p:txBody>
-      </p:sp>
-      <p:sp>
-        <p:nvSpPr>
-          <p:cNvPr id="13" name="Text 11"/>
+              <a:t>Os dois primeiros a medição revelou. O terceiro só o uso revelou, e quem o encontrou foi o registro de perguntas.</a:t>
+            </a:r>
+            <a:endParaRPr lang="en-US" sz="1200" dirty="0"/>
+          </a:p>
+        </p:txBody>
+      </p:sp>
+      <p:sp>
+        <p:nvSpPr>
+          <p:cNvPr id="17" name="Text 15"/>
           <p:cNvSpPr/>
           <p:nvPr/>
         </p:nvSpPr>
@@ -11341,7 +11488,7 @@
       </p:sp>
       <p:sp>
         <p:nvSpPr>
-          <p:cNvPr id="14" name="Text 12"/>
+          <p:cNvPr id="18" name="Text 16"/>
           <p:cNvSpPr/>
           <p:nvPr/>
         </p:nvSpPr>
@@ -11548,7 +11695,7 @@
                 <a:ea typeface="Verdana" pitchFamily="34" charset="-122"/>
                 <a:cs typeface="Verdana" pitchFamily="34" charset="-120"/>
               </a:rPr>
-              <a:t>91,3%</a:t>
+              <a:t>100%</a:t>
             </a:r>
             <a:endParaRPr lang="en-US" sz="3400" dirty="0"/>
           </a:p>
@@ -11587,7 +11734,7 @@
                 <a:ea typeface="Verdana" pitchFamily="34" charset="-122"/>
                 <a:cs typeface="Verdana" pitchFamily="34" charset="-120"/>
               </a:rPr>
-              <a:t>das perguntas respondíveis foram respondidas</a:t>
+              <a:t>das 37 perguntas respondíveis foram respondidas</a:t>
             </a:r>
             <a:endParaRPr lang="en-US" sz="1100" dirty="0"/>
           </a:p>
@@ -11653,7 +11800,7 @@
                 <a:ea typeface="Verdana" pitchFamily="34" charset="-122"/>
                 <a:cs typeface="Verdana" pitchFamily="34" charset="-120"/>
               </a:rPr>
-              <a:t>75,0%</a:t>
+              <a:t>100%</a:t>
             </a:r>
             <a:endParaRPr lang="en-US" sz="3400" dirty="0"/>
           </a:p>
@@ -11692,7 +11839,7 @@
                 <a:ea typeface="Verdana" pitchFamily="34" charset="-122"/>
                 <a:cs typeface="Verdana" pitchFamily="34" charset="-120"/>
               </a:rPr>
-              <a:t>das perguntas fora do material foram recusadas</a:t>
+              <a:t>das 8 perguntas fora do material foram recusadas</a:t>
             </a:r>
             <a:endParaRPr lang="en-US" sz="1100" dirty="0"/>
           </a:p>

--- a/PermaneIA-Apresentacao.pptx
+++ b/PermaneIA-Apresentacao.pptx
@@ -11734,7 +11734,7 @@
                 <a:ea typeface="Verdana" pitchFamily="34" charset="-122"/>
                 <a:cs typeface="Verdana" pitchFamily="34" charset="-120"/>
               </a:rPr>
-              <a:t>das 37 perguntas respondíveis foram respondidas</a:t>
+              <a:t>das 41 perguntas respondíveis foram respondidas</a:t>
             </a:r>
             <a:endParaRPr lang="en-US" sz="1100" dirty="0"/>
           </a:p>
